--- a/public/dontstop-lecture/proposal-institution.pptx
+++ b/public/dontstop-lecture/proposal-institution.pptx
@@ -1940,7 +1940,7 @@
       </p:sp>
       <p:pic>
         <p:nvPicPr>
-          <p:cNvPr id="4" name="Image 0" descr="E:\하랑\돈스탑잉글리시\docs\portfolio-proposal\assets\community-learning_ai.png">    </p:cNvPr>
+          <p:cNvPr id="4" name="Image 0" descr="E:\하랑\돈스탑잉글리시\docs\portfolio-proposal\assets\group-880-815_ai.png">    </p:cNvPr>
           <p:cNvPicPr>
             <a:picLocks noChangeAspect="1"/>
           </p:cNvPicPr>
@@ -1948,8 +1948,9 @@
         </p:nvPicPr>
         <p:blipFill>
           <a:blip r:embed="rId1"/>
-          <a:srcRect l="19793" r="19793" t="0" b="0"/>
-          <a:stretch/>
+          <a:stretch>
+            <a:fillRect/>
+          </a:stretch>
         </p:blipFill>
         <p:spPr>
           <a:xfrm>
@@ -2517,7 +2518,7 @@
                 <a:ea typeface="Malgun Gothic" pitchFamily="34" charset="-122"/>
                 <a:cs typeface="Malgun Gothic" pitchFamily="34" charset="-120"/>
               </a:rPr>
-              <a:t>OPERATION CHECK</a:t>
+              <a:t>READY TO RUN</a:t>
             </a:r>
             <a:endParaRPr lang="en-US" sz="1320" dirty="0"/>
           </a:p>
@@ -2532,26 +2533,26 @@
         <p:spPr>
           <a:xfrm>
             <a:off x="609600" y="1120140"/>
-            <a:ext cx="10820400" cy="1181100"/>
-          </a:xfrm>
-          <a:prstGeom prst="rect">
-            <a:avLst/>
-          </a:prstGeom>
-          <a:noFill/>
-          <a:ln/>
-        </p:spPr>
-        <p:txBody>
-          <a:bodyPr wrap="square" lIns="0" tIns="0" rIns="0" bIns="0" rtlCol="0" anchor="ctr"/>
-          <a:lstStyle/>
-          <a:p>
-            <a:pPr indent="0" marL="0">
-              <a:spcAft>
-                <a:spcPts val="800"/>
-              </a:spcAft>
-              <a:buNone/>
-            </a:pPr>
-            <a:r>
-              <a:rPr lang="en-US" sz="3840" b="1" dirty="0">
+            <a:ext cx="10820400" cy="1089660"/>
+          </a:xfrm>
+          <a:prstGeom prst="rect">
+            <a:avLst/>
+          </a:prstGeom>
+          <a:noFill/>
+          <a:ln/>
+        </p:spPr>
+        <p:txBody>
+          <a:bodyPr wrap="square" lIns="0" tIns="0" rIns="0" bIns="0" rtlCol="0" anchor="ctr"/>
+          <a:lstStyle/>
+          <a:p>
+            <a:pPr indent="0" marL="0">
+              <a:spcAft>
+                <a:spcPts val="800"/>
+              </a:spcAft>
+              <a:buNone/>
+            </a:pPr>
+            <a:r>
+              <a:rPr lang="en-US" sz="3960" b="1" dirty="0">
                 <a:solidFill>
                   <a:srgbClr val="132D40"/>
                 </a:solidFill>
@@ -2559,41 +2560,66 @@
                 <a:ea typeface="Malgun Gothic" pitchFamily="34" charset="-122"/>
                 <a:cs typeface="Malgun Gothic" pitchFamily="34" charset="-120"/>
               </a:rPr>
-              <a:t>기관과 강사가 함께 준비합니다</a:t>
-            </a:r>
-            <a:endParaRPr lang="en-US" sz="3840" dirty="0"/>
-          </a:p>
-        </p:txBody>
-      </p:sp>
-      <p:sp>
-        <p:nvSpPr>
-          <p:cNvPr id="5" name="Text 3"/>
-          <p:cNvSpPr/>
-          <p:nvPr/>
-        </p:nvSpPr>
-        <p:spPr>
-          <a:xfrm>
-            <a:off x="609600" y="2331720"/>
-            <a:ext cx="10744200" cy="609600"/>
-          </a:xfrm>
-          <a:prstGeom prst="rect">
-            <a:avLst/>
-          </a:prstGeom>
-          <a:noFill/>
-          <a:ln/>
-        </p:spPr>
-        <p:txBody>
-          <a:bodyPr wrap="square" lIns="0" tIns="0" rIns="0" bIns="0" rtlCol="0" anchor="ctr"/>
-          <a:lstStyle/>
-          <a:p>
-            <a:pPr indent="0" marL="0">
-              <a:spcAft>
-                <a:spcPts val="800"/>
-              </a:spcAft>
-              <a:buNone/>
-            </a:pPr>
-            <a:r>
-              <a:rPr lang="en-US" sz="1620" dirty="0">
+              <a:t>기관 담당자가 확인할 운영 항목</a:t>
+            </a:r>
+            <a:endParaRPr lang="en-US" sz="3960" dirty="0"/>
+          </a:p>
+        </p:txBody>
+      </p:sp>
+      <p:sp>
+        <p:nvSpPr>
+          <p:cNvPr id="5" name="Shape 3"/>
+          <p:cNvSpPr/>
+          <p:nvPr/>
+        </p:nvSpPr>
+        <p:spPr>
+          <a:xfrm>
+            <a:off x="609600" y="2202180"/>
+            <a:ext cx="647700" cy="45720"/>
+          </a:xfrm>
+          <a:prstGeom prst="rect">
+            <a:avLst/>
+          </a:prstGeom>
+          <a:solidFill>
+            <a:srgbClr val="DC955B"/>
+          </a:solidFill>
+          <a:ln w="12700">
+            <a:solidFill>
+              <a:srgbClr val="DC955B"/>
+            </a:solidFill>
+            <a:prstDash val="solid"/>
+          </a:ln>
+        </p:spPr>
+      </p:sp>
+      <p:sp>
+        <p:nvSpPr>
+          <p:cNvPr id="6" name="Text 4"/>
+          <p:cNvSpPr/>
+          <p:nvPr/>
+        </p:nvSpPr>
+        <p:spPr>
+          <a:xfrm>
+            <a:off x="609600" y="2484120"/>
+            <a:ext cx="10744200" cy="640080"/>
+          </a:xfrm>
+          <a:prstGeom prst="rect">
+            <a:avLst/>
+          </a:prstGeom>
+          <a:noFill/>
+          <a:ln/>
+        </p:spPr>
+        <p:txBody>
+          <a:bodyPr wrap="square" lIns="0" tIns="0" rIns="0" bIns="0" rtlCol="0" anchor="ctr"/>
+          <a:lstStyle/>
+          <a:p>
+            <a:pPr indent="0" marL="0">
+              <a:spcAft>
+                <a:spcPts val="800"/>
+              </a:spcAft>
+              <a:buNone/>
+            </a:pPr>
+            <a:r>
+              <a:rPr lang="en-US" sz="1800" dirty="0">
                 <a:solidFill>
                   <a:srgbClr val="62727A"/>
                 </a:solidFill>
@@ -2601,22 +2627,22 @@
                 <a:ea typeface="Malgun Gothic" pitchFamily="34" charset="-122"/>
                 <a:cs typeface="Malgun Gothic" pitchFamily="34" charset="-120"/>
               </a:rPr>
-              <a:t>인원, 장소, 장비, 교재와 필요한 참여 지원을 확인한 뒤 운영 조건을 정합니다.</a:t>
-            </a:r>
-            <a:endParaRPr lang="en-US" sz="1620" dirty="0"/>
-          </a:p>
-        </p:txBody>
-      </p:sp>
-      <p:sp>
-        <p:nvSpPr>
-          <p:cNvPr id="6" name="Shape 4"/>
-          <p:cNvSpPr/>
-          <p:nvPr/>
-        </p:nvSpPr>
-        <p:spPr>
-          <a:xfrm>
-            <a:off x="609600" y="3208020"/>
-            <a:ext cx="5257800" cy="2712720"/>
+              <a:t>상담 때 정한 준비 분담을 바탕으로 최종 진행안을 확정합니다.</a:t>
+            </a:r>
+            <a:endParaRPr lang="en-US" sz="1800" dirty="0"/>
+          </a:p>
+        </p:txBody>
+      </p:sp>
+      <p:sp>
+        <p:nvSpPr>
+          <p:cNvPr id="7" name="Shape 5"/>
+          <p:cNvSpPr/>
+          <p:nvPr/>
+        </p:nvSpPr>
+        <p:spPr>
+          <a:xfrm>
+            <a:off x="609600" y="3253740"/>
+            <a:ext cx="5334000" cy="2606040"/>
           </a:xfrm>
           <a:prstGeom prst="rect">
             <a:avLst/>
@@ -2634,14 +2660,308 @@
       </p:sp>
       <p:sp>
         <p:nvSpPr>
-          <p:cNvPr id="7" name="Shape 5"/>
-          <p:cNvSpPr/>
-          <p:nvPr/>
-        </p:nvSpPr>
-        <p:spPr>
-          <a:xfrm>
-            <a:off x="6248400" y="3208020"/>
-            <a:ext cx="5334000" cy="2712720"/>
+          <p:cNvPr id="8" name="Text 6"/>
+          <p:cNvSpPr/>
+          <p:nvPr/>
+        </p:nvSpPr>
+        <p:spPr>
+          <a:xfrm>
+            <a:off x="876300" y="3467100"/>
+            <a:ext cx="4800600" cy="441960"/>
+          </a:xfrm>
+          <a:prstGeom prst="rect">
+            <a:avLst/>
+          </a:prstGeom>
+          <a:noFill/>
+          <a:ln/>
+        </p:spPr>
+        <p:txBody>
+          <a:bodyPr wrap="square" lIns="0" tIns="0" rIns="0" bIns="0" rtlCol="0" anchor="ctr"/>
+          <a:lstStyle/>
+          <a:p>
+            <a:pPr indent="0" marL="0">
+              <a:spcAft>
+                <a:spcPts val="800"/>
+              </a:spcAft>
+              <a:buNone/>
+            </a:pPr>
+            <a:r>
+              <a:rPr lang="en-US" sz="2220" b="1" dirty="0">
+                <a:solidFill>
+                  <a:srgbClr val="FFFFFF"/>
+                </a:solidFill>
+                <a:latin typeface="Malgun Gothic" pitchFamily="34" charset="0"/>
+                <a:ea typeface="Malgun Gothic" pitchFamily="34" charset="-122"/>
+                <a:cs typeface="Malgun Gothic" pitchFamily="34" charset="-120"/>
+              </a:rPr>
+              <a:t>기관에서 확인</a:t>
+            </a:r>
+            <a:endParaRPr lang="en-US" sz="2220" dirty="0"/>
+          </a:p>
+        </p:txBody>
+      </p:sp>
+      <p:sp>
+        <p:nvSpPr>
+          <p:cNvPr id="9" name="Text 7"/>
+          <p:cNvSpPr/>
+          <p:nvPr/>
+        </p:nvSpPr>
+        <p:spPr>
+          <a:xfrm>
+            <a:off x="876300" y="4152900"/>
+            <a:ext cx="495300" cy="381000"/>
+          </a:xfrm>
+          <a:prstGeom prst="rect">
+            <a:avLst/>
+          </a:prstGeom>
+          <a:noFill/>
+          <a:ln/>
+        </p:spPr>
+        <p:txBody>
+          <a:bodyPr wrap="square" lIns="0" tIns="0" rIns="0" bIns="0" rtlCol="0" anchor="ctr"/>
+          <a:lstStyle/>
+          <a:p>
+            <a:pPr indent="0" marL="0">
+              <a:spcAft>
+                <a:spcPts val="800"/>
+              </a:spcAft>
+              <a:buNone/>
+            </a:pPr>
+            <a:r>
+              <a:rPr lang="en-US" sz="1440" b="1" dirty="0">
+                <a:solidFill>
+                  <a:srgbClr val="DC955B"/>
+                </a:solidFill>
+                <a:latin typeface="Malgun Gothic" pitchFamily="34" charset="0"/>
+                <a:ea typeface="Malgun Gothic" pitchFamily="34" charset="-122"/>
+                <a:cs typeface="Malgun Gothic" pitchFamily="34" charset="-120"/>
+              </a:rPr>
+              <a:t>01</a:t>
+            </a:r>
+            <a:endParaRPr lang="en-US" sz="1440" dirty="0"/>
+          </a:p>
+        </p:txBody>
+      </p:sp>
+      <p:sp>
+        <p:nvSpPr>
+          <p:cNvPr id="10" name="Text 8"/>
+          <p:cNvSpPr/>
+          <p:nvPr/>
+        </p:nvSpPr>
+        <p:spPr>
+          <a:xfrm>
+            <a:off x="1447800" y="4130040"/>
+            <a:ext cx="4191000" cy="457200"/>
+          </a:xfrm>
+          <a:prstGeom prst="rect">
+            <a:avLst/>
+          </a:prstGeom>
+          <a:noFill/>
+          <a:ln/>
+        </p:spPr>
+        <p:txBody>
+          <a:bodyPr wrap="square" lIns="0" tIns="0" rIns="0" bIns="0" rtlCol="0" anchor="ctr"/>
+          <a:lstStyle/>
+          <a:p>
+            <a:pPr indent="0" marL="0">
+              <a:spcAft>
+                <a:spcPts val="800"/>
+              </a:spcAft>
+              <a:buNone/>
+            </a:pPr>
+            <a:r>
+              <a:rPr lang="en-US" sz="1680" dirty="0">
+                <a:solidFill>
+                  <a:srgbClr val="FFFFFF"/>
+                </a:solidFill>
+                <a:latin typeface="Malgun Gothic" pitchFamily="34" charset="0"/>
+                <a:ea typeface="Malgun Gothic" pitchFamily="34" charset="-122"/>
+                <a:cs typeface="Malgun Gothic" pitchFamily="34" charset="-120"/>
+              </a:rPr>
+              <a:t>참가 인원·연령대와 모집 안내</a:t>
+            </a:r>
+            <a:endParaRPr lang="en-US" sz="1680" dirty="0"/>
+          </a:p>
+        </p:txBody>
+      </p:sp>
+      <p:sp>
+        <p:nvSpPr>
+          <p:cNvPr id="11" name="Text 9"/>
+          <p:cNvSpPr/>
+          <p:nvPr/>
+        </p:nvSpPr>
+        <p:spPr>
+          <a:xfrm>
+            <a:off x="876300" y="4640580"/>
+            <a:ext cx="495300" cy="381000"/>
+          </a:xfrm>
+          <a:prstGeom prst="rect">
+            <a:avLst/>
+          </a:prstGeom>
+          <a:noFill/>
+          <a:ln/>
+        </p:spPr>
+        <p:txBody>
+          <a:bodyPr wrap="square" lIns="0" tIns="0" rIns="0" bIns="0" rtlCol="0" anchor="ctr"/>
+          <a:lstStyle/>
+          <a:p>
+            <a:pPr indent="0" marL="0">
+              <a:spcAft>
+                <a:spcPts val="800"/>
+              </a:spcAft>
+              <a:buNone/>
+            </a:pPr>
+            <a:r>
+              <a:rPr lang="en-US" sz="1440" b="1" dirty="0">
+                <a:solidFill>
+                  <a:srgbClr val="DC955B"/>
+                </a:solidFill>
+                <a:latin typeface="Malgun Gothic" pitchFamily="34" charset="0"/>
+                <a:ea typeface="Malgun Gothic" pitchFamily="34" charset="-122"/>
+                <a:cs typeface="Malgun Gothic" pitchFamily="34" charset="-120"/>
+              </a:rPr>
+              <a:t>02</a:t>
+            </a:r>
+            <a:endParaRPr lang="en-US" sz="1440" dirty="0"/>
+          </a:p>
+        </p:txBody>
+      </p:sp>
+      <p:sp>
+        <p:nvSpPr>
+          <p:cNvPr id="12" name="Text 10"/>
+          <p:cNvSpPr/>
+          <p:nvPr/>
+        </p:nvSpPr>
+        <p:spPr>
+          <a:xfrm>
+            <a:off x="1447800" y="4617720"/>
+            <a:ext cx="4191000" cy="457200"/>
+          </a:xfrm>
+          <a:prstGeom prst="rect">
+            <a:avLst/>
+          </a:prstGeom>
+          <a:noFill/>
+          <a:ln/>
+        </p:spPr>
+        <p:txBody>
+          <a:bodyPr wrap="square" lIns="0" tIns="0" rIns="0" bIns="0" rtlCol="0" anchor="ctr"/>
+          <a:lstStyle/>
+          <a:p>
+            <a:pPr indent="0" marL="0">
+              <a:spcAft>
+                <a:spcPts val="800"/>
+              </a:spcAft>
+              <a:buNone/>
+            </a:pPr>
+            <a:r>
+              <a:rPr lang="en-US" sz="1680" dirty="0">
+                <a:solidFill>
+                  <a:srgbClr val="FFFFFF"/>
+                </a:solidFill>
+                <a:latin typeface="Malgun Gothic" pitchFamily="34" charset="0"/>
+                <a:ea typeface="Malgun Gothic" pitchFamily="34" charset="-122"/>
+                <a:cs typeface="Malgun Gothic" pitchFamily="34" charset="-120"/>
+              </a:rPr>
+              <a:t>자리 배치·음향·이동 동선</a:t>
+            </a:r>
+            <a:endParaRPr lang="en-US" sz="1680" dirty="0"/>
+          </a:p>
+        </p:txBody>
+      </p:sp>
+      <p:sp>
+        <p:nvSpPr>
+          <p:cNvPr id="13" name="Text 11"/>
+          <p:cNvSpPr/>
+          <p:nvPr/>
+        </p:nvSpPr>
+        <p:spPr>
+          <a:xfrm>
+            <a:off x="876300" y="5128260"/>
+            <a:ext cx="495300" cy="381000"/>
+          </a:xfrm>
+          <a:prstGeom prst="rect">
+            <a:avLst/>
+          </a:prstGeom>
+          <a:noFill/>
+          <a:ln/>
+        </p:spPr>
+        <p:txBody>
+          <a:bodyPr wrap="square" lIns="0" tIns="0" rIns="0" bIns="0" rtlCol="0" anchor="ctr"/>
+          <a:lstStyle/>
+          <a:p>
+            <a:pPr indent="0" marL="0">
+              <a:spcAft>
+                <a:spcPts val="800"/>
+              </a:spcAft>
+              <a:buNone/>
+            </a:pPr>
+            <a:r>
+              <a:rPr lang="en-US" sz="1440" b="1" dirty="0">
+                <a:solidFill>
+                  <a:srgbClr val="DC955B"/>
+                </a:solidFill>
+                <a:latin typeface="Malgun Gothic" pitchFamily="34" charset="0"/>
+                <a:ea typeface="Malgun Gothic" pitchFamily="34" charset="-122"/>
+                <a:cs typeface="Malgun Gothic" pitchFamily="34" charset="-120"/>
+              </a:rPr>
+              <a:t>03</a:t>
+            </a:r>
+            <a:endParaRPr lang="en-US" sz="1440" dirty="0"/>
+          </a:p>
+        </p:txBody>
+      </p:sp>
+      <p:sp>
+        <p:nvSpPr>
+          <p:cNvPr id="14" name="Text 12"/>
+          <p:cNvSpPr/>
+          <p:nvPr/>
+        </p:nvSpPr>
+        <p:spPr>
+          <a:xfrm>
+            <a:off x="1447800" y="5105400"/>
+            <a:ext cx="4191000" cy="457200"/>
+          </a:xfrm>
+          <a:prstGeom prst="rect">
+            <a:avLst/>
+          </a:prstGeom>
+          <a:noFill/>
+          <a:ln/>
+        </p:spPr>
+        <p:txBody>
+          <a:bodyPr wrap="square" lIns="0" tIns="0" rIns="0" bIns="0" rtlCol="0" anchor="ctr"/>
+          <a:lstStyle/>
+          <a:p>
+            <a:pPr indent="0" marL="0">
+              <a:spcAft>
+                <a:spcPts val="800"/>
+              </a:spcAft>
+              <a:buNone/>
+            </a:pPr>
+            <a:r>
+              <a:rPr lang="en-US" sz="1680" dirty="0">
+                <a:solidFill>
+                  <a:srgbClr val="FFFFFF"/>
+                </a:solidFill>
+                <a:latin typeface="Malgun Gothic" pitchFamily="34" charset="0"/>
+                <a:ea typeface="Malgun Gothic" pitchFamily="34" charset="-122"/>
+                <a:cs typeface="Malgun Gothic" pitchFamily="34" charset="-120"/>
+              </a:rPr>
+              <a:t>교재 인쇄·휴식과 참여 지원</a:t>
+            </a:r>
+            <a:endParaRPr lang="en-US" sz="1680" dirty="0"/>
+          </a:p>
+        </p:txBody>
+      </p:sp>
+      <p:sp>
+        <p:nvSpPr>
+          <p:cNvPr id="15" name="Shape 13"/>
+          <p:cNvSpPr/>
+          <p:nvPr/>
+        </p:nvSpPr>
+        <p:spPr>
+          <a:xfrm>
+            <a:off x="6248400" y="3253740"/>
+            <a:ext cx="5334000" cy="2606040"/>
           </a:xfrm>
           <a:prstGeom prst="rect">
             <a:avLst/>
@@ -2659,157 +2979,33 @@
       </p:sp>
       <p:sp>
         <p:nvSpPr>
-          <p:cNvPr id="8" name="Text 6"/>
-          <p:cNvSpPr/>
-          <p:nvPr/>
-        </p:nvSpPr>
-        <p:spPr>
-          <a:xfrm>
-            <a:off x="883920" y="3421380"/>
-            <a:ext cx="4648200" cy="571500"/>
-          </a:xfrm>
-          <a:prstGeom prst="rect">
-            <a:avLst/>
-          </a:prstGeom>
-          <a:noFill/>
-          <a:ln/>
-        </p:spPr>
-        <p:txBody>
-          <a:bodyPr wrap="square" lIns="0" tIns="0" rIns="0" bIns="0" rtlCol="0" anchor="ctr"/>
-          <a:lstStyle/>
-          <a:p>
-            <a:pPr indent="0" marL="0">
-              <a:spcAft>
-                <a:spcPts val="800"/>
-              </a:spcAft>
-              <a:buNone/>
-            </a:pPr>
-            <a:r>
-              <a:rPr lang="en-US" sz="2280" b="1" dirty="0">
-                <a:solidFill>
-                  <a:srgbClr val="FFFFFF"/>
-                </a:solidFill>
-                <a:latin typeface="Malgun Gothic" pitchFamily="34" charset="0"/>
-                <a:ea typeface="Malgun Gothic" pitchFamily="34" charset="-122"/>
-                <a:cs typeface="Malgun Gothic" pitchFamily="34" charset="-120"/>
-              </a:rPr>
-              <a:t>기관 준비</a:t>
-            </a:r>
-            <a:endParaRPr lang="en-US" sz="2280" dirty="0"/>
-          </a:p>
-        </p:txBody>
-      </p:sp>
-      <p:sp>
-        <p:nvSpPr>
-          <p:cNvPr id="9" name="Text 7"/>
-          <p:cNvSpPr/>
-          <p:nvPr/>
-        </p:nvSpPr>
-        <p:spPr>
-          <a:xfrm>
-            <a:off x="883920" y="4259580"/>
-            <a:ext cx="4648200" cy="1341120"/>
-          </a:xfrm>
-          <a:prstGeom prst="rect">
-            <a:avLst/>
-          </a:prstGeom>
-          <a:noFill/>
-          <a:ln/>
-        </p:spPr>
-        <p:txBody>
-          <a:bodyPr wrap="square" lIns="0" tIns="0" rIns="0" bIns="0" rtlCol="0" anchor="ctr"/>
-          <a:lstStyle/>
-          <a:p>
-            <a:pPr indent="0" marL="0">
-              <a:spcAft>
-                <a:spcPts val="800"/>
-              </a:spcAft>
-              <a:buNone/>
-            </a:pPr>
-            <a:r>
-              <a:rPr lang="en-US" sz="1800" dirty="0">
-                <a:solidFill>
-                  <a:srgbClr val="CAD8DB"/>
-                </a:solidFill>
-                <a:latin typeface="Malgun Gothic" pitchFamily="34" charset="0"/>
-                <a:ea typeface="Malgun Gothic" pitchFamily="34" charset="-122"/>
-                <a:cs typeface="Malgun Gothic" pitchFamily="34" charset="-120"/>
-              </a:rPr>
-              <a:t>참가자 모집과 안내</a:t>
-            </a:r>
-            <a:endParaRPr lang="en-US" sz="1800" dirty="0"/>
-          </a:p>
-          <a:p>
-            <a:pPr indent="0" marL="0">
-              <a:spcAft>
-                <a:spcPts val="800"/>
-              </a:spcAft>
-              <a:buNone/>
-            </a:pPr>
-            <a:r>
-              <a:rPr lang="en-US" sz="1800" dirty="0">
-                <a:solidFill>
-                  <a:srgbClr val="CAD8DB"/>
-                </a:solidFill>
-                <a:latin typeface="Malgun Gothic" pitchFamily="34" charset="0"/>
-                <a:ea typeface="Malgun Gothic" pitchFamily="34" charset="-122"/>
-                <a:cs typeface="Malgun Gothic" pitchFamily="34" charset="-120"/>
-              </a:rPr>
-              <a:t>공간과 접근 동선</a:t>
-            </a:r>
-            <a:endParaRPr lang="en-US" sz="1800" dirty="0"/>
-          </a:p>
-          <a:p>
-            <a:pPr indent="0" marL="0">
-              <a:spcAft>
-                <a:spcPts val="800"/>
-              </a:spcAft>
-              <a:buNone/>
-            </a:pPr>
-            <a:r>
-              <a:rPr lang="en-US" sz="1800" dirty="0">
-                <a:solidFill>
-                  <a:srgbClr val="CAD8DB"/>
-                </a:solidFill>
-                <a:latin typeface="Malgun Gothic" pitchFamily="34" charset="0"/>
-                <a:ea typeface="Malgun Gothic" pitchFamily="34" charset="-122"/>
-                <a:cs typeface="Malgun Gothic" pitchFamily="34" charset="-120"/>
-              </a:rPr>
-              <a:t>장비와 필요한 참여 지원</a:t>
-            </a:r>
-            <a:endParaRPr lang="en-US" sz="1800" dirty="0"/>
-          </a:p>
-        </p:txBody>
-      </p:sp>
-      <p:sp>
-        <p:nvSpPr>
-          <p:cNvPr id="10" name="Text 8"/>
-          <p:cNvSpPr/>
-          <p:nvPr/>
-        </p:nvSpPr>
-        <p:spPr>
-          <a:xfrm>
-            <a:off x="6522720" y="3421380"/>
-            <a:ext cx="4724400" cy="571500"/>
-          </a:xfrm>
-          <a:prstGeom prst="rect">
-            <a:avLst/>
-          </a:prstGeom>
-          <a:noFill/>
-          <a:ln/>
-        </p:spPr>
-        <p:txBody>
-          <a:bodyPr wrap="square" lIns="0" tIns="0" rIns="0" bIns="0" rtlCol="0" anchor="ctr"/>
-          <a:lstStyle/>
-          <a:p>
-            <a:pPr indent="0" marL="0">
-              <a:spcAft>
-                <a:spcPts val="800"/>
-              </a:spcAft>
-              <a:buNone/>
-            </a:pPr>
-            <a:r>
-              <a:rPr lang="en-US" sz="2280" b="1" dirty="0">
+          <p:cNvPr id="16" name="Text 14"/>
+          <p:cNvSpPr/>
+          <p:nvPr/>
+        </p:nvSpPr>
+        <p:spPr>
+          <a:xfrm>
+            <a:off x="6515100" y="3467100"/>
+            <a:ext cx="4800600" cy="441960"/>
+          </a:xfrm>
+          <a:prstGeom prst="rect">
+            <a:avLst/>
+          </a:prstGeom>
+          <a:noFill/>
+          <a:ln/>
+        </p:spPr>
+        <p:txBody>
+          <a:bodyPr wrap="square" lIns="0" tIns="0" rIns="0" bIns="0" rtlCol="0" anchor="ctr"/>
+          <a:lstStyle/>
+          <a:p>
+            <a:pPr indent="0" marL="0">
+              <a:spcAft>
+                <a:spcPts val="800"/>
+              </a:spcAft>
+              <a:buNone/>
+            </a:pPr>
+            <a:r>
+              <a:rPr lang="en-US" sz="2220" b="1" dirty="0">
                 <a:solidFill>
                   <a:srgbClr val="227C78"/>
                 </a:solidFill>
@@ -2817,41 +3013,83 @@
                 <a:ea typeface="Malgun Gothic" pitchFamily="34" charset="-122"/>
                 <a:cs typeface="Malgun Gothic" pitchFamily="34" charset="-120"/>
               </a:rPr>
-              <a:t>강사 준비</a:t>
-            </a:r>
-            <a:endParaRPr lang="en-US" sz="2280" dirty="0"/>
-          </a:p>
-        </p:txBody>
-      </p:sp>
-      <p:sp>
-        <p:nvSpPr>
-          <p:cNvPr id="11" name="Text 9"/>
-          <p:cNvSpPr/>
-          <p:nvPr/>
-        </p:nvSpPr>
-        <p:spPr>
-          <a:xfrm>
-            <a:off x="6522720" y="4259580"/>
-            <a:ext cx="4724400" cy="1341120"/>
-          </a:xfrm>
-          <a:prstGeom prst="rect">
-            <a:avLst/>
-          </a:prstGeom>
-          <a:noFill/>
-          <a:ln/>
-        </p:spPr>
-        <p:txBody>
-          <a:bodyPr wrap="square" lIns="0" tIns="0" rIns="0" bIns="0" rtlCol="0" anchor="ctr"/>
-          <a:lstStyle/>
-          <a:p>
-            <a:pPr indent="0" marL="0">
-              <a:spcAft>
-                <a:spcPts val="800"/>
-              </a:spcAft>
-              <a:buNone/>
-            </a:pPr>
-            <a:r>
-              <a:rPr lang="en-US" sz="1800" dirty="0">
+              <a:t>강사가 준비</a:t>
+            </a:r>
+            <a:endParaRPr lang="en-US" sz="2220" dirty="0"/>
+          </a:p>
+        </p:txBody>
+      </p:sp>
+      <p:sp>
+        <p:nvSpPr>
+          <p:cNvPr id="17" name="Text 15"/>
+          <p:cNvSpPr/>
+          <p:nvPr/>
+        </p:nvSpPr>
+        <p:spPr>
+          <a:xfrm>
+            <a:off x="6515100" y="4152900"/>
+            <a:ext cx="495300" cy="381000"/>
+          </a:xfrm>
+          <a:prstGeom prst="rect">
+            <a:avLst/>
+          </a:prstGeom>
+          <a:noFill/>
+          <a:ln/>
+        </p:spPr>
+        <p:txBody>
+          <a:bodyPr wrap="square" lIns="0" tIns="0" rIns="0" bIns="0" rtlCol="0" anchor="ctr"/>
+          <a:lstStyle/>
+          <a:p>
+            <a:pPr indent="0" marL="0">
+              <a:spcAft>
+                <a:spcPts val="800"/>
+              </a:spcAft>
+              <a:buNone/>
+            </a:pPr>
+            <a:r>
+              <a:rPr lang="en-US" sz="1440" b="1" dirty="0">
+                <a:solidFill>
+                  <a:srgbClr val="227C78"/>
+                </a:solidFill>
+                <a:latin typeface="Malgun Gothic" pitchFamily="34" charset="0"/>
+                <a:ea typeface="Malgun Gothic" pitchFamily="34" charset="-122"/>
+                <a:cs typeface="Malgun Gothic" pitchFamily="34" charset="-120"/>
+              </a:rPr>
+              <a:t>01</a:t>
+            </a:r>
+            <a:endParaRPr lang="en-US" sz="1440" dirty="0"/>
+          </a:p>
+        </p:txBody>
+      </p:sp>
+      <p:sp>
+        <p:nvSpPr>
+          <p:cNvPr id="18" name="Text 16"/>
+          <p:cNvSpPr/>
+          <p:nvPr/>
+        </p:nvSpPr>
+        <p:spPr>
+          <a:xfrm>
+            <a:off x="7086600" y="4130040"/>
+            <a:ext cx="4191000" cy="457200"/>
+          </a:xfrm>
+          <a:prstGeom prst="rect">
+            <a:avLst/>
+          </a:prstGeom>
+          <a:noFill/>
+          <a:ln/>
+        </p:spPr>
+        <p:txBody>
+          <a:bodyPr wrap="square" lIns="0" tIns="0" rIns="0" bIns="0" rtlCol="0" anchor="ctr"/>
+          <a:lstStyle/>
+          <a:p>
+            <a:pPr indent="0" marL="0">
+              <a:spcAft>
+                <a:spcPts val="800"/>
+              </a:spcAft>
+              <a:buNone/>
+            </a:pPr>
+            <a:r>
+              <a:rPr lang="en-US" sz="1680" dirty="0">
                 <a:solidFill>
                   <a:srgbClr val="132D40"/>
                 </a:solidFill>
@@ -2859,19 +3097,83 @@
                 <a:ea typeface="Malgun Gothic" pitchFamily="34" charset="-122"/>
                 <a:cs typeface="Malgun Gothic" pitchFamily="34" charset="-120"/>
               </a:rPr>
-              <a:t>대상에 맞춘 진행안</a:t>
-            </a:r>
-            <a:endParaRPr lang="en-US" sz="1800" dirty="0"/>
-          </a:p>
-          <a:p>
-            <a:pPr indent="0" marL="0">
-              <a:spcAft>
-                <a:spcPts val="800"/>
-              </a:spcAft>
-              <a:buNone/>
-            </a:pPr>
-            <a:r>
-              <a:rPr lang="en-US" sz="1800" dirty="0">
+              <a:t>선택 주제별 진행안과 표현 자료</a:t>
+            </a:r>
+            <a:endParaRPr lang="en-US" sz="1680" dirty="0"/>
+          </a:p>
+        </p:txBody>
+      </p:sp>
+      <p:sp>
+        <p:nvSpPr>
+          <p:cNvPr id="19" name="Text 17"/>
+          <p:cNvSpPr/>
+          <p:nvPr/>
+        </p:nvSpPr>
+        <p:spPr>
+          <a:xfrm>
+            <a:off x="6515100" y="4640580"/>
+            <a:ext cx="495300" cy="381000"/>
+          </a:xfrm>
+          <a:prstGeom prst="rect">
+            <a:avLst/>
+          </a:prstGeom>
+          <a:noFill/>
+          <a:ln/>
+        </p:spPr>
+        <p:txBody>
+          <a:bodyPr wrap="square" lIns="0" tIns="0" rIns="0" bIns="0" rtlCol="0" anchor="ctr"/>
+          <a:lstStyle/>
+          <a:p>
+            <a:pPr indent="0" marL="0">
+              <a:spcAft>
+                <a:spcPts val="800"/>
+              </a:spcAft>
+              <a:buNone/>
+            </a:pPr>
+            <a:r>
+              <a:rPr lang="en-US" sz="1440" b="1" dirty="0">
+                <a:solidFill>
+                  <a:srgbClr val="227C78"/>
+                </a:solidFill>
+                <a:latin typeface="Malgun Gothic" pitchFamily="34" charset="0"/>
+                <a:ea typeface="Malgun Gothic" pitchFamily="34" charset="-122"/>
+                <a:cs typeface="Malgun Gothic" pitchFamily="34" charset="-120"/>
+              </a:rPr>
+              <a:t>02</a:t>
+            </a:r>
+            <a:endParaRPr lang="en-US" sz="1440" dirty="0"/>
+          </a:p>
+        </p:txBody>
+      </p:sp>
+      <p:sp>
+        <p:nvSpPr>
+          <p:cNvPr id="20" name="Text 18"/>
+          <p:cNvSpPr/>
+          <p:nvPr/>
+        </p:nvSpPr>
+        <p:spPr>
+          <a:xfrm>
+            <a:off x="7086600" y="4617720"/>
+            <a:ext cx="4191000" cy="457200"/>
+          </a:xfrm>
+          <a:prstGeom prst="rect">
+            <a:avLst/>
+          </a:prstGeom>
+          <a:noFill/>
+          <a:ln/>
+        </p:spPr>
+        <p:txBody>
+          <a:bodyPr wrap="square" lIns="0" tIns="0" rIns="0" bIns="0" rtlCol="0" anchor="ctr"/>
+          <a:lstStyle/>
+          <a:p>
+            <a:pPr indent="0" marL="0">
+              <a:spcAft>
+                <a:spcPts val="800"/>
+              </a:spcAft>
+              <a:buNone/>
+            </a:pPr>
+            <a:r>
+              <a:rPr lang="en-US" sz="1680" dirty="0">
                 <a:solidFill>
                   <a:srgbClr val="132D40"/>
                 </a:solidFill>
@@ -2879,19 +3181,83 @@
                 <a:ea typeface="Malgun Gothic" pitchFamily="34" charset="-122"/>
                 <a:cs typeface="Malgun Gothic" pitchFamily="34" charset="-120"/>
               </a:rPr>
-              <a:t>큰 글씨 표현 자료</a:t>
-            </a:r>
-            <a:endParaRPr lang="en-US" sz="1800" dirty="0"/>
-          </a:p>
-          <a:p>
-            <a:pPr indent="0" marL="0">
-              <a:spcAft>
-                <a:spcPts val="800"/>
-              </a:spcAft>
-              <a:buNone/>
-            </a:pPr>
-            <a:r>
-              <a:rPr lang="en-US" sz="1800" dirty="0">
+              <a:t>따라 말하기·짝 활동 선택지</a:t>
+            </a:r>
+            <a:endParaRPr lang="en-US" sz="1680" dirty="0"/>
+          </a:p>
+        </p:txBody>
+      </p:sp>
+      <p:sp>
+        <p:nvSpPr>
+          <p:cNvPr id="21" name="Text 19"/>
+          <p:cNvSpPr/>
+          <p:nvPr/>
+        </p:nvSpPr>
+        <p:spPr>
+          <a:xfrm>
+            <a:off x="6515100" y="5128260"/>
+            <a:ext cx="495300" cy="381000"/>
+          </a:xfrm>
+          <a:prstGeom prst="rect">
+            <a:avLst/>
+          </a:prstGeom>
+          <a:noFill/>
+          <a:ln/>
+        </p:spPr>
+        <p:txBody>
+          <a:bodyPr wrap="square" lIns="0" tIns="0" rIns="0" bIns="0" rtlCol="0" anchor="ctr"/>
+          <a:lstStyle/>
+          <a:p>
+            <a:pPr indent="0" marL="0">
+              <a:spcAft>
+                <a:spcPts val="800"/>
+              </a:spcAft>
+              <a:buNone/>
+            </a:pPr>
+            <a:r>
+              <a:rPr lang="en-US" sz="1440" b="1" dirty="0">
+                <a:solidFill>
+                  <a:srgbClr val="227C78"/>
+                </a:solidFill>
+                <a:latin typeface="Malgun Gothic" pitchFamily="34" charset="0"/>
+                <a:ea typeface="Malgun Gothic" pitchFamily="34" charset="-122"/>
+                <a:cs typeface="Malgun Gothic" pitchFamily="34" charset="-120"/>
+              </a:rPr>
+              <a:t>03</a:t>
+            </a:r>
+            <a:endParaRPr lang="en-US" sz="1440" dirty="0"/>
+          </a:p>
+        </p:txBody>
+      </p:sp>
+      <p:sp>
+        <p:nvSpPr>
+          <p:cNvPr id="22" name="Text 20"/>
+          <p:cNvSpPr/>
+          <p:nvPr/>
+        </p:nvSpPr>
+        <p:spPr>
+          <a:xfrm>
+            <a:off x="7086600" y="5105400"/>
+            <a:ext cx="4191000" cy="457200"/>
+          </a:xfrm>
+          <a:prstGeom prst="rect">
+            <a:avLst/>
+          </a:prstGeom>
+          <a:noFill/>
+          <a:ln/>
+        </p:spPr>
+        <p:txBody>
+          <a:bodyPr wrap="square" lIns="0" tIns="0" rIns="0" bIns="0" rtlCol="0" anchor="ctr"/>
+          <a:lstStyle/>
+          <a:p>
+            <a:pPr indent="0" marL="0">
+              <a:spcAft>
+                <a:spcPts val="800"/>
+              </a:spcAft>
+              <a:buNone/>
+            </a:pPr>
+            <a:r>
+              <a:rPr lang="en-US" sz="1680" dirty="0">
                 <a:solidFill>
                   <a:srgbClr val="132D40"/>
                 </a:solidFill>
@@ -2899,15 +3265,57 @@
                 <a:ea typeface="Malgun Gothic" pitchFamily="34" charset="-122"/>
                 <a:cs typeface="Malgun Gothic" pitchFamily="34" charset="-120"/>
               </a:rPr>
-              <a:t>선택 활동과 마무리 자료</a:t>
-            </a:r>
-            <a:endParaRPr lang="en-US" sz="1800" dirty="0"/>
-          </a:p>
-        </p:txBody>
-      </p:sp>
-      <p:sp>
-        <p:nvSpPr>
-          <p:cNvPr id="12" name="Text 10"/>
+              <a:t>마무리 표현 카드와 결과 정리</a:t>
+            </a:r>
+            <a:endParaRPr lang="en-US" sz="1680" dirty="0"/>
+          </a:p>
+        </p:txBody>
+      </p:sp>
+      <p:sp>
+        <p:nvSpPr>
+          <p:cNvPr id="23" name="Text 21"/>
+          <p:cNvSpPr/>
+          <p:nvPr/>
+        </p:nvSpPr>
+        <p:spPr>
+          <a:xfrm>
+            <a:off x="609600" y="6111240"/>
+            <a:ext cx="10972800" cy="304800"/>
+          </a:xfrm>
+          <a:prstGeom prst="rect">
+            <a:avLst/>
+          </a:prstGeom>
+          <a:noFill/>
+          <a:ln/>
+        </p:spPr>
+        <p:txBody>
+          <a:bodyPr wrap="square" lIns="0" tIns="0" rIns="0" bIns="0" rtlCol="0" anchor="ctr"/>
+          <a:lstStyle/>
+          <a:p>
+            <a:pPr indent="0" marL="0">
+              <a:spcAft>
+                <a:spcPts val="800"/>
+              </a:spcAft>
+              <a:buNone/>
+            </a:pPr>
+            <a:r>
+              <a:rPr lang="en-US" sz="1500" b="1" dirty="0">
+                <a:solidFill>
+                  <a:srgbClr val="227C78"/>
+                </a:solidFill>
+                <a:latin typeface="Malgun Gothic" pitchFamily="34" charset="0"/>
+                <a:ea typeface="Malgun Gothic" pitchFamily="34" charset="-122"/>
+                <a:cs typeface="Malgun Gothic" pitchFamily="34" charset="-120"/>
+              </a:rPr>
+              <a:t>공통 확인 · 날짜 / 장소 / 인원 / 시간 / 교재 / 비용 / 변경 조건</a:t>
+            </a:r>
+            <a:endParaRPr lang="en-US" sz="1500" dirty="0"/>
+          </a:p>
+        </p:txBody>
+      </p:sp>
+      <p:sp>
+        <p:nvSpPr>
+          <p:cNvPr id="24" name="Text 22"/>
           <p:cNvSpPr/>
           <p:nvPr/>
         </p:nvSpPr>
@@ -2949,7 +3357,7 @@
       </p:sp>
       <p:sp>
         <p:nvSpPr>
-          <p:cNvPr id="13" name="Text 11"/>
+          <p:cNvPr id="25" name="Text 23"/>
           <p:cNvSpPr/>
           <p:nvPr/>
         </p:nvSpPr>
@@ -3099,7 +3507,7 @@
                 <a:ea typeface="Malgun Gothic" pitchFamily="34" charset="-122"/>
                 <a:cs typeface="Malgun Gothic" pitchFamily="34" charset="-120"/>
               </a:rPr>
-              <a:t>NEXT STEP</a:t>
+              <a:t>FOLLOW-UP &amp; AGREEMENT</a:t>
             </a:r>
             <a:endParaRPr lang="en-US" sz="1320" dirty="0"/>
           </a:p>
@@ -3114,26 +3522,26 @@
         <p:spPr>
           <a:xfrm>
             <a:off x="609600" y="1120140"/>
-            <a:ext cx="10820400" cy="1181100"/>
-          </a:xfrm>
-          <a:prstGeom prst="rect">
-            <a:avLst/>
-          </a:prstGeom>
-          <a:noFill/>
-          <a:ln/>
-        </p:spPr>
-        <p:txBody>
-          <a:bodyPr wrap="square" lIns="0" tIns="0" rIns="0" bIns="0" rtlCol="0" anchor="ctr"/>
-          <a:lstStyle/>
-          <a:p>
-            <a:pPr indent="0" marL="0">
-              <a:spcAft>
-                <a:spcPts val="800"/>
-              </a:spcAft>
-              <a:buNone/>
-            </a:pPr>
-            <a:r>
-              <a:rPr lang="en-US" sz="3840" b="1" dirty="0">
+            <a:ext cx="10820400" cy="1089660"/>
+          </a:xfrm>
+          <a:prstGeom prst="rect">
+            <a:avLst/>
+          </a:prstGeom>
+          <a:noFill/>
+          <a:ln/>
+        </p:spPr>
+        <p:txBody>
+          <a:bodyPr wrap="square" lIns="0" tIns="0" rIns="0" bIns="0" rtlCol="0" anchor="ctr"/>
+          <a:lstStyle/>
+          <a:p>
+            <a:pPr indent="0" marL="0">
+              <a:spcAft>
+                <a:spcPts val="800"/>
+              </a:spcAft>
+              <a:buNone/>
+            </a:pPr>
+            <a:r>
+              <a:rPr lang="en-US" sz="3960" b="1" dirty="0">
                 <a:solidFill>
                   <a:srgbClr val="132D40"/>
                 </a:solidFill>
@@ -3141,41 +3549,66 @@
                 <a:ea typeface="Malgun Gothic" pitchFamily="34" charset="-122"/>
                 <a:cs typeface="Malgun Gothic" pitchFamily="34" charset="-120"/>
               </a:rPr>
-              <a:t>상담부터 확정까지, 네 단계</a:t>
-            </a:r>
-            <a:endParaRPr lang="en-US" sz="3840" dirty="0"/>
-          </a:p>
-        </p:txBody>
-      </p:sp>
-      <p:sp>
-        <p:nvSpPr>
-          <p:cNvPr id="5" name="Text 3"/>
-          <p:cNvSpPr/>
-          <p:nvPr/>
-        </p:nvSpPr>
-        <p:spPr>
-          <a:xfrm>
-            <a:off x="609600" y="2331720"/>
-            <a:ext cx="10744200" cy="609600"/>
-          </a:xfrm>
-          <a:prstGeom prst="rect">
-            <a:avLst/>
-          </a:prstGeom>
-          <a:noFill/>
-          <a:ln/>
-        </p:spPr>
-        <p:txBody>
-          <a:bodyPr wrap="square" lIns="0" tIns="0" rIns="0" bIns="0" rtlCol="0" anchor="ctr"/>
-          <a:lstStyle/>
-          <a:p>
-            <a:pPr indent="0" marL="0">
-              <a:spcAft>
-                <a:spcPts val="800"/>
-              </a:spcAft>
-              <a:buNone/>
-            </a:pPr>
-            <a:r>
-              <a:rPr lang="en-US" sz="1620" dirty="0">
+              <a:t>수업의 끝에도, 자료가 남습니다</a:t>
+            </a:r>
+            <a:endParaRPr lang="en-US" sz="3960" dirty="0"/>
+          </a:p>
+        </p:txBody>
+      </p:sp>
+      <p:sp>
+        <p:nvSpPr>
+          <p:cNvPr id="5" name="Shape 3"/>
+          <p:cNvSpPr/>
+          <p:nvPr/>
+        </p:nvSpPr>
+        <p:spPr>
+          <a:xfrm>
+            <a:off x="609600" y="2202180"/>
+            <a:ext cx="647700" cy="45720"/>
+          </a:xfrm>
+          <a:prstGeom prst="rect">
+            <a:avLst/>
+          </a:prstGeom>
+          <a:solidFill>
+            <a:srgbClr val="DC955B"/>
+          </a:solidFill>
+          <a:ln w="12700">
+            <a:solidFill>
+              <a:srgbClr val="DC955B"/>
+            </a:solidFill>
+            <a:prstDash val="solid"/>
+          </a:ln>
+        </p:spPr>
+      </p:sp>
+      <p:sp>
+        <p:nvSpPr>
+          <p:cNvPr id="6" name="Text 4"/>
+          <p:cNvSpPr/>
+          <p:nvPr/>
+        </p:nvSpPr>
+        <p:spPr>
+          <a:xfrm>
+            <a:off x="609600" y="2484120"/>
+            <a:ext cx="10744200" cy="640080"/>
+          </a:xfrm>
+          <a:prstGeom prst="rect">
+            <a:avLst/>
+          </a:prstGeom>
+          <a:noFill/>
+          <a:ln/>
+        </p:spPr>
+        <p:txBody>
+          <a:bodyPr wrap="square" lIns="0" tIns="0" rIns="0" bIns="0" rtlCol="0" anchor="ctr"/>
+          <a:lstStyle/>
+          <a:p>
+            <a:pPr indent="0" marL="0">
+              <a:spcAft>
+                <a:spcPts val="800"/>
+              </a:spcAft>
+              <a:buNone/>
+            </a:pPr>
+            <a:r>
+              <a:rPr lang="en-US" sz="1800" dirty="0">
                 <a:solidFill>
                   <a:srgbClr val="62727A"/>
                 </a:solidFill>
@@ -3183,22 +3616,171 @@
                 <a:ea typeface="Malgun Gothic" pitchFamily="34" charset="-122"/>
                 <a:cs typeface="Malgun Gothic" pitchFamily="34" charset="-120"/>
               </a:rPr>
-              <a:t>비용은 시간, 인원, 교재와 이동 조건을 확인한 뒤 안내합니다.</a:t>
-            </a:r>
-            <a:endParaRPr lang="en-US" sz="1620" dirty="0"/>
-          </a:p>
-        </p:txBody>
-      </p:sp>
-      <p:sp>
-        <p:nvSpPr>
-          <p:cNvPr id="6" name="Shape 4"/>
-          <p:cNvSpPr/>
-          <p:nvPr/>
-        </p:nvSpPr>
-        <p:spPr>
-          <a:xfrm>
-            <a:off x="609600" y="3421380"/>
-            <a:ext cx="2590800" cy="1295400"/>
+              <a:t>학습 성과를 단정하지 않고 참여 경험과 운영 결과를 확인하는 구성을 제안합니다.</a:t>
+            </a:r>
+            <a:endParaRPr lang="en-US" sz="1800" dirty="0"/>
+          </a:p>
+        </p:txBody>
+      </p:sp>
+      <p:sp>
+        <p:nvSpPr>
+          <p:cNvPr id="7" name="Shape 5"/>
+          <p:cNvSpPr/>
+          <p:nvPr/>
+        </p:nvSpPr>
+        <p:spPr>
+          <a:xfrm>
+            <a:off x="609600" y="3337560"/>
+            <a:ext cx="6743700" cy="2567940"/>
+          </a:xfrm>
+          <a:prstGeom prst="rect">
+            <a:avLst/>
+          </a:prstGeom>
+          <a:solidFill>
+            <a:srgbClr val="132D40"/>
+          </a:solidFill>
+          <a:ln w="12700">
+            <a:solidFill>
+              <a:srgbClr val="132D40"/>
+            </a:solidFill>
+            <a:prstDash val="solid"/>
+          </a:ln>
+        </p:spPr>
+      </p:sp>
+      <p:sp>
+        <p:nvSpPr>
+          <p:cNvPr id="8" name="Text 6"/>
+          <p:cNvSpPr/>
+          <p:nvPr/>
+        </p:nvSpPr>
+        <p:spPr>
+          <a:xfrm>
+            <a:off x="883920" y="3558540"/>
+            <a:ext cx="6096000" cy="480060"/>
+          </a:xfrm>
+          <a:prstGeom prst="rect">
+            <a:avLst/>
+          </a:prstGeom>
+          <a:noFill/>
+          <a:ln/>
+        </p:spPr>
+        <p:txBody>
+          <a:bodyPr wrap="square" lIns="0" tIns="0" rIns="0" bIns="0" rtlCol="0" anchor="ctr"/>
+          <a:lstStyle/>
+          <a:p>
+            <a:pPr indent="0" marL="0">
+              <a:spcAft>
+                <a:spcPts val="800"/>
+              </a:spcAft>
+              <a:buNone/>
+            </a:pPr>
+            <a:r>
+              <a:rPr lang="en-US" sz="2400" b="1" dirty="0">
+                <a:solidFill>
+                  <a:srgbClr val="FFFFFF"/>
+                </a:solidFill>
+                <a:latin typeface="Malgun Gothic" pitchFamily="34" charset="0"/>
+                <a:ea typeface="Malgun Gothic" pitchFamily="34" charset="-122"/>
+                <a:cs typeface="Malgun Gothic" pitchFamily="34" charset="-120"/>
+              </a:rPr>
+              <a:t>참여 후 확인할 세 가지</a:t>
+            </a:r>
+            <a:endParaRPr lang="en-US" sz="2400" dirty="0"/>
+          </a:p>
+        </p:txBody>
+      </p:sp>
+      <p:sp>
+        <p:nvSpPr>
+          <p:cNvPr id="9" name="Text 7"/>
+          <p:cNvSpPr/>
+          <p:nvPr/>
+        </p:nvSpPr>
+        <p:spPr>
+          <a:xfrm>
+            <a:off x="883920" y="4290060"/>
+            <a:ext cx="6096000" cy="1371600"/>
+          </a:xfrm>
+          <a:prstGeom prst="rect">
+            <a:avLst/>
+          </a:prstGeom>
+          <a:noFill/>
+          <a:ln/>
+        </p:spPr>
+        <p:txBody>
+          <a:bodyPr wrap="square" lIns="0" tIns="0" rIns="0" bIns="0" rtlCol="0" anchor="ctr"/>
+          <a:lstStyle/>
+          <a:p>
+            <a:pPr indent="0" marL="0">
+              <a:spcAft>
+                <a:spcPts val="800"/>
+              </a:spcAft>
+              <a:buNone/>
+            </a:pPr>
+            <a:r>
+              <a:rPr lang="en-US" sz="1860" dirty="0">
+                <a:solidFill>
+                  <a:srgbClr val="FFFFFF"/>
+                </a:solidFill>
+                <a:latin typeface="Malgun Gothic" pitchFamily="34" charset="0"/>
+                <a:ea typeface="Malgun Gothic" pitchFamily="34" charset="-122"/>
+                <a:cs typeface="Malgun Gothic" pitchFamily="34" charset="-120"/>
+              </a:rPr>
+              <a:t>01  오늘 써본 표현 한 가지</a:t>
+            </a:r>
+            <a:endParaRPr lang="en-US" sz="1860" dirty="0"/>
+          </a:p>
+          <a:p>
+            <a:pPr indent="0" marL="0">
+              <a:spcAft>
+                <a:spcPts val="800"/>
+              </a:spcAft>
+              <a:buNone/>
+            </a:pPr>
+            <a:r>
+              <a:rPr lang="en-US" sz="1860" dirty="0">
+                <a:solidFill>
+                  <a:srgbClr val="FFFFFF"/>
+                </a:solidFill>
+                <a:latin typeface="Malgun Gothic" pitchFamily="34" charset="0"/>
+                <a:ea typeface="Malgun Gothic" pitchFamily="34" charset="-122"/>
+                <a:cs typeface="Malgun Gothic" pitchFamily="34" charset="-120"/>
+              </a:rPr>
+              <a:t>02  다음에 연습하고 싶은 장면</a:t>
+            </a:r>
+            <a:endParaRPr lang="en-US" sz="1860" dirty="0"/>
+          </a:p>
+          <a:p>
+            <a:pPr indent="0" marL="0">
+              <a:spcAft>
+                <a:spcPts val="800"/>
+              </a:spcAft>
+              <a:buNone/>
+            </a:pPr>
+            <a:r>
+              <a:rPr lang="en-US" sz="1860" dirty="0">
+                <a:solidFill>
+                  <a:srgbClr val="FFFFFF"/>
+                </a:solidFill>
+                <a:latin typeface="Malgun Gothic" pitchFamily="34" charset="0"/>
+                <a:ea typeface="Malgun Gothic" pitchFamily="34" charset="-122"/>
+                <a:cs typeface="Malgun Gothic" pitchFamily="34" charset="-120"/>
+              </a:rPr>
+              <a:t>03  글씨·속도·활동 방식의 편안함</a:t>
+            </a:r>
+            <a:endParaRPr lang="en-US" sz="1860" dirty="0"/>
+          </a:p>
+        </p:txBody>
+      </p:sp>
+      <p:sp>
+        <p:nvSpPr>
+          <p:cNvPr id="10" name="Shape 8"/>
+          <p:cNvSpPr/>
+          <p:nvPr/>
+        </p:nvSpPr>
+        <p:spPr>
+          <a:xfrm>
+            <a:off x="7696200" y="3337560"/>
+            <a:ext cx="3886200" cy="2567940"/>
           </a:xfrm>
           <a:prstGeom prst="rect">
             <a:avLst/>
@@ -3216,33 +3798,33 @@
       </p:sp>
       <p:sp>
         <p:nvSpPr>
-          <p:cNvPr id="7" name="Text 5"/>
-          <p:cNvSpPr/>
-          <p:nvPr/>
-        </p:nvSpPr>
-        <p:spPr>
-          <a:xfrm>
-            <a:off x="815340" y="3573780"/>
-            <a:ext cx="2179320" cy="304800"/>
-          </a:xfrm>
-          <a:prstGeom prst="rect">
-            <a:avLst/>
-          </a:prstGeom>
-          <a:noFill/>
-          <a:ln/>
-        </p:spPr>
-        <p:txBody>
-          <a:bodyPr wrap="square" lIns="0" tIns="0" rIns="0" bIns="0" rtlCol="0" anchor="ctr"/>
-          <a:lstStyle/>
-          <a:p>
-            <a:pPr indent="0" marL="0">
-              <a:spcAft>
-                <a:spcPts val="800"/>
-              </a:spcAft>
-              <a:buNone/>
-            </a:pPr>
-            <a:r>
-              <a:rPr lang="en-US" sz="1560" b="1" dirty="0">
+          <p:cNvPr id="11" name="Text 9"/>
+          <p:cNvSpPr/>
+          <p:nvPr/>
+        </p:nvSpPr>
+        <p:spPr>
+          <a:xfrm>
+            <a:off x="7962900" y="3558540"/>
+            <a:ext cx="3352800" cy="480060"/>
+          </a:xfrm>
+          <a:prstGeom prst="rect">
+            <a:avLst/>
+          </a:prstGeom>
+          <a:noFill/>
+          <a:ln/>
+        </p:spPr>
+        <p:txBody>
+          <a:bodyPr wrap="square" lIns="0" tIns="0" rIns="0" bIns="0" rtlCol="0" anchor="ctr"/>
+          <a:lstStyle/>
+          <a:p>
+            <a:pPr indent="0" marL="0">
+              <a:spcAft>
+                <a:spcPts val="800"/>
+              </a:spcAft>
+              <a:buNone/>
+            </a:pPr>
+            <a:r>
+              <a:rPr lang="en-US" sz="1980" b="1" dirty="0">
                 <a:solidFill>
                   <a:srgbClr val="227C78"/>
                 </a:solidFill>
@@ -3250,41 +3832,41 @@
                 <a:ea typeface="Malgun Gothic" pitchFamily="34" charset="-122"/>
                 <a:cs typeface="Malgun Gothic" pitchFamily="34" charset="-120"/>
               </a:rPr>
-              <a:t>01</a:t>
-            </a:r>
-            <a:endParaRPr lang="en-US" sz="1560" dirty="0"/>
-          </a:p>
-        </p:txBody>
-      </p:sp>
-      <p:sp>
-        <p:nvSpPr>
-          <p:cNvPr id="8" name="Text 6"/>
-          <p:cNvSpPr/>
-          <p:nvPr/>
-        </p:nvSpPr>
-        <p:spPr>
-          <a:xfrm>
-            <a:off x="815340" y="4137660"/>
-            <a:ext cx="2179320" cy="548640"/>
-          </a:xfrm>
-          <a:prstGeom prst="rect">
-            <a:avLst/>
-          </a:prstGeom>
-          <a:noFill/>
-          <a:ln/>
-        </p:spPr>
-        <p:txBody>
-          <a:bodyPr wrap="square" lIns="0" tIns="0" rIns="0" bIns="0" rtlCol="0" anchor="ctr"/>
-          <a:lstStyle/>
-          <a:p>
-            <a:pPr indent="0" marL="0">
-              <a:spcAft>
-                <a:spcPts val="800"/>
-              </a:spcAft>
-              <a:buNone/>
-            </a:pPr>
-            <a:r>
-              <a:rPr lang="en-US" sz="1680" b="1" dirty="0">
+              <a:t>기관에 남기는 정리</a:t>
+            </a:r>
+            <a:endParaRPr lang="en-US" sz="1980" dirty="0"/>
+          </a:p>
+        </p:txBody>
+      </p:sp>
+      <p:sp>
+        <p:nvSpPr>
+          <p:cNvPr id="12" name="Text 10"/>
+          <p:cNvSpPr/>
+          <p:nvPr/>
+        </p:nvSpPr>
+        <p:spPr>
+          <a:xfrm>
+            <a:off x="7962900" y="4290060"/>
+            <a:ext cx="3352800" cy="1341120"/>
+          </a:xfrm>
+          <a:prstGeom prst="rect">
+            <a:avLst/>
+          </a:prstGeom>
+          <a:noFill/>
+          <a:ln/>
+        </p:spPr>
+        <p:txBody>
+          <a:bodyPr wrap="square" lIns="0" tIns="0" rIns="0" bIns="0" rtlCol="0" anchor="ctr"/>
+          <a:lstStyle/>
+          <a:p>
+            <a:pPr indent="0" marL="0">
+              <a:spcAft>
+                <a:spcPts val="800"/>
+              </a:spcAft>
+              <a:buNone/>
+            </a:pPr>
+            <a:r>
+              <a:rPr lang="en-US" sz="1800" dirty="0">
                 <a:solidFill>
                   <a:srgbClr val="132D40"/>
                 </a:solidFill>
@@ -3292,108 +3874,19 @@
                 <a:ea typeface="Malgun Gothic" pitchFamily="34" charset="-122"/>
                 <a:cs typeface="Malgun Gothic" pitchFamily="34" charset="-120"/>
               </a:rPr>
-              <a:t>대상·주제 상담</a:t>
-            </a:r>
-            <a:endParaRPr lang="en-US" sz="1680" dirty="0"/>
-          </a:p>
-        </p:txBody>
-      </p:sp>
-      <p:sp>
-        <p:nvSpPr>
-          <p:cNvPr id="9" name="Shape 7"/>
-          <p:cNvSpPr/>
-          <p:nvPr/>
-        </p:nvSpPr>
-        <p:spPr>
-          <a:xfrm>
-            <a:off x="3429000" y="3421380"/>
-            <a:ext cx="2590800" cy="1295400"/>
-          </a:xfrm>
-          <a:prstGeom prst="rect">
-            <a:avLst/>
-          </a:prstGeom>
-          <a:solidFill>
-            <a:srgbClr val="FFFFFF"/>
-          </a:solidFill>
-          <a:ln w="12700">
-            <a:solidFill>
-              <a:srgbClr val="FFFFFF"/>
-            </a:solidFill>
-            <a:prstDash val="solid"/>
-          </a:ln>
-        </p:spPr>
-      </p:sp>
-      <p:sp>
-        <p:nvSpPr>
-          <p:cNvPr id="10" name="Text 8"/>
-          <p:cNvSpPr/>
-          <p:nvPr/>
-        </p:nvSpPr>
-        <p:spPr>
-          <a:xfrm>
-            <a:off x="3634740" y="3573780"/>
-            <a:ext cx="2179320" cy="304800"/>
-          </a:xfrm>
-          <a:prstGeom prst="rect">
-            <a:avLst/>
-          </a:prstGeom>
-          <a:noFill/>
-          <a:ln/>
-        </p:spPr>
-        <p:txBody>
-          <a:bodyPr wrap="square" lIns="0" tIns="0" rIns="0" bIns="0" rtlCol="0" anchor="ctr"/>
-          <a:lstStyle/>
-          <a:p>
-            <a:pPr indent="0" marL="0">
-              <a:spcAft>
-                <a:spcPts val="800"/>
-              </a:spcAft>
-              <a:buNone/>
-            </a:pPr>
-            <a:r>
-              <a:rPr lang="en-US" sz="1560" b="1" dirty="0">
-                <a:solidFill>
-                  <a:srgbClr val="227C78"/>
-                </a:solidFill>
-                <a:latin typeface="Malgun Gothic" pitchFamily="34" charset="0"/>
-                <a:ea typeface="Malgun Gothic" pitchFamily="34" charset="-122"/>
-                <a:cs typeface="Malgun Gothic" pitchFamily="34" charset="-120"/>
-              </a:rPr>
-              <a:t>02</a:t>
-            </a:r>
-            <a:endParaRPr lang="en-US" sz="1560" dirty="0"/>
-          </a:p>
-        </p:txBody>
-      </p:sp>
-      <p:sp>
-        <p:nvSpPr>
-          <p:cNvPr id="11" name="Text 9"/>
-          <p:cNvSpPr/>
-          <p:nvPr/>
-        </p:nvSpPr>
-        <p:spPr>
-          <a:xfrm>
-            <a:off x="3634740" y="4137660"/>
-            <a:ext cx="2179320" cy="548640"/>
-          </a:xfrm>
-          <a:prstGeom prst="rect">
-            <a:avLst/>
-          </a:prstGeom>
-          <a:noFill/>
-          <a:ln/>
-        </p:spPr>
-        <p:txBody>
-          <a:bodyPr wrap="square" lIns="0" tIns="0" rIns="0" bIns="0" rtlCol="0" anchor="ctr"/>
-          <a:lstStyle/>
-          <a:p>
-            <a:pPr indent="0" marL="0">
-              <a:spcAft>
-                <a:spcPts val="800"/>
-              </a:spcAft>
-              <a:buNone/>
-            </a:pPr>
-            <a:r>
-              <a:rPr lang="en-US" sz="1680" b="1" dirty="0">
+              <a:t>진행 주제와 시간</a:t>
+            </a:r>
+            <a:endParaRPr lang="en-US" sz="1800" dirty="0"/>
+          </a:p>
+          <a:p>
+            <a:pPr indent="0" marL="0">
+              <a:spcAft>
+                <a:spcPts val="800"/>
+              </a:spcAft>
+              <a:buNone/>
+            </a:pPr>
+            <a:r>
+              <a:rPr lang="en-US" sz="1800" dirty="0">
                 <a:solidFill>
                   <a:srgbClr val="132D40"/>
                 </a:solidFill>
@@ -3401,36 +3894,31 @@
                 <a:ea typeface="Malgun Gothic" pitchFamily="34" charset="-122"/>
                 <a:cs typeface="Malgun Gothic" pitchFamily="34" charset="-120"/>
               </a:rPr>
-              <a:t>인원·시간·장소 확인</a:t>
-            </a:r>
-            <a:endParaRPr lang="en-US" sz="1680" dirty="0"/>
-          </a:p>
-        </p:txBody>
-      </p:sp>
-      <p:sp>
-        <p:nvSpPr>
-          <p:cNvPr id="12" name="Shape 10"/>
-          <p:cNvSpPr/>
-          <p:nvPr/>
-        </p:nvSpPr>
-        <p:spPr>
-          <a:xfrm>
-            <a:off x="6248400" y="3421380"/>
-            <a:ext cx="2590800" cy="1295400"/>
-          </a:xfrm>
-          <a:prstGeom prst="rect">
-            <a:avLst/>
-          </a:prstGeom>
-          <a:solidFill>
-            <a:srgbClr val="FFFFFF"/>
-          </a:solidFill>
-          <a:ln w="12700">
-            <a:solidFill>
-              <a:srgbClr val="FFFFFF"/>
-            </a:solidFill>
-            <a:prstDash val="solid"/>
-          </a:ln>
-        </p:spPr>
+              <a:t>제공한 교재 목록</a:t>
+            </a:r>
+            <a:endParaRPr lang="en-US" sz="1800" dirty="0"/>
+          </a:p>
+          <a:p>
+            <a:pPr indent="0" marL="0">
+              <a:spcAft>
+                <a:spcPts val="800"/>
+              </a:spcAft>
+              <a:buNone/>
+            </a:pPr>
+            <a:r>
+              <a:rPr lang="en-US" sz="1800" dirty="0">
+                <a:solidFill>
+                  <a:srgbClr val="132D40"/>
+                </a:solidFill>
+                <a:latin typeface="Malgun Gothic" pitchFamily="34" charset="0"/>
+                <a:ea typeface="Malgun Gothic" pitchFamily="34" charset="-122"/>
+                <a:cs typeface="Malgun Gothic" pitchFamily="34" charset="-120"/>
+              </a:rPr>
+              <a:t>익명 참여 의견 요약</a:t>
+            </a:r>
+            <a:endParaRPr lang="en-US" sz="1800" dirty="0"/>
+          </a:p>
+        </p:txBody>
       </p:sp>
       <p:sp>
         <p:nvSpPr>
@@ -3440,256 +3928,43 @@
         </p:nvSpPr>
         <p:spPr>
           <a:xfrm>
-            <a:off x="6454140" y="3573780"/>
-            <a:ext cx="2179320" cy="304800"/>
-          </a:xfrm>
-          <a:prstGeom prst="rect">
-            <a:avLst/>
-          </a:prstGeom>
-          <a:noFill/>
-          <a:ln/>
-        </p:spPr>
-        <p:txBody>
-          <a:bodyPr wrap="square" lIns="0" tIns="0" rIns="0" bIns="0" rtlCol="0" anchor="ctr"/>
-          <a:lstStyle/>
-          <a:p>
-            <a:pPr indent="0" marL="0">
-              <a:spcAft>
-                <a:spcPts val="800"/>
-              </a:spcAft>
-              <a:buNone/>
-            </a:pPr>
-            <a:r>
-              <a:rPr lang="en-US" sz="1560" b="1" dirty="0">
-                <a:solidFill>
-                  <a:srgbClr val="227C78"/>
-                </a:solidFill>
-                <a:latin typeface="Malgun Gothic" pitchFamily="34" charset="0"/>
-                <a:ea typeface="Malgun Gothic" pitchFamily="34" charset="-122"/>
-                <a:cs typeface="Malgun Gothic" pitchFamily="34" charset="-120"/>
-              </a:rPr>
-              <a:t>03</a:t>
-            </a:r>
-            <a:endParaRPr lang="en-US" sz="1560" dirty="0"/>
+            <a:off x="609600" y="6126480"/>
+            <a:ext cx="10972800" cy="281940"/>
+          </a:xfrm>
+          <a:prstGeom prst="rect">
+            <a:avLst/>
+          </a:prstGeom>
+          <a:noFill/>
+          <a:ln/>
+        </p:spPr>
+        <p:txBody>
+          <a:bodyPr wrap="square" lIns="0" tIns="0" rIns="0" bIns="0" rtlCol="0" anchor="ctr"/>
+          <a:lstStyle/>
+          <a:p>
+            <a:pPr indent="0" marL="0">
+              <a:spcAft>
+                <a:spcPts val="800"/>
+              </a:spcAft>
+              <a:buNone/>
+            </a:pPr>
+            <a:r>
+              <a:rPr lang="en-US" sz="1440" dirty="0">
+                <a:solidFill>
+                  <a:srgbClr val="62727A"/>
+                </a:solidFill>
+                <a:latin typeface="Malgun Gothic" pitchFamily="34" charset="0"/>
+                <a:ea typeface="Malgun Gothic" pitchFamily="34" charset="-122"/>
+                <a:cs typeface="Malgun Gothic" pitchFamily="34" charset="-120"/>
+              </a:rPr>
+              <a:t>확정 순서 · 대상·주제 → 인원·시간·장소 → 비용·준비 분담 → 일정 확정</a:t>
+            </a:r>
+            <a:endParaRPr lang="en-US" sz="1440" dirty="0"/>
           </a:p>
         </p:txBody>
       </p:sp>
       <p:sp>
         <p:nvSpPr>
           <p:cNvPr id="14" name="Text 12"/>
-          <p:cNvSpPr/>
-          <p:nvPr/>
-        </p:nvSpPr>
-        <p:spPr>
-          <a:xfrm>
-            <a:off x="6454140" y="4137660"/>
-            <a:ext cx="2179320" cy="548640"/>
-          </a:xfrm>
-          <a:prstGeom prst="rect">
-            <a:avLst/>
-          </a:prstGeom>
-          <a:noFill/>
-          <a:ln/>
-        </p:spPr>
-        <p:txBody>
-          <a:bodyPr wrap="square" lIns="0" tIns="0" rIns="0" bIns="0" rtlCol="0" anchor="ctr"/>
-          <a:lstStyle/>
-          <a:p>
-            <a:pPr indent="0" marL="0">
-              <a:spcAft>
-                <a:spcPts val="800"/>
-              </a:spcAft>
-              <a:buNone/>
-            </a:pPr>
-            <a:r>
-              <a:rPr lang="en-US" sz="1680" b="1" dirty="0">
-                <a:solidFill>
-                  <a:srgbClr val="132D40"/>
-                </a:solidFill>
-                <a:latin typeface="Malgun Gothic" pitchFamily="34" charset="0"/>
-                <a:ea typeface="Malgun Gothic" pitchFamily="34" charset="-122"/>
-                <a:cs typeface="Malgun Gothic" pitchFamily="34" charset="-120"/>
-              </a:rPr>
-              <a:t>비용·준비 분담 협의</a:t>
-            </a:r>
-            <a:endParaRPr lang="en-US" sz="1680" dirty="0"/>
-          </a:p>
-        </p:txBody>
-      </p:sp>
-      <p:sp>
-        <p:nvSpPr>
-          <p:cNvPr id="15" name="Shape 13"/>
-          <p:cNvSpPr/>
-          <p:nvPr/>
-        </p:nvSpPr>
-        <p:spPr>
-          <a:xfrm>
-            <a:off x="9067800" y="3421380"/>
-            <a:ext cx="2590800" cy="1295400"/>
-          </a:xfrm>
-          <a:prstGeom prst="rect">
-            <a:avLst/>
-          </a:prstGeom>
-          <a:solidFill>
-            <a:srgbClr val="227C78"/>
-          </a:solidFill>
-          <a:ln w="12700">
-            <a:solidFill>
-              <a:srgbClr val="227C78"/>
-            </a:solidFill>
-            <a:prstDash val="solid"/>
-          </a:ln>
-        </p:spPr>
-      </p:sp>
-      <p:sp>
-        <p:nvSpPr>
-          <p:cNvPr id="16" name="Text 14"/>
-          <p:cNvSpPr/>
-          <p:nvPr/>
-        </p:nvSpPr>
-        <p:spPr>
-          <a:xfrm>
-            <a:off x="9273540" y="3573780"/>
-            <a:ext cx="2179320" cy="304800"/>
-          </a:xfrm>
-          <a:prstGeom prst="rect">
-            <a:avLst/>
-          </a:prstGeom>
-          <a:noFill/>
-          <a:ln/>
-        </p:spPr>
-        <p:txBody>
-          <a:bodyPr wrap="square" lIns="0" tIns="0" rIns="0" bIns="0" rtlCol="0" anchor="ctr"/>
-          <a:lstStyle/>
-          <a:p>
-            <a:pPr indent="0" marL="0">
-              <a:spcAft>
-                <a:spcPts val="800"/>
-              </a:spcAft>
-              <a:buNone/>
-            </a:pPr>
-            <a:r>
-              <a:rPr lang="en-US" sz="1560" b="1" dirty="0">
-                <a:solidFill>
-                  <a:srgbClr val="FFFFFF"/>
-                </a:solidFill>
-                <a:latin typeface="Malgun Gothic" pitchFamily="34" charset="0"/>
-                <a:ea typeface="Malgun Gothic" pitchFamily="34" charset="-122"/>
-                <a:cs typeface="Malgun Gothic" pitchFamily="34" charset="-120"/>
-              </a:rPr>
-              <a:t>04</a:t>
-            </a:r>
-            <a:endParaRPr lang="en-US" sz="1560" dirty="0"/>
-          </a:p>
-        </p:txBody>
-      </p:sp>
-      <p:sp>
-        <p:nvSpPr>
-          <p:cNvPr id="17" name="Text 15"/>
-          <p:cNvSpPr/>
-          <p:nvPr/>
-        </p:nvSpPr>
-        <p:spPr>
-          <a:xfrm>
-            <a:off x="9273540" y="4137660"/>
-            <a:ext cx="2179320" cy="548640"/>
-          </a:xfrm>
-          <a:prstGeom prst="rect">
-            <a:avLst/>
-          </a:prstGeom>
-          <a:noFill/>
-          <a:ln/>
-        </p:spPr>
-        <p:txBody>
-          <a:bodyPr wrap="square" lIns="0" tIns="0" rIns="0" bIns="0" rtlCol="0" anchor="ctr"/>
-          <a:lstStyle/>
-          <a:p>
-            <a:pPr indent="0" marL="0">
-              <a:spcAft>
-                <a:spcPts val="800"/>
-              </a:spcAft>
-              <a:buNone/>
-            </a:pPr>
-            <a:r>
-              <a:rPr lang="en-US" sz="1680" b="1" dirty="0">
-                <a:solidFill>
-                  <a:srgbClr val="FFFFFF"/>
-                </a:solidFill>
-                <a:latin typeface="Malgun Gothic" pitchFamily="34" charset="0"/>
-                <a:ea typeface="Malgun Gothic" pitchFamily="34" charset="-122"/>
-                <a:cs typeface="Malgun Gothic" pitchFamily="34" charset="-120"/>
-              </a:rPr>
-              <a:t>일정 확정</a:t>
-            </a:r>
-            <a:endParaRPr lang="en-US" sz="1680" dirty="0"/>
-          </a:p>
-        </p:txBody>
-      </p:sp>
-      <p:sp>
-        <p:nvSpPr>
-          <p:cNvPr id="18" name="Text 16"/>
-          <p:cNvSpPr/>
-          <p:nvPr/>
-        </p:nvSpPr>
-        <p:spPr>
-          <a:xfrm>
-            <a:off x="609600" y="5181600"/>
-            <a:ext cx="10972800" cy="723900"/>
-          </a:xfrm>
-          <a:prstGeom prst="rect">
-            <a:avLst/>
-          </a:prstGeom>
-          <a:noFill/>
-          <a:ln/>
-        </p:spPr>
-        <p:txBody>
-          <a:bodyPr wrap="square" lIns="0" tIns="0" rIns="0" bIns="0" rtlCol="0" anchor="ctr"/>
-          <a:lstStyle/>
-          <a:p>
-            <a:pPr indent="0" marL="0">
-              <a:spcAft>
-                <a:spcPts val="800"/>
-              </a:spcAft>
-              <a:buNone/>
-            </a:pPr>
-            <a:r>
-              <a:rPr lang="en-US" sz="1800" dirty="0">
-                <a:solidFill>
-                  <a:srgbClr val="62727A"/>
-                </a:solidFill>
-                <a:latin typeface="Malgun Gothic" pitchFamily="34" charset="0"/>
-                <a:ea typeface="Malgun Gothic" pitchFamily="34" charset="-122"/>
-                <a:cs typeface="Malgun Gothic" pitchFamily="34" charset="-120"/>
-              </a:rPr>
-              <a:t>주제와 시간 구성은 제안안입니다.</a:t>
-            </a:r>
-            <a:endParaRPr lang="en-US" sz="1800" dirty="0"/>
-          </a:p>
-          <a:p>
-            <a:pPr indent="0" marL="0">
-              <a:spcAft>
-                <a:spcPts val="800"/>
-              </a:spcAft>
-              <a:buNone/>
-            </a:pPr>
-            <a:r>
-              <a:rPr lang="en-US" sz="1800" dirty="0">
-                <a:solidFill>
-                  <a:srgbClr val="62727A"/>
-                </a:solidFill>
-                <a:latin typeface="Malgun Gothic" pitchFamily="34" charset="0"/>
-                <a:ea typeface="Malgun Gothic" pitchFamily="34" charset="-122"/>
-                <a:cs typeface="Malgun Gothic" pitchFamily="34" charset="-120"/>
-              </a:rPr>
-              <a:t>일정·장소·비용과 운영 조건은 협의 후 확정합니다.</a:t>
-            </a:r>
-            <a:endParaRPr lang="en-US" sz="1800" dirty="0"/>
-          </a:p>
-        </p:txBody>
-      </p:sp>
-      <p:sp>
-        <p:nvSpPr>
-          <p:cNvPr id="19" name="Text 17"/>
           <p:cNvSpPr/>
           <p:nvPr/>
         </p:nvSpPr>
@@ -3731,7 +4006,7 @@
       </p:sp>
       <p:sp>
         <p:nvSpPr>
-          <p:cNvPr id="20" name="Text 18"/>
+          <p:cNvPr id="15" name="Text 13"/>
           <p:cNvSpPr/>
           <p:nvPr/>
         </p:nvSpPr>
@@ -4318,26 +4593,26 @@
         <p:spPr>
           <a:xfrm>
             <a:off x="609600" y="1120140"/>
-            <a:ext cx="10820400" cy="1181100"/>
-          </a:xfrm>
-          <a:prstGeom prst="rect">
-            <a:avLst/>
-          </a:prstGeom>
-          <a:noFill/>
-          <a:ln/>
-        </p:spPr>
-        <p:txBody>
-          <a:bodyPr wrap="square" lIns="0" tIns="0" rIns="0" bIns="0" rtlCol="0" anchor="ctr"/>
-          <a:lstStyle/>
-          <a:p>
-            <a:pPr indent="0" marL="0">
-              <a:spcAft>
-                <a:spcPts val="800"/>
-              </a:spcAft>
-              <a:buNone/>
-            </a:pPr>
-            <a:r>
-              <a:rPr lang="en-US" sz="3840" b="1" dirty="0">
+            <a:ext cx="10820400" cy="1089660"/>
+          </a:xfrm>
+          <a:prstGeom prst="rect">
+            <a:avLst/>
+          </a:prstGeom>
+          <a:noFill/>
+          <a:ln/>
+        </p:spPr>
+        <p:txBody>
+          <a:bodyPr wrap="square" lIns="0" tIns="0" rIns="0" bIns="0" rtlCol="0" anchor="ctr"/>
+          <a:lstStyle/>
+          <a:p>
+            <a:pPr indent="0" marL="0">
+              <a:spcAft>
+                <a:spcPts val="800"/>
+              </a:spcAft>
+              <a:buNone/>
+            </a:pPr>
+            <a:r>
+              <a:rPr lang="en-US" sz="3960" b="1" dirty="0">
                 <a:solidFill>
                   <a:srgbClr val="132D40"/>
                 </a:solidFill>
@@ -4347,39 +4622,64 @@
               </a:rPr>
               <a:t>생활 속 한마디를 시작하고 싶은 분</a:t>
             </a:r>
-            <a:endParaRPr lang="en-US" sz="3840" dirty="0"/>
-          </a:p>
-        </p:txBody>
-      </p:sp>
-      <p:sp>
-        <p:nvSpPr>
-          <p:cNvPr id="5" name="Text 3"/>
-          <p:cNvSpPr/>
-          <p:nvPr/>
-        </p:nvSpPr>
-        <p:spPr>
-          <a:xfrm>
-            <a:off x="609600" y="2331720"/>
-            <a:ext cx="10744200" cy="609600"/>
-          </a:xfrm>
-          <a:prstGeom prst="rect">
-            <a:avLst/>
-          </a:prstGeom>
-          <a:noFill/>
-          <a:ln/>
-        </p:spPr>
-        <p:txBody>
-          <a:bodyPr wrap="square" lIns="0" tIns="0" rIns="0" bIns="0" rtlCol="0" anchor="ctr"/>
-          <a:lstStyle/>
-          <a:p>
-            <a:pPr indent="0" marL="0">
-              <a:spcAft>
-                <a:spcPts val="800"/>
-              </a:spcAft>
-              <a:buNone/>
-            </a:pPr>
-            <a:r>
-              <a:rPr lang="en-US" sz="1620" dirty="0">
+            <a:endParaRPr lang="en-US" sz="3960" dirty="0"/>
+          </a:p>
+        </p:txBody>
+      </p:sp>
+      <p:sp>
+        <p:nvSpPr>
+          <p:cNvPr id="5" name="Shape 3"/>
+          <p:cNvSpPr/>
+          <p:nvPr/>
+        </p:nvSpPr>
+        <p:spPr>
+          <a:xfrm>
+            <a:off x="609600" y="2202180"/>
+            <a:ext cx="647700" cy="45720"/>
+          </a:xfrm>
+          <a:prstGeom prst="rect">
+            <a:avLst/>
+          </a:prstGeom>
+          <a:solidFill>
+            <a:srgbClr val="DC955B"/>
+          </a:solidFill>
+          <a:ln w="12700">
+            <a:solidFill>
+              <a:srgbClr val="DC955B"/>
+            </a:solidFill>
+            <a:prstDash val="solid"/>
+          </a:ln>
+        </p:spPr>
+      </p:sp>
+      <p:sp>
+        <p:nvSpPr>
+          <p:cNvPr id="6" name="Text 4"/>
+          <p:cNvSpPr/>
+          <p:nvPr/>
+        </p:nvSpPr>
+        <p:spPr>
+          <a:xfrm>
+            <a:off x="609600" y="2484120"/>
+            <a:ext cx="10744200" cy="640080"/>
+          </a:xfrm>
+          <a:prstGeom prst="rect">
+            <a:avLst/>
+          </a:prstGeom>
+          <a:noFill/>
+          <a:ln/>
+        </p:spPr>
+        <p:txBody>
+          <a:bodyPr wrap="square" lIns="0" tIns="0" rIns="0" bIns="0" rtlCol="0" anchor="ctr"/>
+          <a:lstStyle/>
+          <a:p>
+            <a:pPr indent="0" marL="0">
+              <a:spcAft>
+                <a:spcPts val="800"/>
+              </a:spcAft>
+              <a:buNone/>
+            </a:pPr>
+            <a:r>
+              <a:rPr lang="en-US" sz="1800" dirty="0">
                 <a:solidFill>
                   <a:srgbClr val="62727A"/>
                 </a:solidFill>
@@ -4389,13 +4689,13 @@
               </a:rPr>
               <a:t>완벽한 문장보다, 써보고 싶은 장면 하나에서 출발합니다.</a:t>
             </a:r>
-            <a:endParaRPr lang="en-US" sz="1620" dirty="0"/>
-          </a:p>
-        </p:txBody>
-      </p:sp>
-      <p:sp>
-        <p:nvSpPr>
-          <p:cNvPr id="6" name="Shape 4"/>
+            <a:endParaRPr lang="en-US" sz="1800" dirty="0"/>
+          </a:p>
+        </p:txBody>
+      </p:sp>
+      <p:sp>
+        <p:nvSpPr>
+          <p:cNvPr id="7" name="Shape 5"/>
           <p:cNvSpPr/>
           <p:nvPr/>
         </p:nvSpPr>
@@ -4420,33 +4720,58 @@
       </p:sp>
       <p:sp>
         <p:nvSpPr>
-          <p:cNvPr id="7" name="Text 5"/>
-          <p:cNvSpPr/>
-          <p:nvPr/>
-        </p:nvSpPr>
-        <p:spPr>
-          <a:xfrm>
-            <a:off x="838200" y="3444240"/>
-            <a:ext cx="2994660" cy="419100"/>
-          </a:xfrm>
-          <a:prstGeom prst="rect">
-            <a:avLst/>
-          </a:prstGeom>
-          <a:noFill/>
-          <a:ln/>
-        </p:spPr>
-        <p:txBody>
-          <a:bodyPr wrap="square" lIns="0" tIns="0" rIns="0" bIns="0" rtlCol="0" anchor="ctr"/>
-          <a:lstStyle/>
-          <a:p>
-            <a:pPr indent="0" marL="0">
-              <a:spcAft>
-                <a:spcPts val="800"/>
-              </a:spcAft>
-              <a:buNone/>
-            </a:pPr>
-            <a:r>
-              <a:rPr lang="en-US" sz="2520" b="1" dirty="0">
+          <p:cNvPr id="8" name="Shape 6"/>
+          <p:cNvSpPr/>
+          <p:nvPr/>
+        </p:nvSpPr>
+        <p:spPr>
+          <a:xfrm>
+            <a:off x="609600" y="3238500"/>
+            <a:ext cx="45720" cy="2705100"/>
+          </a:xfrm>
+          <a:prstGeom prst="rect">
+            <a:avLst/>
+          </a:prstGeom>
+          <a:solidFill>
+            <a:srgbClr val="227C78"/>
+          </a:solidFill>
+          <a:ln w="12700">
+            <a:solidFill>
+              <a:srgbClr val="227C78"/>
+            </a:solidFill>
+            <a:prstDash val="solid"/>
+          </a:ln>
+        </p:spPr>
+      </p:sp>
+      <p:sp>
+        <p:nvSpPr>
+          <p:cNvPr id="9" name="Text 7"/>
+          <p:cNvSpPr/>
+          <p:nvPr/>
+        </p:nvSpPr>
+        <p:spPr>
+          <a:xfrm>
+            <a:off x="838200" y="3406140"/>
+            <a:ext cx="2994660" cy="365760"/>
+          </a:xfrm>
+          <a:prstGeom prst="rect">
+            <a:avLst/>
+          </a:prstGeom>
+          <a:noFill/>
+          <a:ln/>
+        </p:spPr>
+        <p:txBody>
+          <a:bodyPr wrap="square" lIns="0" tIns="0" rIns="0" bIns="0" rtlCol="0" anchor="ctr"/>
+          <a:lstStyle/>
+          <a:p>
+            <a:pPr indent="0" marL="0">
+              <a:spcAft>
+                <a:spcPts val="800"/>
+              </a:spcAft>
+              <a:buNone/>
+            </a:pPr>
+            <a:r>
+              <a:rPr lang="en-US" sz="2100" b="1" dirty="0">
                 <a:solidFill>
                   <a:srgbClr val="227C78"/>
                 </a:solidFill>
@@ -4456,39 +4781,39 @@
               </a:rPr>
               <a:t>01</a:t>
             </a:r>
-            <a:endParaRPr lang="en-US" sz="2520" dirty="0"/>
-          </a:p>
-        </p:txBody>
-      </p:sp>
-      <p:sp>
-        <p:nvSpPr>
-          <p:cNvPr id="8" name="Text 6"/>
-          <p:cNvSpPr/>
-          <p:nvPr/>
-        </p:nvSpPr>
-        <p:spPr>
-          <a:xfrm>
-            <a:off x="838200" y="4076700"/>
-            <a:ext cx="2994660" cy="762000"/>
-          </a:xfrm>
-          <a:prstGeom prst="rect">
-            <a:avLst/>
-          </a:prstGeom>
-          <a:noFill/>
-          <a:ln/>
-        </p:spPr>
-        <p:txBody>
-          <a:bodyPr wrap="square" lIns="0" tIns="0" rIns="0" bIns="0" rtlCol="0" anchor="ctr"/>
-          <a:lstStyle/>
-          <a:p>
-            <a:pPr indent="0" marL="0">
-              <a:spcAft>
-                <a:spcPts val="800"/>
-              </a:spcAft>
-              <a:buNone/>
-            </a:pPr>
-            <a:r>
-              <a:rPr lang="en-US" sz="2040" b="1" dirty="0">
+            <a:endParaRPr lang="en-US" sz="2100" dirty="0"/>
+          </a:p>
+        </p:txBody>
+      </p:sp>
+      <p:sp>
+        <p:nvSpPr>
+          <p:cNvPr id="10" name="Text 8"/>
+          <p:cNvSpPr/>
+          <p:nvPr/>
+        </p:nvSpPr>
+        <p:spPr>
+          <a:xfrm>
+            <a:off x="838200" y="3939540"/>
+            <a:ext cx="2994660" cy="670560"/>
+          </a:xfrm>
+          <a:prstGeom prst="rect">
+            <a:avLst/>
+          </a:prstGeom>
+          <a:noFill/>
+          <a:ln/>
+        </p:spPr>
+        <p:txBody>
+          <a:bodyPr wrap="square" lIns="0" tIns="0" rIns="0" bIns="0" rtlCol="0" anchor="ctr"/>
+          <a:lstStyle/>
+          <a:p>
+            <a:pPr indent="0" marL="0">
+              <a:spcAft>
+                <a:spcPts val="800"/>
+              </a:spcAft>
+              <a:buNone/>
+            </a:pPr>
+            <a:r>
+              <a:rPr lang="en-US" sz="2100" b="1" dirty="0">
                 <a:solidFill>
                   <a:srgbClr val="132D40"/>
                 </a:solidFill>
@@ -4498,39 +4823,39 @@
               </a:rPr>
               <a:t>여행을 준비하는 분</a:t>
             </a:r>
-            <a:endParaRPr lang="en-US" sz="2040" dirty="0"/>
-          </a:p>
-        </p:txBody>
-      </p:sp>
-      <p:sp>
-        <p:nvSpPr>
-          <p:cNvPr id="9" name="Text 7"/>
-          <p:cNvSpPr/>
-          <p:nvPr/>
-        </p:nvSpPr>
-        <p:spPr>
-          <a:xfrm>
-            <a:off x="838200" y="4953000"/>
-            <a:ext cx="2994660" cy="914400"/>
-          </a:xfrm>
-          <a:prstGeom prst="rect">
-            <a:avLst/>
-          </a:prstGeom>
-          <a:noFill/>
-          <a:ln/>
-        </p:spPr>
-        <p:txBody>
-          <a:bodyPr wrap="square" lIns="0" tIns="0" rIns="0" bIns="0" rtlCol="0" anchor="ctr"/>
-          <a:lstStyle/>
-          <a:p>
-            <a:pPr indent="0" marL="0">
-              <a:spcAft>
-                <a:spcPts val="800"/>
-              </a:spcAft>
-              <a:buNone/>
-            </a:pPr>
-            <a:r>
-              <a:rPr lang="en-US" sz="1500" dirty="0">
+            <a:endParaRPr lang="en-US" sz="2100" dirty="0"/>
+          </a:p>
+        </p:txBody>
+      </p:sp>
+      <p:sp>
+        <p:nvSpPr>
+          <p:cNvPr id="11" name="Text 9"/>
+          <p:cNvSpPr/>
+          <p:nvPr/>
+        </p:nvSpPr>
+        <p:spPr>
+          <a:xfrm>
+            <a:off x="838200" y="4709160"/>
+            <a:ext cx="2994660" cy="1112520"/>
+          </a:xfrm>
+          <a:prstGeom prst="rect">
+            <a:avLst/>
+          </a:prstGeom>
+          <a:noFill/>
+          <a:ln/>
+        </p:spPr>
+        <p:txBody>
+          <a:bodyPr wrap="square" lIns="0" tIns="0" rIns="0" bIns="0" rtlCol="0" anchor="ctr"/>
+          <a:lstStyle/>
+          <a:p>
+            <a:pPr indent="0" marL="0">
+              <a:spcAft>
+                <a:spcPts val="800"/>
+              </a:spcAft>
+              <a:buNone/>
+            </a:pPr>
+            <a:r>
+              <a:rPr lang="en-US" sz="1740" dirty="0">
                 <a:solidFill>
                   <a:srgbClr val="62727A"/>
                 </a:solidFill>
@@ -4540,17 +4865,17 @@
               </a:rPr>
               <a:t>주문하거나 길을 묻는 말을</a:t>
             </a:r>
-            <a:endParaRPr lang="en-US" sz="1500" dirty="0"/>
-          </a:p>
-          <a:p>
-            <a:pPr indent="0" marL="0">
-              <a:spcAft>
-                <a:spcPts val="800"/>
-              </a:spcAft>
-              <a:buNone/>
-            </a:pPr>
-            <a:r>
-              <a:rPr lang="en-US" sz="1500" dirty="0">
+            <a:endParaRPr lang="en-US" sz="1740" dirty="0"/>
+          </a:p>
+          <a:p>
+            <a:pPr indent="0" marL="0">
+              <a:spcAft>
+                <a:spcPts val="800"/>
+              </a:spcAft>
+              <a:buNone/>
+            </a:pPr>
+            <a:r>
+              <a:rPr lang="en-US" sz="1740" dirty="0">
                 <a:solidFill>
                   <a:srgbClr val="62727A"/>
                 </a:solidFill>
@@ -4560,13 +4885,13 @@
               </a:rPr>
               <a:t>편안하게 연습하고 싶은 분</a:t>
             </a:r>
-            <a:endParaRPr lang="en-US" sz="1500" dirty="0"/>
-          </a:p>
-        </p:txBody>
-      </p:sp>
-      <p:sp>
-        <p:nvSpPr>
-          <p:cNvPr id="10" name="Shape 8"/>
+            <a:endParaRPr lang="en-US" sz="1740" dirty="0"/>
+          </a:p>
+        </p:txBody>
+      </p:sp>
+      <p:sp>
+        <p:nvSpPr>
+          <p:cNvPr id="12" name="Shape 10"/>
           <p:cNvSpPr/>
           <p:nvPr/>
         </p:nvSpPr>
@@ -4591,33 +4916,58 @@
       </p:sp>
       <p:sp>
         <p:nvSpPr>
-          <p:cNvPr id="11" name="Text 9"/>
-          <p:cNvSpPr/>
-          <p:nvPr/>
-        </p:nvSpPr>
-        <p:spPr>
-          <a:xfrm>
-            <a:off x="4594860" y="3444240"/>
-            <a:ext cx="2994660" cy="419100"/>
-          </a:xfrm>
-          <a:prstGeom prst="rect">
-            <a:avLst/>
-          </a:prstGeom>
-          <a:noFill/>
-          <a:ln/>
-        </p:spPr>
-        <p:txBody>
-          <a:bodyPr wrap="square" lIns="0" tIns="0" rIns="0" bIns="0" rtlCol="0" anchor="ctr"/>
-          <a:lstStyle/>
-          <a:p>
-            <a:pPr indent="0" marL="0">
-              <a:spcAft>
-                <a:spcPts val="800"/>
-              </a:spcAft>
-              <a:buNone/>
-            </a:pPr>
-            <a:r>
-              <a:rPr lang="en-US" sz="2520" b="1" dirty="0">
+          <p:cNvPr id="13" name="Shape 11"/>
+          <p:cNvSpPr/>
+          <p:nvPr/>
+        </p:nvSpPr>
+        <p:spPr>
+          <a:xfrm>
+            <a:off x="4366260" y="3238500"/>
+            <a:ext cx="45720" cy="2705100"/>
+          </a:xfrm>
+          <a:prstGeom prst="rect">
+            <a:avLst/>
+          </a:prstGeom>
+          <a:solidFill>
+            <a:srgbClr val="227C78"/>
+          </a:solidFill>
+          <a:ln w="12700">
+            <a:solidFill>
+              <a:srgbClr val="227C78"/>
+            </a:solidFill>
+            <a:prstDash val="solid"/>
+          </a:ln>
+        </p:spPr>
+      </p:sp>
+      <p:sp>
+        <p:nvSpPr>
+          <p:cNvPr id="14" name="Text 12"/>
+          <p:cNvSpPr/>
+          <p:nvPr/>
+        </p:nvSpPr>
+        <p:spPr>
+          <a:xfrm>
+            <a:off x="4594860" y="3406140"/>
+            <a:ext cx="2994660" cy="365760"/>
+          </a:xfrm>
+          <a:prstGeom prst="rect">
+            <a:avLst/>
+          </a:prstGeom>
+          <a:noFill/>
+          <a:ln/>
+        </p:spPr>
+        <p:txBody>
+          <a:bodyPr wrap="square" lIns="0" tIns="0" rIns="0" bIns="0" rtlCol="0" anchor="ctr"/>
+          <a:lstStyle/>
+          <a:p>
+            <a:pPr indent="0" marL="0">
+              <a:spcAft>
+                <a:spcPts val="800"/>
+              </a:spcAft>
+              <a:buNone/>
+            </a:pPr>
+            <a:r>
+              <a:rPr lang="en-US" sz="2100" b="1" dirty="0">
                 <a:solidFill>
                   <a:srgbClr val="227C78"/>
                 </a:solidFill>
@@ -4627,39 +4977,39 @@
               </a:rPr>
               <a:t>02</a:t>
             </a:r>
-            <a:endParaRPr lang="en-US" sz="2520" dirty="0"/>
-          </a:p>
-        </p:txBody>
-      </p:sp>
-      <p:sp>
-        <p:nvSpPr>
-          <p:cNvPr id="12" name="Text 10"/>
-          <p:cNvSpPr/>
-          <p:nvPr/>
-        </p:nvSpPr>
-        <p:spPr>
-          <a:xfrm>
-            <a:off x="4594860" y="4076700"/>
-            <a:ext cx="2994660" cy="762000"/>
-          </a:xfrm>
-          <a:prstGeom prst="rect">
-            <a:avLst/>
-          </a:prstGeom>
-          <a:noFill/>
-          <a:ln/>
-        </p:spPr>
-        <p:txBody>
-          <a:bodyPr wrap="square" lIns="0" tIns="0" rIns="0" bIns="0" rtlCol="0" anchor="ctr"/>
-          <a:lstStyle/>
-          <a:p>
-            <a:pPr indent="0" marL="0">
-              <a:spcAft>
-                <a:spcPts val="800"/>
-              </a:spcAft>
-              <a:buNone/>
-            </a:pPr>
-            <a:r>
-              <a:rPr lang="en-US" sz="2040" b="1" dirty="0">
+            <a:endParaRPr lang="en-US" sz="2100" dirty="0"/>
+          </a:p>
+        </p:txBody>
+      </p:sp>
+      <p:sp>
+        <p:nvSpPr>
+          <p:cNvPr id="15" name="Text 13"/>
+          <p:cNvSpPr/>
+          <p:nvPr/>
+        </p:nvSpPr>
+        <p:spPr>
+          <a:xfrm>
+            <a:off x="4594860" y="3939540"/>
+            <a:ext cx="2994660" cy="670560"/>
+          </a:xfrm>
+          <a:prstGeom prst="rect">
+            <a:avLst/>
+          </a:prstGeom>
+          <a:noFill/>
+          <a:ln/>
+        </p:spPr>
+        <p:txBody>
+          <a:bodyPr wrap="square" lIns="0" tIns="0" rIns="0" bIns="0" rtlCol="0" anchor="ctr"/>
+          <a:lstStyle/>
+          <a:p>
+            <a:pPr indent="0" marL="0">
+              <a:spcAft>
+                <a:spcPts val="800"/>
+              </a:spcAft>
+              <a:buNone/>
+            </a:pPr>
+            <a:r>
+              <a:rPr lang="en-US" sz="2100" b="1" dirty="0">
                 <a:solidFill>
                   <a:srgbClr val="132D40"/>
                 </a:solidFill>
@@ -4667,41 +5017,41 @@
                 <a:ea typeface="Malgun Gothic" pitchFamily="34" charset="-122"/>
                 <a:cs typeface="Malgun Gothic" pitchFamily="34" charset="-120"/>
               </a:rPr>
-              <a:t>영어를 다시 시작하는 분</a:t>
-            </a:r>
-            <a:endParaRPr lang="en-US" sz="2040" dirty="0"/>
-          </a:p>
-        </p:txBody>
-      </p:sp>
-      <p:sp>
-        <p:nvSpPr>
-          <p:cNvPr id="13" name="Text 11"/>
-          <p:cNvSpPr/>
-          <p:nvPr/>
-        </p:nvSpPr>
-        <p:spPr>
-          <a:xfrm>
-            <a:off x="4594860" y="4953000"/>
-            <a:ext cx="2994660" cy="914400"/>
-          </a:xfrm>
-          <a:prstGeom prst="rect">
-            <a:avLst/>
-          </a:prstGeom>
-          <a:noFill/>
-          <a:ln/>
-        </p:spPr>
-        <p:txBody>
-          <a:bodyPr wrap="square" lIns="0" tIns="0" rIns="0" bIns="0" rtlCol="0" anchor="ctr"/>
-          <a:lstStyle/>
-          <a:p>
-            <a:pPr indent="0" marL="0">
-              <a:spcAft>
-                <a:spcPts val="800"/>
-              </a:spcAft>
-              <a:buNone/>
-            </a:pPr>
-            <a:r>
-              <a:rPr lang="en-US" sz="1500" dirty="0">
+              <a:t>영어를 다시 시작할 분</a:t>
+            </a:r>
+            <a:endParaRPr lang="en-US" sz="2100" dirty="0"/>
+          </a:p>
+        </p:txBody>
+      </p:sp>
+      <p:sp>
+        <p:nvSpPr>
+          <p:cNvPr id="16" name="Text 14"/>
+          <p:cNvSpPr/>
+          <p:nvPr/>
+        </p:nvSpPr>
+        <p:spPr>
+          <a:xfrm>
+            <a:off x="4594860" y="4709160"/>
+            <a:ext cx="2994660" cy="1112520"/>
+          </a:xfrm>
+          <a:prstGeom prst="rect">
+            <a:avLst/>
+          </a:prstGeom>
+          <a:noFill/>
+          <a:ln/>
+        </p:spPr>
+        <p:txBody>
+          <a:bodyPr wrap="square" lIns="0" tIns="0" rIns="0" bIns="0" rtlCol="0" anchor="ctr"/>
+          <a:lstStyle/>
+          <a:p>
+            <a:pPr indent="0" marL="0">
+              <a:spcAft>
+                <a:spcPts val="800"/>
+              </a:spcAft>
+              <a:buNone/>
+            </a:pPr>
+            <a:r>
+              <a:rPr lang="en-US" sz="1740" dirty="0">
                 <a:solidFill>
                   <a:srgbClr val="62727A"/>
                 </a:solidFill>
@@ -4711,17 +5061,17 @@
               </a:rPr>
               <a:t>짧은 표현을 큰 글씨로 읽고</a:t>
             </a:r>
-            <a:endParaRPr lang="en-US" sz="1500" dirty="0"/>
-          </a:p>
-          <a:p>
-            <a:pPr indent="0" marL="0">
-              <a:spcAft>
-                <a:spcPts val="800"/>
-              </a:spcAft>
-              <a:buNone/>
-            </a:pPr>
-            <a:r>
-              <a:rPr lang="en-US" sz="1500" dirty="0">
+            <a:endParaRPr lang="en-US" sz="1740" dirty="0"/>
+          </a:p>
+          <a:p>
+            <a:pPr indent="0" marL="0">
+              <a:spcAft>
+                <a:spcPts val="800"/>
+              </a:spcAft>
+              <a:buNone/>
+            </a:pPr>
+            <a:r>
+              <a:rPr lang="en-US" sz="1740" dirty="0">
                 <a:solidFill>
                   <a:srgbClr val="62727A"/>
                 </a:solidFill>
@@ -4731,13 +5081,13 @@
               </a:rPr>
               <a:t>천천히 말해보고 싶은 분</a:t>
             </a:r>
-            <a:endParaRPr lang="en-US" sz="1500" dirty="0"/>
-          </a:p>
-        </p:txBody>
-      </p:sp>
-      <p:sp>
-        <p:nvSpPr>
-          <p:cNvPr id="14" name="Shape 12"/>
+            <a:endParaRPr lang="en-US" sz="1740" dirty="0"/>
+          </a:p>
+        </p:txBody>
+      </p:sp>
+      <p:sp>
+        <p:nvSpPr>
+          <p:cNvPr id="17" name="Shape 15"/>
           <p:cNvSpPr/>
           <p:nvPr/>
         </p:nvSpPr>
@@ -4762,33 +5112,58 @@
       </p:sp>
       <p:sp>
         <p:nvSpPr>
-          <p:cNvPr id="15" name="Text 13"/>
-          <p:cNvSpPr/>
-          <p:nvPr/>
-        </p:nvSpPr>
-        <p:spPr>
-          <a:xfrm>
-            <a:off x="8351520" y="3444240"/>
-            <a:ext cx="2994660" cy="419100"/>
-          </a:xfrm>
-          <a:prstGeom prst="rect">
-            <a:avLst/>
-          </a:prstGeom>
-          <a:noFill/>
-          <a:ln/>
-        </p:spPr>
-        <p:txBody>
-          <a:bodyPr wrap="square" lIns="0" tIns="0" rIns="0" bIns="0" rtlCol="0" anchor="ctr"/>
-          <a:lstStyle/>
-          <a:p>
-            <a:pPr indent="0" marL="0">
-              <a:spcAft>
-                <a:spcPts val="800"/>
-              </a:spcAft>
-              <a:buNone/>
-            </a:pPr>
-            <a:r>
-              <a:rPr lang="en-US" sz="2520" b="1" dirty="0">
+          <p:cNvPr id="18" name="Shape 16"/>
+          <p:cNvSpPr/>
+          <p:nvPr/>
+        </p:nvSpPr>
+        <p:spPr>
+          <a:xfrm>
+            <a:off x="8122920" y="3238500"/>
+            <a:ext cx="45720" cy="2705100"/>
+          </a:xfrm>
+          <a:prstGeom prst="rect">
+            <a:avLst/>
+          </a:prstGeom>
+          <a:solidFill>
+            <a:srgbClr val="227C78"/>
+          </a:solidFill>
+          <a:ln w="12700">
+            <a:solidFill>
+              <a:srgbClr val="227C78"/>
+            </a:solidFill>
+            <a:prstDash val="solid"/>
+          </a:ln>
+        </p:spPr>
+      </p:sp>
+      <p:sp>
+        <p:nvSpPr>
+          <p:cNvPr id="19" name="Text 17"/>
+          <p:cNvSpPr/>
+          <p:nvPr/>
+        </p:nvSpPr>
+        <p:spPr>
+          <a:xfrm>
+            <a:off x="8351520" y="3406140"/>
+            <a:ext cx="2994660" cy="365760"/>
+          </a:xfrm>
+          <a:prstGeom prst="rect">
+            <a:avLst/>
+          </a:prstGeom>
+          <a:noFill/>
+          <a:ln/>
+        </p:spPr>
+        <p:txBody>
+          <a:bodyPr wrap="square" lIns="0" tIns="0" rIns="0" bIns="0" rtlCol="0" anchor="ctr"/>
+          <a:lstStyle/>
+          <a:p>
+            <a:pPr indent="0" marL="0">
+              <a:spcAft>
+                <a:spcPts val="800"/>
+              </a:spcAft>
+              <a:buNone/>
+            </a:pPr>
+            <a:r>
+              <a:rPr lang="en-US" sz="2100" b="1" dirty="0">
                 <a:solidFill>
                   <a:srgbClr val="227C78"/>
                 </a:solidFill>
@@ -4798,39 +5173,39 @@
               </a:rPr>
               <a:t>03</a:t>
             </a:r>
-            <a:endParaRPr lang="en-US" sz="2520" dirty="0"/>
-          </a:p>
-        </p:txBody>
-      </p:sp>
-      <p:sp>
-        <p:nvSpPr>
-          <p:cNvPr id="16" name="Text 14"/>
-          <p:cNvSpPr/>
-          <p:nvPr/>
-        </p:nvSpPr>
-        <p:spPr>
-          <a:xfrm>
-            <a:off x="8351520" y="4076700"/>
-            <a:ext cx="2994660" cy="762000"/>
-          </a:xfrm>
-          <a:prstGeom prst="rect">
-            <a:avLst/>
-          </a:prstGeom>
-          <a:noFill/>
-          <a:ln/>
-        </p:spPr>
-        <p:txBody>
-          <a:bodyPr wrap="square" lIns="0" tIns="0" rIns="0" bIns="0" rtlCol="0" anchor="ctr"/>
-          <a:lstStyle/>
-          <a:p>
-            <a:pPr indent="0" marL="0">
-              <a:spcAft>
-                <a:spcPts val="800"/>
-              </a:spcAft>
-              <a:buNone/>
-            </a:pPr>
-            <a:r>
-              <a:rPr lang="en-US" sz="2040" b="1" dirty="0">
+            <a:endParaRPr lang="en-US" sz="2100" dirty="0"/>
+          </a:p>
+        </p:txBody>
+      </p:sp>
+      <p:sp>
+        <p:nvSpPr>
+          <p:cNvPr id="20" name="Text 18"/>
+          <p:cNvSpPr/>
+          <p:nvPr/>
+        </p:nvSpPr>
+        <p:spPr>
+          <a:xfrm>
+            <a:off x="8351520" y="3939540"/>
+            <a:ext cx="2994660" cy="670560"/>
+          </a:xfrm>
+          <a:prstGeom prst="rect">
+            <a:avLst/>
+          </a:prstGeom>
+          <a:noFill/>
+          <a:ln/>
+        </p:spPr>
+        <p:txBody>
+          <a:bodyPr wrap="square" lIns="0" tIns="0" rIns="0" bIns="0" rtlCol="0" anchor="ctr"/>
+          <a:lstStyle/>
+          <a:p>
+            <a:pPr indent="0" marL="0">
+              <a:spcAft>
+                <a:spcPts val="800"/>
+              </a:spcAft>
+              <a:buNone/>
+            </a:pPr>
+            <a:r>
+              <a:rPr lang="en-US" sz="2100" b="1" dirty="0">
                 <a:solidFill>
                   <a:srgbClr val="132D40"/>
                 </a:solidFill>
@@ -4840,39 +5215,39 @@
               </a:rPr>
               <a:t>함께 배우고 싶은 분</a:t>
             </a:r>
-            <a:endParaRPr lang="en-US" sz="2040" dirty="0"/>
-          </a:p>
-        </p:txBody>
-      </p:sp>
-      <p:sp>
-        <p:nvSpPr>
-          <p:cNvPr id="17" name="Text 15"/>
-          <p:cNvSpPr/>
-          <p:nvPr/>
-        </p:nvSpPr>
-        <p:spPr>
-          <a:xfrm>
-            <a:off x="8351520" y="4953000"/>
-            <a:ext cx="2994660" cy="914400"/>
-          </a:xfrm>
-          <a:prstGeom prst="rect">
-            <a:avLst/>
-          </a:prstGeom>
-          <a:noFill/>
-          <a:ln/>
-        </p:spPr>
-        <p:txBody>
-          <a:bodyPr wrap="square" lIns="0" tIns="0" rIns="0" bIns="0" rtlCol="0" anchor="ctr"/>
-          <a:lstStyle/>
-          <a:p>
-            <a:pPr indent="0" marL="0">
-              <a:spcAft>
-                <a:spcPts val="800"/>
-              </a:spcAft>
-              <a:buNone/>
-            </a:pPr>
-            <a:r>
-              <a:rPr lang="en-US" sz="1500" dirty="0">
+            <a:endParaRPr lang="en-US" sz="2100" dirty="0"/>
+          </a:p>
+        </p:txBody>
+      </p:sp>
+      <p:sp>
+        <p:nvSpPr>
+          <p:cNvPr id="21" name="Text 19"/>
+          <p:cNvSpPr/>
+          <p:nvPr/>
+        </p:nvSpPr>
+        <p:spPr>
+          <a:xfrm>
+            <a:off x="8351520" y="4709160"/>
+            <a:ext cx="2994660" cy="1112520"/>
+          </a:xfrm>
+          <a:prstGeom prst="rect">
+            <a:avLst/>
+          </a:prstGeom>
+          <a:noFill/>
+          <a:ln/>
+        </p:spPr>
+        <p:txBody>
+          <a:bodyPr wrap="square" lIns="0" tIns="0" rIns="0" bIns="0" rtlCol="0" anchor="ctr"/>
+          <a:lstStyle/>
+          <a:p>
+            <a:pPr indent="0" marL="0">
+              <a:spcAft>
+                <a:spcPts val="800"/>
+              </a:spcAft>
+              <a:buNone/>
+            </a:pPr>
+            <a:r>
+              <a:rPr lang="en-US" sz="1740" dirty="0">
                 <a:solidFill>
                   <a:srgbClr val="62727A"/>
                 </a:solidFill>
@@ -4882,17 +5257,17 @@
               </a:rPr>
               <a:t>혼자 발표하기보다</a:t>
             </a:r>
-            <a:endParaRPr lang="en-US" sz="1500" dirty="0"/>
-          </a:p>
-          <a:p>
-            <a:pPr indent="0" marL="0">
-              <a:spcAft>
-                <a:spcPts val="800"/>
-              </a:spcAft>
-              <a:buNone/>
-            </a:pPr>
-            <a:r>
-              <a:rPr lang="en-US" sz="1500" dirty="0">
+            <a:endParaRPr lang="en-US" sz="1740" dirty="0"/>
+          </a:p>
+          <a:p>
+            <a:pPr indent="0" marL="0">
+              <a:spcAft>
+                <a:spcPts val="800"/>
+              </a:spcAft>
+              <a:buNone/>
+            </a:pPr>
+            <a:r>
+              <a:rPr lang="en-US" sz="1740" dirty="0">
                 <a:solidFill>
                   <a:srgbClr val="62727A"/>
                 </a:solidFill>
@@ -4902,13 +5277,13 @@
               </a:rPr>
               <a:t>옆 사람과 연습하고 싶은 분</a:t>
             </a:r>
-            <a:endParaRPr lang="en-US" sz="1500" dirty="0"/>
-          </a:p>
-        </p:txBody>
-      </p:sp>
-      <p:sp>
-        <p:nvSpPr>
-          <p:cNvPr id="18" name="Text 16"/>
+            <a:endParaRPr lang="en-US" sz="1740" dirty="0"/>
+          </a:p>
+        </p:txBody>
+      </p:sp>
+      <p:sp>
+        <p:nvSpPr>
+          <p:cNvPr id="22" name="Text 20"/>
           <p:cNvSpPr/>
           <p:nvPr/>
         </p:nvSpPr>
@@ -4950,7 +5325,7 @@
       </p:sp>
       <p:sp>
         <p:nvSpPr>
-          <p:cNvPr id="19" name="Text 17"/>
+          <p:cNvPr id="23" name="Text 21"/>
           <p:cNvSpPr/>
           <p:nvPr/>
         </p:nvSpPr>
@@ -5108,7 +5483,7 @@
       </p:sp>
       <p:pic>
         <p:nvPicPr>
-          <p:cNvPr id="4" name="Image 0" descr="E:\하랑\돈스탑잉글리시\docs\portfolio-proposal\assets\community-learning_ai.png">    </p:cNvPr>
+          <p:cNvPr id="4" name="Image 0" descr="E:\하랑\돈스탑잉글리시\docs\portfolio-proposal\assets\group-935-606_ai.png">    </p:cNvPr>
           <p:cNvPicPr>
             <a:picLocks noChangeAspect="1"/>
           </p:cNvPicPr>
@@ -5116,8 +5491,9 @@
         </p:nvPicPr>
         <p:blipFill>
           <a:blip r:embed="rId1"/>
-          <a:srcRect l="6835" r="6835" t="0" b="0"/>
-          <a:stretch/>
+          <a:stretch>
+            <a:fillRect/>
+          </a:stretch>
         </p:blipFill>
         <p:spPr>
           <a:xfrm>
@@ -5569,26 +5945,26 @@
         <p:spPr>
           <a:xfrm>
             <a:off x="609600" y="1120140"/>
-            <a:ext cx="10820400" cy="1181100"/>
-          </a:xfrm>
-          <a:prstGeom prst="rect">
-            <a:avLst/>
-          </a:prstGeom>
-          <a:noFill/>
-          <a:ln/>
-        </p:spPr>
-        <p:txBody>
-          <a:bodyPr wrap="square" lIns="0" tIns="0" rIns="0" bIns="0" rtlCol="0" anchor="ctr"/>
-          <a:lstStyle/>
-          <a:p>
-            <a:pPr indent="0" marL="0">
-              <a:spcAft>
-                <a:spcPts val="800"/>
-              </a:spcAft>
-              <a:buNone/>
-            </a:pPr>
-            <a:r>
-              <a:rPr lang="en-US" sz="3840" b="1" dirty="0">
+            <a:ext cx="10820400" cy="1089660"/>
+          </a:xfrm>
+          <a:prstGeom prst="rect">
+            <a:avLst/>
+          </a:prstGeom>
+          <a:noFill/>
+          <a:ln/>
+        </p:spPr>
+        <p:txBody>
+          <a:bodyPr wrap="square" lIns="0" tIns="0" rIns="0" bIns="0" rtlCol="0" anchor="ctr"/>
+          <a:lstStyle/>
+          <a:p>
+            <a:pPr indent="0" marL="0">
+              <a:spcAft>
+                <a:spcPts val="800"/>
+              </a:spcAft>
+              <a:buNone/>
+            </a:pPr>
+            <a:r>
+              <a:rPr lang="en-US" sz="3960" b="1" dirty="0">
                 <a:solidFill>
                   <a:srgbClr val="132D40"/>
                 </a:solidFill>
@@ -5598,39 +5974,64 @@
               </a:rPr>
               <a:t>쓸 장면을 먼저 고릅니다</a:t>
             </a:r>
-            <a:endParaRPr lang="en-US" sz="3840" dirty="0"/>
-          </a:p>
-        </p:txBody>
-      </p:sp>
-      <p:sp>
-        <p:nvSpPr>
-          <p:cNvPr id="5" name="Text 3"/>
-          <p:cNvSpPr/>
-          <p:nvPr/>
-        </p:nvSpPr>
-        <p:spPr>
-          <a:xfrm>
-            <a:off x="609600" y="2331720"/>
-            <a:ext cx="10744200" cy="609600"/>
-          </a:xfrm>
-          <a:prstGeom prst="rect">
-            <a:avLst/>
-          </a:prstGeom>
-          <a:noFill/>
-          <a:ln/>
-        </p:spPr>
-        <p:txBody>
-          <a:bodyPr wrap="square" lIns="0" tIns="0" rIns="0" bIns="0" rtlCol="0" anchor="ctr"/>
-          <a:lstStyle/>
-          <a:p>
-            <a:pPr indent="0" marL="0">
-              <a:spcAft>
-                <a:spcPts val="800"/>
-              </a:spcAft>
-              <a:buNone/>
-            </a:pPr>
-            <a:r>
-              <a:rPr lang="en-US" sz="1620" dirty="0">
+            <a:endParaRPr lang="en-US" sz="3960" dirty="0"/>
+          </a:p>
+        </p:txBody>
+      </p:sp>
+      <p:sp>
+        <p:nvSpPr>
+          <p:cNvPr id="5" name="Shape 3"/>
+          <p:cNvSpPr/>
+          <p:nvPr/>
+        </p:nvSpPr>
+        <p:spPr>
+          <a:xfrm>
+            <a:off x="609600" y="2202180"/>
+            <a:ext cx="647700" cy="45720"/>
+          </a:xfrm>
+          <a:prstGeom prst="rect">
+            <a:avLst/>
+          </a:prstGeom>
+          <a:solidFill>
+            <a:srgbClr val="DC955B"/>
+          </a:solidFill>
+          <a:ln w="12700">
+            <a:solidFill>
+              <a:srgbClr val="DC955B"/>
+            </a:solidFill>
+            <a:prstDash val="solid"/>
+          </a:ln>
+        </p:spPr>
+      </p:sp>
+      <p:sp>
+        <p:nvSpPr>
+          <p:cNvPr id="6" name="Text 4"/>
+          <p:cNvSpPr/>
+          <p:nvPr/>
+        </p:nvSpPr>
+        <p:spPr>
+          <a:xfrm>
+            <a:off x="609600" y="2484120"/>
+            <a:ext cx="10744200" cy="640080"/>
+          </a:xfrm>
+          <a:prstGeom prst="rect">
+            <a:avLst/>
+          </a:prstGeom>
+          <a:noFill/>
+          <a:ln/>
+        </p:spPr>
+        <p:txBody>
+          <a:bodyPr wrap="square" lIns="0" tIns="0" rIns="0" bIns="0" rtlCol="0" anchor="ctr"/>
+          <a:lstStyle/>
+          <a:p>
+            <a:pPr indent="0" marL="0">
+              <a:spcAft>
+                <a:spcPts val="800"/>
+              </a:spcAft>
+              <a:buNone/>
+            </a:pPr>
+            <a:r>
+              <a:rPr lang="en-US" sz="1800" dirty="0">
                 <a:solidFill>
                   <a:srgbClr val="62727A"/>
                 </a:solidFill>
@@ -5640,13 +6041,13 @@
               </a:rPr>
               <a:t>첫 수업은 한 가지 장면을 중심으로, 표현을 듣고 직접 말해보는 구성을 제안합니다.</a:t>
             </a:r>
-            <a:endParaRPr lang="en-US" sz="1620" dirty="0"/>
-          </a:p>
-        </p:txBody>
-      </p:sp>
-      <p:sp>
-        <p:nvSpPr>
-          <p:cNvPr id="6" name="Shape 4"/>
+            <a:endParaRPr lang="en-US" sz="1800" dirty="0"/>
+          </a:p>
+        </p:txBody>
+      </p:sp>
+      <p:sp>
+        <p:nvSpPr>
+          <p:cNvPr id="7" name="Shape 5"/>
           <p:cNvSpPr/>
           <p:nvPr/>
         </p:nvSpPr>
@@ -5671,33 +6072,58 @@
       </p:sp>
       <p:sp>
         <p:nvSpPr>
-          <p:cNvPr id="7" name="Text 5"/>
-          <p:cNvSpPr/>
-          <p:nvPr/>
-        </p:nvSpPr>
-        <p:spPr>
-          <a:xfrm>
-            <a:off x="838200" y="3444240"/>
-            <a:ext cx="2994660" cy="419100"/>
-          </a:xfrm>
-          <a:prstGeom prst="rect">
-            <a:avLst/>
-          </a:prstGeom>
-          <a:noFill/>
-          <a:ln/>
-        </p:spPr>
-        <p:txBody>
-          <a:bodyPr wrap="square" lIns="0" tIns="0" rIns="0" bIns="0" rtlCol="0" anchor="ctr"/>
-          <a:lstStyle/>
-          <a:p>
-            <a:pPr indent="0" marL="0">
-              <a:spcAft>
-                <a:spcPts val="800"/>
-              </a:spcAft>
-              <a:buNone/>
-            </a:pPr>
-            <a:r>
-              <a:rPr lang="en-US" sz="2520" b="1" dirty="0">
+          <p:cNvPr id="8" name="Shape 6"/>
+          <p:cNvSpPr/>
+          <p:nvPr/>
+        </p:nvSpPr>
+        <p:spPr>
+          <a:xfrm>
+            <a:off x="609600" y="3238500"/>
+            <a:ext cx="45720" cy="2705100"/>
+          </a:xfrm>
+          <a:prstGeom prst="rect">
+            <a:avLst/>
+          </a:prstGeom>
+          <a:solidFill>
+            <a:srgbClr val="227C78"/>
+          </a:solidFill>
+          <a:ln w="12700">
+            <a:solidFill>
+              <a:srgbClr val="227C78"/>
+            </a:solidFill>
+            <a:prstDash val="solid"/>
+          </a:ln>
+        </p:spPr>
+      </p:sp>
+      <p:sp>
+        <p:nvSpPr>
+          <p:cNvPr id="9" name="Text 7"/>
+          <p:cNvSpPr/>
+          <p:nvPr/>
+        </p:nvSpPr>
+        <p:spPr>
+          <a:xfrm>
+            <a:off x="838200" y="3406140"/>
+            <a:ext cx="2994660" cy="365760"/>
+          </a:xfrm>
+          <a:prstGeom prst="rect">
+            <a:avLst/>
+          </a:prstGeom>
+          <a:noFill/>
+          <a:ln/>
+        </p:spPr>
+        <p:txBody>
+          <a:bodyPr wrap="square" lIns="0" tIns="0" rIns="0" bIns="0" rtlCol="0" anchor="ctr"/>
+          <a:lstStyle/>
+          <a:p>
+            <a:pPr indent="0" marL="0">
+              <a:spcAft>
+                <a:spcPts val="800"/>
+              </a:spcAft>
+              <a:buNone/>
+            </a:pPr>
+            <a:r>
+              <a:rPr lang="en-US" sz="2100" b="1" dirty="0">
                 <a:solidFill>
                   <a:srgbClr val="227C78"/>
                 </a:solidFill>
@@ -5707,39 +6133,39 @@
               </a:rPr>
               <a:t>01</a:t>
             </a:r>
-            <a:endParaRPr lang="en-US" sz="2520" dirty="0"/>
-          </a:p>
-        </p:txBody>
-      </p:sp>
-      <p:sp>
-        <p:nvSpPr>
-          <p:cNvPr id="8" name="Text 6"/>
-          <p:cNvSpPr/>
-          <p:nvPr/>
-        </p:nvSpPr>
-        <p:spPr>
-          <a:xfrm>
-            <a:off x="838200" y="4076700"/>
-            <a:ext cx="2994660" cy="762000"/>
-          </a:xfrm>
-          <a:prstGeom prst="rect">
-            <a:avLst/>
-          </a:prstGeom>
-          <a:noFill/>
-          <a:ln/>
-        </p:spPr>
-        <p:txBody>
-          <a:bodyPr wrap="square" lIns="0" tIns="0" rIns="0" bIns="0" rtlCol="0" anchor="ctr"/>
-          <a:lstStyle/>
-          <a:p>
-            <a:pPr indent="0" marL="0">
-              <a:spcAft>
-                <a:spcPts val="800"/>
-              </a:spcAft>
-              <a:buNone/>
-            </a:pPr>
-            <a:r>
-              <a:rPr lang="en-US" sz="2040" b="1" dirty="0">
+            <a:endParaRPr lang="en-US" sz="2100" dirty="0"/>
+          </a:p>
+        </p:txBody>
+      </p:sp>
+      <p:sp>
+        <p:nvSpPr>
+          <p:cNvPr id="10" name="Text 8"/>
+          <p:cNvSpPr/>
+          <p:nvPr/>
+        </p:nvSpPr>
+        <p:spPr>
+          <a:xfrm>
+            <a:off x="838200" y="3939540"/>
+            <a:ext cx="2994660" cy="670560"/>
+          </a:xfrm>
+          <a:prstGeom prst="rect">
+            <a:avLst/>
+          </a:prstGeom>
+          <a:noFill/>
+          <a:ln/>
+        </p:spPr>
+        <p:txBody>
+          <a:bodyPr wrap="square" lIns="0" tIns="0" rIns="0" bIns="0" rtlCol="0" anchor="ctr"/>
+          <a:lstStyle/>
+          <a:p>
+            <a:pPr indent="0" marL="0">
+              <a:spcAft>
+                <a:spcPts val="800"/>
+              </a:spcAft>
+              <a:buNone/>
+            </a:pPr>
+            <a:r>
+              <a:rPr lang="en-US" sz="2100" b="1" dirty="0">
                 <a:solidFill>
                   <a:srgbClr val="132D40"/>
                 </a:solidFill>
@@ -5749,39 +6175,39 @@
               </a:rPr>
               <a:t>주문하기</a:t>
             </a:r>
-            <a:endParaRPr lang="en-US" sz="2040" dirty="0"/>
-          </a:p>
-        </p:txBody>
-      </p:sp>
-      <p:sp>
-        <p:nvSpPr>
-          <p:cNvPr id="9" name="Text 7"/>
-          <p:cNvSpPr/>
-          <p:nvPr/>
-        </p:nvSpPr>
-        <p:spPr>
-          <a:xfrm>
-            <a:off x="838200" y="4953000"/>
-            <a:ext cx="2994660" cy="914400"/>
-          </a:xfrm>
-          <a:prstGeom prst="rect">
-            <a:avLst/>
-          </a:prstGeom>
-          <a:noFill/>
-          <a:ln/>
-        </p:spPr>
-        <p:txBody>
-          <a:bodyPr wrap="square" lIns="0" tIns="0" rIns="0" bIns="0" rtlCol="0" anchor="ctr"/>
-          <a:lstStyle/>
-          <a:p>
-            <a:pPr indent="0" marL="0">
-              <a:spcAft>
-                <a:spcPts val="800"/>
-              </a:spcAft>
-              <a:buNone/>
-            </a:pPr>
-            <a:r>
-              <a:rPr lang="en-US" sz="1500" dirty="0">
+            <a:endParaRPr lang="en-US" sz="2100" dirty="0"/>
+          </a:p>
+        </p:txBody>
+      </p:sp>
+      <p:sp>
+        <p:nvSpPr>
+          <p:cNvPr id="11" name="Text 9"/>
+          <p:cNvSpPr/>
+          <p:nvPr/>
+        </p:nvSpPr>
+        <p:spPr>
+          <a:xfrm>
+            <a:off x="838200" y="4709160"/>
+            <a:ext cx="2994660" cy="1112520"/>
+          </a:xfrm>
+          <a:prstGeom prst="rect">
+            <a:avLst/>
+          </a:prstGeom>
+          <a:noFill/>
+          <a:ln/>
+        </p:spPr>
+        <p:txBody>
+          <a:bodyPr wrap="square" lIns="0" tIns="0" rIns="0" bIns="0" rtlCol="0" anchor="ctr"/>
+          <a:lstStyle/>
+          <a:p>
+            <a:pPr indent="0" marL="0">
+              <a:spcAft>
+                <a:spcPts val="800"/>
+              </a:spcAft>
+              <a:buNone/>
+            </a:pPr>
+            <a:r>
+              <a:rPr lang="en-US" sz="1740" dirty="0">
                 <a:solidFill>
                   <a:srgbClr val="62727A"/>
                 </a:solidFill>
@@ -5789,19 +6215,19 @@
                 <a:ea typeface="Malgun Gothic" pitchFamily="34" charset="-122"/>
                 <a:cs typeface="Malgun Gothic" pitchFamily="34" charset="-120"/>
               </a:rPr>
-              <a:t>원하는 것과 수량을 말해봅니다.</a:t>
-            </a:r>
-            <a:endParaRPr lang="en-US" sz="1500" dirty="0"/>
-          </a:p>
-          <a:p>
-            <a:pPr indent="0" marL="0">
-              <a:spcAft>
-                <a:spcPts val="800"/>
-              </a:spcAft>
-              <a:buNone/>
-            </a:pPr>
-            <a:r>
-              <a:rPr lang="en-US" sz="1500" dirty="0">
+              <a:t>원하는 것과 수량을</a:t>
+            </a:r>
+            <a:endParaRPr lang="en-US" sz="1740" dirty="0"/>
+          </a:p>
+          <a:p>
+            <a:pPr indent="0" marL="0">
+              <a:spcAft>
+                <a:spcPts val="800"/>
+              </a:spcAft>
+              <a:buNone/>
+            </a:pPr>
+            <a:r>
+              <a:rPr lang="en-US" sz="1740" dirty="0">
                 <a:solidFill>
                   <a:srgbClr val="62727A"/>
                 </a:solidFill>
@@ -5809,15 +6235,35 @@
                 <a:ea typeface="Malgun Gothic" pitchFamily="34" charset="-122"/>
                 <a:cs typeface="Malgun Gothic" pitchFamily="34" charset="-120"/>
               </a:rPr>
+              <a:t>말해봅니다.</a:t>
+            </a:r>
+            <a:endParaRPr lang="en-US" sz="1740" dirty="0"/>
+          </a:p>
+          <a:p>
+            <a:pPr indent="0" marL="0">
+              <a:spcAft>
+                <a:spcPts val="800"/>
+              </a:spcAft>
+              <a:buNone/>
+            </a:pPr>
+            <a:r>
+              <a:rPr lang="en-US" sz="1740" dirty="0">
+                <a:solidFill>
+                  <a:srgbClr val="62727A"/>
+                </a:solidFill>
+                <a:latin typeface="Malgun Gothic" pitchFamily="34" charset="0"/>
+                <a:ea typeface="Malgun Gothic" pitchFamily="34" charset="-122"/>
+                <a:cs typeface="Malgun Gothic" pitchFamily="34" charset="-120"/>
+              </a:rPr>
               <a:t>I would like a coffee, please.</a:t>
             </a:r>
-            <a:endParaRPr lang="en-US" sz="1500" dirty="0"/>
-          </a:p>
-        </p:txBody>
-      </p:sp>
-      <p:sp>
-        <p:nvSpPr>
-          <p:cNvPr id="10" name="Shape 8"/>
+            <a:endParaRPr lang="en-US" sz="1740" dirty="0"/>
+          </a:p>
+        </p:txBody>
+      </p:sp>
+      <p:sp>
+        <p:nvSpPr>
+          <p:cNvPr id="12" name="Shape 10"/>
           <p:cNvSpPr/>
           <p:nvPr/>
         </p:nvSpPr>
@@ -5842,33 +6288,58 @@
       </p:sp>
       <p:sp>
         <p:nvSpPr>
-          <p:cNvPr id="11" name="Text 9"/>
-          <p:cNvSpPr/>
-          <p:nvPr/>
-        </p:nvSpPr>
-        <p:spPr>
-          <a:xfrm>
-            <a:off x="4594860" y="3444240"/>
-            <a:ext cx="2994660" cy="419100"/>
-          </a:xfrm>
-          <a:prstGeom prst="rect">
-            <a:avLst/>
-          </a:prstGeom>
-          <a:noFill/>
-          <a:ln/>
-        </p:spPr>
-        <p:txBody>
-          <a:bodyPr wrap="square" lIns="0" tIns="0" rIns="0" bIns="0" rtlCol="0" anchor="ctr"/>
-          <a:lstStyle/>
-          <a:p>
-            <a:pPr indent="0" marL="0">
-              <a:spcAft>
-                <a:spcPts val="800"/>
-              </a:spcAft>
-              <a:buNone/>
-            </a:pPr>
-            <a:r>
-              <a:rPr lang="en-US" sz="2520" b="1" dirty="0">
+          <p:cNvPr id="13" name="Shape 11"/>
+          <p:cNvSpPr/>
+          <p:nvPr/>
+        </p:nvSpPr>
+        <p:spPr>
+          <a:xfrm>
+            <a:off x="4366260" y="3238500"/>
+            <a:ext cx="45720" cy="2705100"/>
+          </a:xfrm>
+          <a:prstGeom prst="rect">
+            <a:avLst/>
+          </a:prstGeom>
+          <a:solidFill>
+            <a:srgbClr val="227C78"/>
+          </a:solidFill>
+          <a:ln w="12700">
+            <a:solidFill>
+              <a:srgbClr val="227C78"/>
+            </a:solidFill>
+            <a:prstDash val="solid"/>
+          </a:ln>
+        </p:spPr>
+      </p:sp>
+      <p:sp>
+        <p:nvSpPr>
+          <p:cNvPr id="14" name="Text 12"/>
+          <p:cNvSpPr/>
+          <p:nvPr/>
+        </p:nvSpPr>
+        <p:spPr>
+          <a:xfrm>
+            <a:off x="4594860" y="3406140"/>
+            <a:ext cx="2994660" cy="365760"/>
+          </a:xfrm>
+          <a:prstGeom prst="rect">
+            <a:avLst/>
+          </a:prstGeom>
+          <a:noFill/>
+          <a:ln/>
+        </p:spPr>
+        <p:txBody>
+          <a:bodyPr wrap="square" lIns="0" tIns="0" rIns="0" bIns="0" rtlCol="0" anchor="ctr"/>
+          <a:lstStyle/>
+          <a:p>
+            <a:pPr indent="0" marL="0">
+              <a:spcAft>
+                <a:spcPts val="800"/>
+              </a:spcAft>
+              <a:buNone/>
+            </a:pPr>
+            <a:r>
+              <a:rPr lang="en-US" sz="2100" b="1" dirty="0">
                 <a:solidFill>
                   <a:srgbClr val="227C78"/>
                 </a:solidFill>
@@ -5878,39 +6349,39 @@
               </a:rPr>
               <a:t>02</a:t>
             </a:r>
-            <a:endParaRPr lang="en-US" sz="2520" dirty="0"/>
-          </a:p>
-        </p:txBody>
-      </p:sp>
-      <p:sp>
-        <p:nvSpPr>
-          <p:cNvPr id="12" name="Text 10"/>
-          <p:cNvSpPr/>
-          <p:nvPr/>
-        </p:nvSpPr>
-        <p:spPr>
-          <a:xfrm>
-            <a:off x="4594860" y="4076700"/>
-            <a:ext cx="2994660" cy="762000"/>
-          </a:xfrm>
-          <a:prstGeom prst="rect">
-            <a:avLst/>
-          </a:prstGeom>
-          <a:noFill/>
-          <a:ln/>
-        </p:spPr>
-        <p:txBody>
-          <a:bodyPr wrap="square" lIns="0" tIns="0" rIns="0" bIns="0" rtlCol="0" anchor="ctr"/>
-          <a:lstStyle/>
-          <a:p>
-            <a:pPr indent="0" marL="0">
-              <a:spcAft>
-                <a:spcPts val="800"/>
-              </a:spcAft>
-              <a:buNone/>
-            </a:pPr>
-            <a:r>
-              <a:rPr lang="en-US" sz="2040" b="1" dirty="0">
+            <a:endParaRPr lang="en-US" sz="2100" dirty="0"/>
+          </a:p>
+        </p:txBody>
+      </p:sp>
+      <p:sp>
+        <p:nvSpPr>
+          <p:cNvPr id="15" name="Text 13"/>
+          <p:cNvSpPr/>
+          <p:nvPr/>
+        </p:nvSpPr>
+        <p:spPr>
+          <a:xfrm>
+            <a:off x="4594860" y="3939540"/>
+            <a:ext cx="2994660" cy="670560"/>
+          </a:xfrm>
+          <a:prstGeom prst="rect">
+            <a:avLst/>
+          </a:prstGeom>
+          <a:noFill/>
+          <a:ln/>
+        </p:spPr>
+        <p:txBody>
+          <a:bodyPr wrap="square" lIns="0" tIns="0" rIns="0" bIns="0" rtlCol="0" anchor="ctr"/>
+          <a:lstStyle/>
+          <a:p>
+            <a:pPr indent="0" marL="0">
+              <a:spcAft>
+                <a:spcPts val="800"/>
+              </a:spcAft>
+              <a:buNone/>
+            </a:pPr>
+            <a:r>
+              <a:rPr lang="en-US" sz="2100" b="1" dirty="0">
                 <a:solidFill>
                   <a:srgbClr val="132D40"/>
                 </a:solidFill>
@@ -5920,39 +6391,39 @@
               </a:rPr>
               <a:t>길 묻기</a:t>
             </a:r>
-            <a:endParaRPr lang="en-US" sz="2040" dirty="0"/>
-          </a:p>
-        </p:txBody>
-      </p:sp>
-      <p:sp>
-        <p:nvSpPr>
-          <p:cNvPr id="13" name="Text 11"/>
-          <p:cNvSpPr/>
-          <p:nvPr/>
-        </p:nvSpPr>
-        <p:spPr>
-          <a:xfrm>
-            <a:off x="4594860" y="4953000"/>
-            <a:ext cx="2994660" cy="914400"/>
-          </a:xfrm>
-          <a:prstGeom prst="rect">
-            <a:avLst/>
-          </a:prstGeom>
-          <a:noFill/>
-          <a:ln/>
-        </p:spPr>
-        <p:txBody>
-          <a:bodyPr wrap="square" lIns="0" tIns="0" rIns="0" bIns="0" rtlCol="0" anchor="ctr"/>
-          <a:lstStyle/>
-          <a:p>
-            <a:pPr indent="0" marL="0">
-              <a:spcAft>
-                <a:spcPts val="800"/>
-              </a:spcAft>
-              <a:buNone/>
-            </a:pPr>
-            <a:r>
-              <a:rPr lang="en-US" sz="1500" dirty="0">
+            <a:endParaRPr lang="en-US" sz="2100" dirty="0"/>
+          </a:p>
+        </p:txBody>
+      </p:sp>
+      <p:sp>
+        <p:nvSpPr>
+          <p:cNvPr id="16" name="Text 14"/>
+          <p:cNvSpPr/>
+          <p:nvPr/>
+        </p:nvSpPr>
+        <p:spPr>
+          <a:xfrm>
+            <a:off x="4594860" y="4709160"/>
+            <a:ext cx="2994660" cy="1112520"/>
+          </a:xfrm>
+          <a:prstGeom prst="rect">
+            <a:avLst/>
+          </a:prstGeom>
+          <a:noFill/>
+          <a:ln/>
+        </p:spPr>
+        <p:txBody>
+          <a:bodyPr wrap="square" lIns="0" tIns="0" rIns="0" bIns="0" rtlCol="0" anchor="ctr"/>
+          <a:lstStyle/>
+          <a:p>
+            <a:pPr indent="0" marL="0">
+              <a:spcAft>
+                <a:spcPts val="800"/>
+              </a:spcAft>
+              <a:buNone/>
+            </a:pPr>
+            <a:r>
+              <a:rPr lang="en-US" sz="1740" dirty="0">
                 <a:solidFill>
                   <a:srgbClr val="62727A"/>
                 </a:solidFill>
@@ -5960,19 +6431,19 @@
                 <a:ea typeface="Malgun Gothic" pitchFamily="34" charset="-122"/>
                 <a:cs typeface="Malgun Gothic" pitchFamily="34" charset="-120"/>
               </a:rPr>
-              <a:t>목적지를 묻고 안내를 듣습니다.</a:t>
-            </a:r>
-            <a:endParaRPr lang="en-US" sz="1500" dirty="0"/>
-          </a:p>
-          <a:p>
-            <a:pPr indent="0" marL="0">
-              <a:spcAft>
-                <a:spcPts val="800"/>
-              </a:spcAft>
-              <a:buNone/>
-            </a:pPr>
-            <a:r>
-              <a:rPr lang="en-US" sz="1500" dirty="0">
+              <a:t>목적지를 묻고</a:t>
+            </a:r>
+            <a:endParaRPr lang="en-US" sz="1740" dirty="0"/>
+          </a:p>
+          <a:p>
+            <a:pPr indent="0" marL="0">
+              <a:spcAft>
+                <a:spcPts val="800"/>
+              </a:spcAft>
+              <a:buNone/>
+            </a:pPr>
+            <a:r>
+              <a:rPr lang="en-US" sz="1740" dirty="0">
                 <a:solidFill>
                   <a:srgbClr val="62727A"/>
                 </a:solidFill>
@@ -5980,15 +6451,35 @@
                 <a:ea typeface="Malgun Gothic" pitchFamily="34" charset="-122"/>
                 <a:cs typeface="Malgun Gothic" pitchFamily="34" charset="-120"/>
               </a:rPr>
+              <a:t>안내를 듣습니다.</a:t>
+            </a:r>
+            <a:endParaRPr lang="en-US" sz="1740" dirty="0"/>
+          </a:p>
+          <a:p>
+            <a:pPr indent="0" marL="0">
+              <a:spcAft>
+                <a:spcPts val="800"/>
+              </a:spcAft>
+              <a:buNone/>
+            </a:pPr>
+            <a:r>
+              <a:rPr lang="en-US" sz="1740" dirty="0">
+                <a:solidFill>
+                  <a:srgbClr val="62727A"/>
+                </a:solidFill>
+                <a:latin typeface="Malgun Gothic" pitchFamily="34" charset="0"/>
+                <a:ea typeface="Malgun Gothic" pitchFamily="34" charset="-122"/>
+                <a:cs typeface="Malgun Gothic" pitchFamily="34" charset="-120"/>
+              </a:rPr>
               <a:t>Where is the station?</a:t>
             </a:r>
-            <a:endParaRPr lang="en-US" sz="1500" dirty="0"/>
-          </a:p>
-        </p:txBody>
-      </p:sp>
-      <p:sp>
-        <p:nvSpPr>
-          <p:cNvPr id="14" name="Shape 12"/>
+            <a:endParaRPr lang="en-US" sz="1740" dirty="0"/>
+          </a:p>
+        </p:txBody>
+      </p:sp>
+      <p:sp>
+        <p:nvSpPr>
+          <p:cNvPr id="17" name="Shape 15"/>
           <p:cNvSpPr/>
           <p:nvPr/>
         </p:nvSpPr>
@@ -6013,33 +6504,58 @@
       </p:sp>
       <p:sp>
         <p:nvSpPr>
-          <p:cNvPr id="15" name="Text 13"/>
-          <p:cNvSpPr/>
-          <p:nvPr/>
-        </p:nvSpPr>
-        <p:spPr>
-          <a:xfrm>
-            <a:off x="8351520" y="3444240"/>
-            <a:ext cx="2994660" cy="419100"/>
-          </a:xfrm>
-          <a:prstGeom prst="rect">
-            <a:avLst/>
-          </a:prstGeom>
-          <a:noFill/>
-          <a:ln/>
-        </p:spPr>
-        <p:txBody>
-          <a:bodyPr wrap="square" lIns="0" tIns="0" rIns="0" bIns="0" rtlCol="0" anchor="ctr"/>
-          <a:lstStyle/>
-          <a:p>
-            <a:pPr indent="0" marL="0">
-              <a:spcAft>
-                <a:spcPts val="800"/>
-              </a:spcAft>
-              <a:buNone/>
-            </a:pPr>
-            <a:r>
-              <a:rPr lang="en-US" sz="2520" b="1" dirty="0">
+          <p:cNvPr id="18" name="Shape 16"/>
+          <p:cNvSpPr/>
+          <p:nvPr/>
+        </p:nvSpPr>
+        <p:spPr>
+          <a:xfrm>
+            <a:off x="8122920" y="3238500"/>
+            <a:ext cx="45720" cy="2705100"/>
+          </a:xfrm>
+          <a:prstGeom prst="rect">
+            <a:avLst/>
+          </a:prstGeom>
+          <a:solidFill>
+            <a:srgbClr val="227C78"/>
+          </a:solidFill>
+          <a:ln w="12700">
+            <a:solidFill>
+              <a:srgbClr val="227C78"/>
+            </a:solidFill>
+            <a:prstDash val="solid"/>
+          </a:ln>
+        </p:spPr>
+      </p:sp>
+      <p:sp>
+        <p:nvSpPr>
+          <p:cNvPr id="19" name="Text 17"/>
+          <p:cNvSpPr/>
+          <p:nvPr/>
+        </p:nvSpPr>
+        <p:spPr>
+          <a:xfrm>
+            <a:off x="8351520" y="3406140"/>
+            <a:ext cx="2994660" cy="365760"/>
+          </a:xfrm>
+          <a:prstGeom prst="rect">
+            <a:avLst/>
+          </a:prstGeom>
+          <a:noFill/>
+          <a:ln/>
+        </p:spPr>
+        <p:txBody>
+          <a:bodyPr wrap="square" lIns="0" tIns="0" rIns="0" bIns="0" rtlCol="0" anchor="ctr"/>
+          <a:lstStyle/>
+          <a:p>
+            <a:pPr indent="0" marL="0">
+              <a:spcAft>
+                <a:spcPts val="800"/>
+              </a:spcAft>
+              <a:buNone/>
+            </a:pPr>
+            <a:r>
+              <a:rPr lang="en-US" sz="2100" b="1" dirty="0">
                 <a:solidFill>
                   <a:srgbClr val="227C78"/>
                 </a:solidFill>
@@ -6049,39 +6565,39 @@
               </a:rPr>
               <a:t>03</a:t>
             </a:r>
-            <a:endParaRPr lang="en-US" sz="2520" dirty="0"/>
-          </a:p>
-        </p:txBody>
-      </p:sp>
-      <p:sp>
-        <p:nvSpPr>
-          <p:cNvPr id="16" name="Text 14"/>
-          <p:cNvSpPr/>
-          <p:nvPr/>
-        </p:nvSpPr>
-        <p:spPr>
-          <a:xfrm>
-            <a:off x="8351520" y="4076700"/>
-            <a:ext cx="2994660" cy="762000"/>
-          </a:xfrm>
-          <a:prstGeom prst="rect">
-            <a:avLst/>
-          </a:prstGeom>
-          <a:noFill/>
-          <a:ln/>
-        </p:spPr>
-        <p:txBody>
-          <a:bodyPr wrap="square" lIns="0" tIns="0" rIns="0" bIns="0" rtlCol="0" anchor="ctr"/>
-          <a:lstStyle/>
-          <a:p>
-            <a:pPr indent="0" marL="0">
-              <a:spcAft>
-                <a:spcPts val="800"/>
-              </a:spcAft>
-              <a:buNone/>
-            </a:pPr>
-            <a:r>
-              <a:rPr lang="en-US" sz="2040" b="1" dirty="0">
+            <a:endParaRPr lang="en-US" sz="2100" dirty="0"/>
+          </a:p>
+        </p:txBody>
+      </p:sp>
+      <p:sp>
+        <p:nvSpPr>
+          <p:cNvPr id="20" name="Text 18"/>
+          <p:cNvSpPr/>
+          <p:nvPr/>
+        </p:nvSpPr>
+        <p:spPr>
+          <a:xfrm>
+            <a:off x="8351520" y="3939540"/>
+            <a:ext cx="2994660" cy="670560"/>
+          </a:xfrm>
+          <a:prstGeom prst="rect">
+            <a:avLst/>
+          </a:prstGeom>
+          <a:noFill/>
+          <a:ln/>
+        </p:spPr>
+        <p:txBody>
+          <a:bodyPr wrap="square" lIns="0" tIns="0" rIns="0" bIns="0" rtlCol="0" anchor="ctr"/>
+          <a:lstStyle/>
+          <a:p>
+            <a:pPr indent="0" marL="0">
+              <a:spcAft>
+                <a:spcPts val="800"/>
+              </a:spcAft>
+              <a:buNone/>
+            </a:pPr>
+            <a:r>
+              <a:rPr lang="en-US" sz="2100" b="1" dirty="0">
                 <a:solidFill>
                   <a:srgbClr val="132D40"/>
                 </a:solidFill>
@@ -6091,39 +6607,39 @@
               </a:rPr>
               <a:t>인사와 소개</a:t>
             </a:r>
-            <a:endParaRPr lang="en-US" sz="2040" dirty="0"/>
-          </a:p>
-        </p:txBody>
-      </p:sp>
-      <p:sp>
-        <p:nvSpPr>
-          <p:cNvPr id="17" name="Text 15"/>
-          <p:cNvSpPr/>
-          <p:nvPr/>
-        </p:nvSpPr>
-        <p:spPr>
-          <a:xfrm>
-            <a:off x="8351520" y="4953000"/>
-            <a:ext cx="2994660" cy="914400"/>
-          </a:xfrm>
-          <a:prstGeom prst="rect">
-            <a:avLst/>
-          </a:prstGeom>
-          <a:noFill/>
-          <a:ln/>
-        </p:spPr>
-        <p:txBody>
-          <a:bodyPr wrap="square" lIns="0" tIns="0" rIns="0" bIns="0" rtlCol="0" anchor="ctr"/>
-          <a:lstStyle/>
-          <a:p>
-            <a:pPr indent="0" marL="0">
-              <a:spcAft>
-                <a:spcPts val="800"/>
-              </a:spcAft>
-              <a:buNone/>
-            </a:pPr>
-            <a:r>
-              <a:rPr lang="en-US" sz="1500" dirty="0">
+            <a:endParaRPr lang="en-US" sz="2100" dirty="0"/>
+          </a:p>
+        </p:txBody>
+      </p:sp>
+      <p:sp>
+        <p:nvSpPr>
+          <p:cNvPr id="21" name="Text 19"/>
+          <p:cNvSpPr/>
+          <p:nvPr/>
+        </p:nvSpPr>
+        <p:spPr>
+          <a:xfrm>
+            <a:off x="8351520" y="4709160"/>
+            <a:ext cx="2994660" cy="1112520"/>
+          </a:xfrm>
+          <a:prstGeom prst="rect">
+            <a:avLst/>
+          </a:prstGeom>
+          <a:noFill/>
+          <a:ln/>
+        </p:spPr>
+        <p:txBody>
+          <a:bodyPr wrap="square" lIns="0" tIns="0" rIns="0" bIns="0" rtlCol="0" anchor="ctr"/>
+          <a:lstStyle/>
+          <a:p>
+            <a:pPr indent="0" marL="0">
+              <a:spcAft>
+                <a:spcPts val="800"/>
+              </a:spcAft>
+              <a:buNone/>
+            </a:pPr>
+            <a:r>
+              <a:rPr lang="en-US" sz="1740" dirty="0">
                 <a:solidFill>
                   <a:srgbClr val="62727A"/>
                 </a:solidFill>
@@ -6131,19 +6647,19 @@
                 <a:ea typeface="Malgun Gothic" pitchFamily="34" charset="-122"/>
                 <a:cs typeface="Malgun Gothic" pitchFamily="34" charset="-120"/>
               </a:rPr>
-              <a:t>이름을 말하고 인사를 나눕니다.</a:t>
-            </a:r>
-            <a:endParaRPr lang="en-US" sz="1500" dirty="0"/>
-          </a:p>
-          <a:p>
-            <a:pPr indent="0" marL="0">
-              <a:spcAft>
-                <a:spcPts val="800"/>
-              </a:spcAft>
-              <a:buNone/>
-            </a:pPr>
-            <a:r>
-              <a:rPr lang="en-US" sz="1500" dirty="0">
+              <a:t>이름을 말하고</a:t>
+            </a:r>
+            <a:endParaRPr lang="en-US" sz="1740" dirty="0"/>
+          </a:p>
+          <a:p>
+            <a:pPr indent="0" marL="0">
+              <a:spcAft>
+                <a:spcPts val="800"/>
+              </a:spcAft>
+              <a:buNone/>
+            </a:pPr>
+            <a:r>
+              <a:rPr lang="en-US" sz="1740" dirty="0">
                 <a:solidFill>
                   <a:srgbClr val="62727A"/>
                 </a:solidFill>
@@ -6151,15 +6667,35 @@
                 <a:ea typeface="Malgun Gothic" pitchFamily="34" charset="-122"/>
                 <a:cs typeface="Malgun Gothic" pitchFamily="34" charset="-120"/>
               </a:rPr>
+              <a:t>인사를 나눕니다.</a:t>
+            </a:r>
+            <a:endParaRPr lang="en-US" sz="1740" dirty="0"/>
+          </a:p>
+          <a:p>
+            <a:pPr indent="0" marL="0">
+              <a:spcAft>
+                <a:spcPts val="800"/>
+              </a:spcAft>
+              <a:buNone/>
+            </a:pPr>
+            <a:r>
+              <a:rPr lang="en-US" sz="1740" dirty="0">
+                <a:solidFill>
+                  <a:srgbClr val="62727A"/>
+                </a:solidFill>
+                <a:latin typeface="Malgun Gothic" pitchFamily="34" charset="0"/>
+                <a:ea typeface="Malgun Gothic" pitchFamily="34" charset="-122"/>
+                <a:cs typeface="Malgun Gothic" pitchFamily="34" charset="-120"/>
+              </a:rPr>
               <a:t>My name is …</a:t>
             </a:r>
-            <a:endParaRPr lang="en-US" sz="1500" dirty="0"/>
-          </a:p>
-        </p:txBody>
-      </p:sp>
-      <p:sp>
-        <p:nvSpPr>
-          <p:cNvPr id="18" name="Text 16"/>
+            <a:endParaRPr lang="en-US" sz="1740" dirty="0"/>
+          </a:p>
+        </p:txBody>
+      </p:sp>
+      <p:sp>
+        <p:nvSpPr>
+          <p:cNvPr id="22" name="Text 20"/>
           <p:cNvSpPr/>
           <p:nvPr/>
         </p:nvSpPr>
@@ -6201,7 +6737,7 @@
       </p:sp>
       <p:sp>
         <p:nvSpPr>
-          <p:cNvPr id="19" name="Text 17"/>
+          <p:cNvPr id="23" name="Text 21"/>
           <p:cNvSpPr/>
           <p:nvPr/>
         </p:nvSpPr>
@@ -6612,7 +7148,7 @@
       </p:sp>
       <p:pic>
         <p:nvPicPr>
-          <p:cNvPr id="9" name="Image 0" descr="E:\하랑\돈스탑잉글리시\docs\portfolio-proposal\assets\learning-cards_ai.png">    </p:cNvPr>
+          <p:cNvPr id="9" name="Image 0" descr="E:\하랑\돈스탑잉글리시\docs\portfolio-proposal\assets\cards-620-594_ai.png">    </p:cNvPr>
           <p:cNvPicPr>
             <a:picLocks noChangeAspect="1"/>
           </p:cNvPicPr>
@@ -6620,8 +7156,9 @@
         </p:nvPicPr>
         <p:blipFill>
           <a:blip r:embed="rId1"/>
-          <a:srcRect l="20799" r="20799" t="0" b="0"/>
-          <a:stretch/>
+          <a:stretch>
+            <a:fillRect/>
+          </a:stretch>
         </p:blipFill>
         <p:spPr>
           <a:xfrm>
@@ -6909,26 +7446,26 @@
         <p:spPr>
           <a:xfrm>
             <a:off x="609600" y="1120140"/>
-            <a:ext cx="10820400" cy="1181100"/>
-          </a:xfrm>
-          <a:prstGeom prst="rect">
-            <a:avLst/>
-          </a:prstGeom>
-          <a:noFill/>
-          <a:ln/>
-        </p:spPr>
-        <p:txBody>
-          <a:bodyPr wrap="square" lIns="0" tIns="0" rIns="0" bIns="0" rtlCol="0" anchor="ctr"/>
-          <a:lstStyle/>
-          <a:p>
-            <a:pPr indent="0" marL="0">
-              <a:spcAft>
-                <a:spcPts val="800"/>
-              </a:spcAft>
-              <a:buNone/>
-            </a:pPr>
-            <a:r>
-              <a:rPr lang="en-US" sz="3840" b="1" dirty="0">
+            <a:ext cx="10820400" cy="1089660"/>
+          </a:xfrm>
+          <a:prstGeom prst="rect">
+            <a:avLst/>
+          </a:prstGeom>
+          <a:noFill/>
+          <a:ln/>
+        </p:spPr>
+        <p:txBody>
+          <a:bodyPr wrap="square" lIns="0" tIns="0" rIns="0" bIns="0" rtlCol="0" anchor="ctr"/>
+          <a:lstStyle/>
+          <a:p>
+            <a:pPr indent="0" marL="0">
+              <a:spcAft>
+                <a:spcPts val="800"/>
+              </a:spcAft>
+              <a:buNone/>
+            </a:pPr>
+            <a:r>
+              <a:rPr lang="en-US" sz="3960" b="1" dirty="0">
                 <a:solidFill>
                   <a:srgbClr val="132D40"/>
                 </a:solidFill>
@@ -6938,39 +7475,64 @@
               </a:rPr>
               <a:t>수업의 흐름을 눈으로 그려봅니다</a:t>
             </a:r>
-            <a:endParaRPr lang="en-US" sz="3840" dirty="0"/>
-          </a:p>
-        </p:txBody>
-      </p:sp>
-      <p:sp>
-        <p:nvSpPr>
-          <p:cNvPr id="5" name="Text 3"/>
-          <p:cNvSpPr/>
-          <p:nvPr/>
-        </p:nvSpPr>
-        <p:spPr>
-          <a:xfrm>
-            <a:off x="609600" y="2331720"/>
-            <a:ext cx="10744200" cy="609600"/>
-          </a:xfrm>
-          <a:prstGeom prst="rect">
-            <a:avLst/>
-          </a:prstGeom>
-          <a:noFill/>
-          <a:ln/>
-        </p:spPr>
-        <p:txBody>
-          <a:bodyPr wrap="square" lIns="0" tIns="0" rIns="0" bIns="0" rtlCol="0" anchor="ctr"/>
-          <a:lstStyle/>
-          <a:p>
-            <a:pPr indent="0" marL="0">
-              <a:spcAft>
-                <a:spcPts val="800"/>
-              </a:spcAft>
-              <a:buNone/>
-            </a:pPr>
-            <a:r>
-              <a:rPr lang="en-US" sz="1620" dirty="0">
+            <a:endParaRPr lang="en-US" sz="3960" dirty="0"/>
+          </a:p>
+        </p:txBody>
+      </p:sp>
+      <p:sp>
+        <p:nvSpPr>
+          <p:cNvPr id="5" name="Shape 3"/>
+          <p:cNvSpPr/>
+          <p:nvPr/>
+        </p:nvSpPr>
+        <p:spPr>
+          <a:xfrm>
+            <a:off x="609600" y="2202180"/>
+            <a:ext cx="647700" cy="45720"/>
+          </a:xfrm>
+          <a:prstGeom prst="rect">
+            <a:avLst/>
+          </a:prstGeom>
+          <a:solidFill>
+            <a:srgbClr val="DC955B"/>
+          </a:solidFill>
+          <a:ln w="12700">
+            <a:solidFill>
+              <a:srgbClr val="DC955B"/>
+            </a:solidFill>
+            <a:prstDash val="solid"/>
+          </a:ln>
+        </p:spPr>
+      </p:sp>
+      <p:sp>
+        <p:nvSpPr>
+          <p:cNvPr id="6" name="Text 4"/>
+          <p:cNvSpPr/>
+          <p:nvPr/>
+        </p:nvSpPr>
+        <p:spPr>
+          <a:xfrm>
+            <a:off x="609600" y="2484120"/>
+            <a:ext cx="10744200" cy="640080"/>
+          </a:xfrm>
+          <a:prstGeom prst="rect">
+            <a:avLst/>
+          </a:prstGeom>
+          <a:noFill/>
+          <a:ln/>
+        </p:spPr>
+        <p:txBody>
+          <a:bodyPr wrap="square" lIns="0" tIns="0" rIns="0" bIns="0" rtlCol="0" anchor="ctr"/>
+          <a:lstStyle/>
+          <a:p>
+            <a:pPr indent="0" marL="0">
+              <a:spcAft>
+                <a:spcPts val="800"/>
+              </a:spcAft>
+              <a:buNone/>
+            </a:pPr>
+            <a:r>
+              <a:rPr lang="en-US" sz="1800" dirty="0">
                 <a:solidFill>
                   <a:srgbClr val="62727A"/>
                 </a:solidFill>
@@ -6980,13 +7542,13 @@
               </a:rPr>
               <a:t>혼자 발표하기가 부담스럽다면 함께 따라 말하거나 짝 활동을 선택할 수 있습니다.</a:t>
             </a:r>
-            <a:endParaRPr lang="en-US" sz="1620" dirty="0"/>
-          </a:p>
-        </p:txBody>
-      </p:sp>
-      <p:sp>
-        <p:nvSpPr>
-          <p:cNvPr id="6" name="Shape 4"/>
+            <a:endParaRPr lang="en-US" sz="1800" dirty="0"/>
+          </a:p>
+        </p:txBody>
+      </p:sp>
+      <p:sp>
+        <p:nvSpPr>
+          <p:cNvPr id="7" name="Shape 5"/>
           <p:cNvSpPr/>
           <p:nvPr/>
         </p:nvSpPr>
@@ -7011,7 +7573,7 @@
       </p:sp>
       <p:sp>
         <p:nvSpPr>
-          <p:cNvPr id="7" name="Shape 5"/>
+          <p:cNvPr id="8" name="Shape 6"/>
           <p:cNvSpPr/>
           <p:nvPr/>
         </p:nvSpPr>
@@ -7036,7 +7598,7 @@
       </p:sp>
       <p:sp>
         <p:nvSpPr>
-          <p:cNvPr id="8" name="Text 6"/>
+          <p:cNvPr id="9" name="Text 7"/>
           <p:cNvSpPr/>
           <p:nvPr/>
         </p:nvSpPr>
@@ -7078,7 +7640,7 @@
       </p:sp>
       <p:sp>
         <p:nvSpPr>
-          <p:cNvPr id="9" name="Text 7"/>
+          <p:cNvPr id="10" name="Text 8"/>
           <p:cNvSpPr/>
           <p:nvPr/>
         </p:nvSpPr>
@@ -7120,7 +7682,7 @@
       </p:sp>
       <p:sp>
         <p:nvSpPr>
-          <p:cNvPr id="10" name="Text 8"/>
+          <p:cNvPr id="11" name="Text 9"/>
           <p:cNvSpPr/>
           <p:nvPr/>
         </p:nvSpPr>
@@ -7182,7 +7744,7 @@
       </p:sp>
       <p:sp>
         <p:nvSpPr>
-          <p:cNvPr id="11" name="Shape 9"/>
+          <p:cNvPr id="12" name="Shape 10"/>
           <p:cNvSpPr/>
           <p:nvPr/>
         </p:nvSpPr>
@@ -7207,7 +7769,7 @@
       </p:sp>
       <p:sp>
         <p:nvSpPr>
-          <p:cNvPr id="12" name="Shape 10"/>
+          <p:cNvPr id="13" name="Shape 11"/>
           <p:cNvSpPr/>
           <p:nvPr/>
         </p:nvSpPr>
@@ -7232,7 +7794,7 @@
       </p:sp>
       <p:sp>
         <p:nvSpPr>
-          <p:cNvPr id="13" name="Text 11"/>
+          <p:cNvPr id="14" name="Text 12"/>
           <p:cNvSpPr/>
           <p:nvPr/>
         </p:nvSpPr>
@@ -7274,7 +7836,7 @@
       </p:sp>
       <p:sp>
         <p:nvSpPr>
-          <p:cNvPr id="14" name="Text 12"/>
+          <p:cNvPr id="15" name="Text 13"/>
           <p:cNvSpPr/>
           <p:nvPr/>
         </p:nvSpPr>
@@ -7316,7 +7878,7 @@
       </p:sp>
       <p:sp>
         <p:nvSpPr>
-          <p:cNvPr id="15" name="Text 13"/>
+          <p:cNvPr id="16" name="Text 14"/>
           <p:cNvSpPr/>
           <p:nvPr/>
         </p:nvSpPr>
@@ -7378,7 +7940,7 @@
       </p:sp>
       <p:sp>
         <p:nvSpPr>
-          <p:cNvPr id="16" name="Shape 14"/>
+          <p:cNvPr id="17" name="Shape 15"/>
           <p:cNvSpPr/>
           <p:nvPr/>
         </p:nvSpPr>
@@ -7403,7 +7965,7 @@
       </p:sp>
       <p:sp>
         <p:nvSpPr>
-          <p:cNvPr id="17" name="Shape 15"/>
+          <p:cNvPr id="18" name="Shape 16"/>
           <p:cNvSpPr/>
           <p:nvPr/>
         </p:nvSpPr>
@@ -7428,7 +7990,7 @@
       </p:sp>
       <p:sp>
         <p:nvSpPr>
-          <p:cNvPr id="18" name="Text 16"/>
+          <p:cNvPr id="19" name="Text 17"/>
           <p:cNvSpPr/>
           <p:nvPr/>
         </p:nvSpPr>
@@ -7470,7 +8032,7 @@
       </p:sp>
       <p:sp>
         <p:nvSpPr>
-          <p:cNvPr id="19" name="Text 17"/>
+          <p:cNvPr id="20" name="Text 18"/>
           <p:cNvSpPr/>
           <p:nvPr/>
         </p:nvSpPr>
@@ -7512,7 +8074,7 @@
       </p:sp>
       <p:sp>
         <p:nvSpPr>
-          <p:cNvPr id="20" name="Text 18"/>
+          <p:cNvPr id="21" name="Text 19"/>
           <p:cNvSpPr/>
           <p:nvPr/>
         </p:nvSpPr>
@@ -7574,7 +8136,7 @@
       </p:sp>
       <p:sp>
         <p:nvSpPr>
-          <p:cNvPr id="21" name="Shape 19"/>
+          <p:cNvPr id="22" name="Shape 20"/>
           <p:cNvSpPr/>
           <p:nvPr/>
         </p:nvSpPr>
@@ -7599,7 +8161,7 @@
       </p:sp>
       <p:sp>
         <p:nvSpPr>
-          <p:cNvPr id="22" name="Shape 20"/>
+          <p:cNvPr id="23" name="Shape 21"/>
           <p:cNvSpPr/>
           <p:nvPr/>
         </p:nvSpPr>
@@ -7624,7 +8186,7 @@
       </p:sp>
       <p:sp>
         <p:nvSpPr>
-          <p:cNvPr id="23" name="Text 21"/>
+          <p:cNvPr id="24" name="Text 22"/>
           <p:cNvSpPr/>
           <p:nvPr/>
         </p:nvSpPr>
@@ -7666,7 +8228,7 @@
       </p:sp>
       <p:sp>
         <p:nvSpPr>
-          <p:cNvPr id="24" name="Text 22"/>
+          <p:cNvPr id="25" name="Text 23"/>
           <p:cNvSpPr/>
           <p:nvPr/>
         </p:nvSpPr>
@@ -7708,7 +8270,7 @@
       </p:sp>
       <p:sp>
         <p:nvSpPr>
-          <p:cNvPr id="25" name="Text 23"/>
+          <p:cNvPr id="26" name="Text 24"/>
           <p:cNvSpPr/>
           <p:nvPr/>
         </p:nvSpPr>
@@ -7770,7 +8332,7 @@
       </p:sp>
       <p:sp>
         <p:nvSpPr>
-          <p:cNvPr id="26" name="Text 24"/>
+          <p:cNvPr id="27" name="Text 25"/>
           <p:cNvSpPr/>
           <p:nvPr/>
         </p:nvSpPr>
@@ -7812,7 +8374,7 @@
       </p:sp>
       <p:sp>
         <p:nvSpPr>
-          <p:cNvPr id="27" name="Text 25"/>
+          <p:cNvPr id="28" name="Text 26"/>
           <p:cNvSpPr/>
           <p:nvPr/>
         </p:nvSpPr>
@@ -7977,26 +8539,26 @@
         <p:spPr>
           <a:xfrm>
             <a:off x="609600" y="1120140"/>
-            <a:ext cx="10820400" cy="1181100"/>
-          </a:xfrm>
-          <a:prstGeom prst="rect">
-            <a:avLst/>
-          </a:prstGeom>
-          <a:noFill/>
-          <a:ln/>
-        </p:spPr>
-        <p:txBody>
-          <a:bodyPr wrap="square" lIns="0" tIns="0" rIns="0" bIns="0" rtlCol="0" anchor="ctr"/>
-          <a:lstStyle/>
-          <a:p>
-            <a:pPr indent="0" marL="0">
-              <a:spcAft>
-                <a:spcPts val="800"/>
-              </a:spcAft>
-              <a:buNone/>
-            </a:pPr>
-            <a:r>
-              <a:rPr lang="en-US" sz="3840" b="1" dirty="0">
+            <a:ext cx="10820400" cy="1089660"/>
+          </a:xfrm>
+          <a:prstGeom prst="rect">
+            <a:avLst/>
+          </a:prstGeom>
+          <a:noFill/>
+          <a:ln/>
+        </p:spPr>
+        <p:txBody>
+          <a:bodyPr wrap="square" lIns="0" tIns="0" rIns="0" bIns="0" rtlCol="0" anchor="ctr"/>
+          <a:lstStyle/>
+          <a:p>
+            <a:pPr indent="0" marL="0">
+              <a:spcAft>
+                <a:spcPts val="800"/>
+              </a:spcAft>
+              <a:buNone/>
+            </a:pPr>
+            <a:r>
+              <a:rPr lang="en-US" sz="3960" b="1" dirty="0">
                 <a:solidFill>
                   <a:srgbClr val="132D40"/>
                 </a:solidFill>
@@ -8006,39 +8568,64 @@
               </a:rPr>
               <a:t>60 · 90 · 120분, 목적에 맞게</a:t>
             </a:r>
-            <a:endParaRPr lang="en-US" sz="3840" dirty="0"/>
-          </a:p>
-        </p:txBody>
-      </p:sp>
-      <p:sp>
-        <p:nvSpPr>
-          <p:cNvPr id="5" name="Text 3"/>
-          <p:cNvSpPr/>
-          <p:nvPr/>
-        </p:nvSpPr>
-        <p:spPr>
-          <a:xfrm>
-            <a:off x="609600" y="2331720"/>
-            <a:ext cx="10744200" cy="609600"/>
-          </a:xfrm>
-          <a:prstGeom prst="rect">
-            <a:avLst/>
-          </a:prstGeom>
-          <a:noFill/>
-          <a:ln/>
-        </p:spPr>
-        <p:txBody>
-          <a:bodyPr wrap="square" lIns="0" tIns="0" rIns="0" bIns="0" rtlCol="0" anchor="ctr"/>
-          <a:lstStyle/>
-          <a:p>
-            <a:pPr indent="0" marL="0">
-              <a:spcAft>
-                <a:spcPts val="800"/>
-              </a:spcAft>
-              <a:buNone/>
-            </a:pPr>
-            <a:r>
-              <a:rPr lang="en-US" sz="1620" dirty="0">
+            <a:endParaRPr lang="en-US" sz="3960" dirty="0"/>
+          </a:p>
+        </p:txBody>
+      </p:sp>
+      <p:sp>
+        <p:nvSpPr>
+          <p:cNvPr id="5" name="Shape 3"/>
+          <p:cNvSpPr/>
+          <p:nvPr/>
+        </p:nvSpPr>
+        <p:spPr>
+          <a:xfrm>
+            <a:off x="609600" y="2202180"/>
+            <a:ext cx="647700" cy="45720"/>
+          </a:xfrm>
+          <a:prstGeom prst="rect">
+            <a:avLst/>
+          </a:prstGeom>
+          <a:solidFill>
+            <a:srgbClr val="DC955B"/>
+          </a:solidFill>
+          <a:ln w="12700">
+            <a:solidFill>
+              <a:srgbClr val="DC955B"/>
+            </a:solidFill>
+            <a:prstDash val="solid"/>
+          </a:ln>
+        </p:spPr>
+      </p:sp>
+      <p:sp>
+        <p:nvSpPr>
+          <p:cNvPr id="6" name="Text 4"/>
+          <p:cNvSpPr/>
+          <p:nvPr/>
+        </p:nvSpPr>
+        <p:spPr>
+          <a:xfrm>
+            <a:off x="609600" y="2484120"/>
+            <a:ext cx="10744200" cy="640080"/>
+          </a:xfrm>
+          <a:prstGeom prst="rect">
+            <a:avLst/>
+          </a:prstGeom>
+          <a:noFill/>
+          <a:ln/>
+        </p:spPr>
+        <p:txBody>
+          <a:bodyPr wrap="square" lIns="0" tIns="0" rIns="0" bIns="0" rtlCol="0" anchor="ctr"/>
+          <a:lstStyle/>
+          <a:p>
+            <a:pPr indent="0" marL="0">
+              <a:spcAft>
+                <a:spcPts val="800"/>
+              </a:spcAft>
+              <a:buNone/>
+            </a:pPr>
+            <a:r>
+              <a:rPr lang="en-US" sz="1800" dirty="0">
                 <a:solidFill>
                   <a:srgbClr val="62727A"/>
                 </a:solidFill>
@@ -8048,13 +8635,13 @@
               </a:rPr>
               <a:t>시간 배분은 기본 제안입니다. 참가자의 요구와 기관 운영에 맞춰 조정합니다.</a:t>
             </a:r>
-            <a:endParaRPr lang="en-US" sz="1620" dirty="0"/>
-          </a:p>
-        </p:txBody>
-      </p:sp>
-      <p:sp>
-        <p:nvSpPr>
-          <p:cNvPr id="6" name="Text 4"/>
+            <a:endParaRPr lang="en-US" sz="1800" dirty="0"/>
+          </a:p>
+        </p:txBody>
+      </p:sp>
+      <p:sp>
+        <p:nvSpPr>
+          <p:cNvPr id="7" name="Text 5"/>
           <p:cNvSpPr/>
           <p:nvPr/>
         </p:nvSpPr>
@@ -8096,7 +8683,7 @@
       </p:sp>
       <p:sp>
         <p:nvSpPr>
-          <p:cNvPr id="7" name="Shape 5"/>
+          <p:cNvPr id="8" name="Shape 6"/>
           <p:cNvSpPr/>
           <p:nvPr/>
         </p:nvSpPr>
@@ -8121,7 +8708,7 @@
       </p:sp>
       <p:sp>
         <p:nvSpPr>
-          <p:cNvPr id="8" name="Text 6"/>
+          <p:cNvPr id="9" name="Text 7"/>
           <p:cNvSpPr/>
           <p:nvPr/>
         </p:nvSpPr>
@@ -8183,7 +8770,7 @@
       </p:sp>
       <p:sp>
         <p:nvSpPr>
-          <p:cNvPr id="9" name="Shape 7"/>
+          <p:cNvPr id="10" name="Shape 8"/>
           <p:cNvSpPr/>
           <p:nvPr/>
         </p:nvSpPr>
@@ -8208,7 +8795,7 @@
       </p:sp>
       <p:sp>
         <p:nvSpPr>
-          <p:cNvPr id="10" name="Text 8"/>
+          <p:cNvPr id="11" name="Text 9"/>
           <p:cNvSpPr/>
           <p:nvPr/>
         </p:nvSpPr>
@@ -8270,7 +8857,7 @@
       </p:sp>
       <p:sp>
         <p:nvSpPr>
-          <p:cNvPr id="11" name="Shape 9"/>
+          <p:cNvPr id="12" name="Shape 10"/>
           <p:cNvSpPr/>
           <p:nvPr/>
         </p:nvSpPr>
@@ -8295,7 +8882,7 @@
       </p:sp>
       <p:sp>
         <p:nvSpPr>
-          <p:cNvPr id="12" name="Text 10"/>
+          <p:cNvPr id="13" name="Text 11"/>
           <p:cNvSpPr/>
           <p:nvPr/>
         </p:nvSpPr>
@@ -8357,7 +8944,7 @@
       </p:sp>
       <p:sp>
         <p:nvSpPr>
-          <p:cNvPr id="13" name="Shape 11"/>
+          <p:cNvPr id="14" name="Shape 12"/>
           <p:cNvSpPr/>
           <p:nvPr/>
         </p:nvSpPr>
@@ -8382,7 +8969,7 @@
       </p:sp>
       <p:sp>
         <p:nvSpPr>
-          <p:cNvPr id="14" name="Text 12"/>
+          <p:cNvPr id="15" name="Text 13"/>
           <p:cNvSpPr/>
           <p:nvPr/>
         </p:nvSpPr>
@@ -8444,7 +9031,7 @@
       </p:sp>
       <p:sp>
         <p:nvSpPr>
-          <p:cNvPr id="15" name="Shape 13"/>
+          <p:cNvPr id="16" name="Shape 14"/>
           <p:cNvSpPr/>
           <p:nvPr/>
         </p:nvSpPr>
@@ -8469,7 +9056,7 @@
       </p:sp>
       <p:sp>
         <p:nvSpPr>
-          <p:cNvPr id="16" name="Text 14"/>
+          <p:cNvPr id="17" name="Text 15"/>
           <p:cNvSpPr/>
           <p:nvPr/>
         </p:nvSpPr>
@@ -8531,7 +9118,7 @@
       </p:sp>
       <p:sp>
         <p:nvSpPr>
-          <p:cNvPr id="17" name="Text 15"/>
+          <p:cNvPr id="18" name="Text 16"/>
           <p:cNvSpPr/>
           <p:nvPr/>
         </p:nvSpPr>
@@ -8573,7 +9160,7 @@
       </p:sp>
       <p:sp>
         <p:nvSpPr>
-          <p:cNvPr id="18" name="Shape 16"/>
+          <p:cNvPr id="19" name="Shape 17"/>
           <p:cNvSpPr/>
           <p:nvPr/>
         </p:nvSpPr>
@@ -8598,7 +9185,7 @@
       </p:sp>
       <p:sp>
         <p:nvSpPr>
-          <p:cNvPr id="19" name="Text 17"/>
+          <p:cNvPr id="20" name="Text 18"/>
           <p:cNvSpPr/>
           <p:nvPr/>
         </p:nvSpPr>
@@ -8660,7 +9247,7 @@
       </p:sp>
       <p:sp>
         <p:nvSpPr>
-          <p:cNvPr id="20" name="Shape 18"/>
+          <p:cNvPr id="21" name="Shape 19"/>
           <p:cNvSpPr/>
           <p:nvPr/>
         </p:nvSpPr>
@@ -8685,7 +9272,7 @@
       </p:sp>
       <p:sp>
         <p:nvSpPr>
-          <p:cNvPr id="21" name="Text 19"/>
+          <p:cNvPr id="22" name="Text 20"/>
           <p:cNvSpPr/>
           <p:nvPr/>
         </p:nvSpPr>
@@ -8747,7 +9334,7 @@
       </p:sp>
       <p:sp>
         <p:nvSpPr>
-          <p:cNvPr id="22" name="Shape 20"/>
+          <p:cNvPr id="23" name="Shape 21"/>
           <p:cNvSpPr/>
           <p:nvPr/>
         </p:nvSpPr>
@@ -8772,7 +9359,7 @@
       </p:sp>
       <p:sp>
         <p:nvSpPr>
-          <p:cNvPr id="23" name="Text 21"/>
+          <p:cNvPr id="24" name="Text 22"/>
           <p:cNvSpPr/>
           <p:nvPr/>
         </p:nvSpPr>
@@ -8834,7 +9421,7 @@
       </p:sp>
       <p:sp>
         <p:nvSpPr>
-          <p:cNvPr id="24" name="Shape 22"/>
+          <p:cNvPr id="25" name="Shape 23"/>
           <p:cNvSpPr/>
           <p:nvPr/>
         </p:nvSpPr>
@@ -8859,7 +9446,7 @@
       </p:sp>
       <p:sp>
         <p:nvSpPr>
-          <p:cNvPr id="25" name="Text 23"/>
+          <p:cNvPr id="26" name="Text 24"/>
           <p:cNvSpPr/>
           <p:nvPr/>
         </p:nvSpPr>
@@ -8921,7 +9508,7 @@
       </p:sp>
       <p:sp>
         <p:nvSpPr>
-          <p:cNvPr id="26" name="Shape 24"/>
+          <p:cNvPr id="27" name="Shape 25"/>
           <p:cNvSpPr/>
           <p:nvPr/>
         </p:nvSpPr>
@@ -8946,7 +9533,7 @@
       </p:sp>
       <p:sp>
         <p:nvSpPr>
-          <p:cNvPr id="27" name="Text 25"/>
+          <p:cNvPr id="28" name="Text 26"/>
           <p:cNvSpPr/>
           <p:nvPr/>
         </p:nvSpPr>
@@ -9008,7 +9595,7 @@
       </p:sp>
       <p:sp>
         <p:nvSpPr>
-          <p:cNvPr id="28" name="Shape 26"/>
+          <p:cNvPr id="29" name="Shape 27"/>
           <p:cNvSpPr/>
           <p:nvPr/>
         </p:nvSpPr>
@@ -9033,7 +9620,7 @@
       </p:sp>
       <p:sp>
         <p:nvSpPr>
-          <p:cNvPr id="29" name="Text 27"/>
+          <p:cNvPr id="30" name="Text 28"/>
           <p:cNvSpPr/>
           <p:nvPr/>
         </p:nvSpPr>
@@ -9095,7 +9682,7 @@
       </p:sp>
       <p:sp>
         <p:nvSpPr>
-          <p:cNvPr id="30" name="Text 28"/>
+          <p:cNvPr id="31" name="Text 29"/>
           <p:cNvSpPr/>
           <p:nvPr/>
         </p:nvSpPr>
@@ -9137,7 +9724,7 @@
       </p:sp>
       <p:sp>
         <p:nvSpPr>
-          <p:cNvPr id="31" name="Shape 29"/>
+          <p:cNvPr id="32" name="Shape 30"/>
           <p:cNvSpPr/>
           <p:nvPr/>
         </p:nvSpPr>
@@ -9162,7 +9749,7 @@
       </p:sp>
       <p:sp>
         <p:nvSpPr>
-          <p:cNvPr id="32" name="Text 30"/>
+          <p:cNvPr id="33" name="Text 31"/>
           <p:cNvSpPr/>
           <p:nvPr/>
         </p:nvSpPr>
@@ -9224,7 +9811,7 @@
       </p:sp>
       <p:sp>
         <p:nvSpPr>
-          <p:cNvPr id="33" name="Shape 31"/>
+          <p:cNvPr id="34" name="Shape 32"/>
           <p:cNvSpPr/>
           <p:nvPr/>
         </p:nvSpPr>
@@ -9249,7 +9836,7 @@
       </p:sp>
       <p:sp>
         <p:nvSpPr>
-          <p:cNvPr id="34" name="Text 32"/>
+          <p:cNvPr id="35" name="Text 33"/>
           <p:cNvSpPr/>
           <p:nvPr/>
         </p:nvSpPr>
@@ -9311,7 +9898,7 @@
       </p:sp>
       <p:sp>
         <p:nvSpPr>
-          <p:cNvPr id="35" name="Shape 33"/>
+          <p:cNvPr id="36" name="Shape 34"/>
           <p:cNvSpPr/>
           <p:nvPr/>
         </p:nvSpPr>
@@ -9336,7 +9923,7 @@
       </p:sp>
       <p:sp>
         <p:nvSpPr>
-          <p:cNvPr id="36" name="Text 34"/>
+          <p:cNvPr id="37" name="Text 35"/>
           <p:cNvSpPr/>
           <p:nvPr/>
         </p:nvSpPr>
@@ -9398,7 +9985,7 @@
       </p:sp>
       <p:sp>
         <p:nvSpPr>
-          <p:cNvPr id="37" name="Shape 35"/>
+          <p:cNvPr id="38" name="Shape 36"/>
           <p:cNvSpPr/>
           <p:nvPr/>
         </p:nvSpPr>
@@ -9423,7 +10010,7 @@
       </p:sp>
       <p:sp>
         <p:nvSpPr>
-          <p:cNvPr id="38" name="Text 36"/>
+          <p:cNvPr id="39" name="Text 37"/>
           <p:cNvSpPr/>
           <p:nvPr/>
         </p:nvSpPr>
@@ -9485,7 +10072,7 @@
       </p:sp>
       <p:sp>
         <p:nvSpPr>
-          <p:cNvPr id="39" name="Shape 37"/>
+          <p:cNvPr id="40" name="Shape 38"/>
           <p:cNvSpPr/>
           <p:nvPr/>
         </p:nvSpPr>
@@ -9510,7 +10097,7 @@
       </p:sp>
       <p:sp>
         <p:nvSpPr>
-          <p:cNvPr id="40" name="Text 38"/>
+          <p:cNvPr id="41" name="Text 39"/>
           <p:cNvSpPr/>
           <p:nvPr/>
         </p:nvSpPr>
@@ -9572,7 +10159,7 @@
       </p:sp>
       <p:sp>
         <p:nvSpPr>
-          <p:cNvPr id="41" name="Shape 39"/>
+          <p:cNvPr id="42" name="Shape 40"/>
           <p:cNvSpPr/>
           <p:nvPr/>
         </p:nvSpPr>
@@ -9597,7 +10184,7 @@
       </p:sp>
       <p:sp>
         <p:nvSpPr>
-          <p:cNvPr id="42" name="Text 40"/>
+          <p:cNvPr id="43" name="Text 41"/>
           <p:cNvSpPr/>
           <p:nvPr/>
         </p:nvSpPr>
@@ -9659,7 +10246,7 @@
       </p:sp>
       <p:sp>
         <p:nvSpPr>
-          <p:cNvPr id="43" name="Text 41"/>
+          <p:cNvPr id="44" name="Text 42"/>
           <p:cNvSpPr/>
           <p:nvPr/>
         </p:nvSpPr>
@@ -9701,7 +10288,7 @@
       </p:sp>
       <p:sp>
         <p:nvSpPr>
-          <p:cNvPr id="44" name="Text 42"/>
+          <p:cNvPr id="45" name="Text 43"/>
           <p:cNvSpPr/>
           <p:nvPr/>
         </p:nvSpPr>
@@ -9851,7 +10438,7 @@
                 <a:ea typeface="Malgun Gothic" pitchFamily="34" charset="-122"/>
                 <a:cs typeface="Malgun Gothic" pitchFamily="34" charset="-120"/>
               </a:rPr>
-              <a:t>PARTICIPATION DESIGN</a:t>
+              <a:t>DESIGNED FOR PARTICIPATION</a:t>
             </a:r>
             <a:endParaRPr lang="en-US" sz="1320" dirty="0"/>
           </a:p>
@@ -9865,27 +10452,27 @@
         </p:nvSpPr>
         <p:spPr>
           <a:xfrm>
-            <a:off x="609600" y="1272540"/>
-            <a:ext cx="4953000" cy="1905000"/>
-          </a:xfrm>
-          <a:prstGeom prst="rect">
-            <a:avLst/>
-          </a:prstGeom>
-          <a:noFill/>
-          <a:ln/>
-        </p:spPr>
-        <p:txBody>
-          <a:bodyPr wrap="square" lIns="0" tIns="0" rIns="0" bIns="0" rtlCol="0" anchor="ctr"/>
-          <a:lstStyle/>
-          <a:p>
-            <a:pPr indent="0" marL="0">
-              <a:spcAft>
-                <a:spcPts val="800"/>
-              </a:spcAft>
-              <a:buNone/>
-            </a:pPr>
-            <a:r>
-              <a:rPr lang="en-US" sz="4680" b="1" dirty="0">
+            <a:off x="609600" y="1120140"/>
+            <a:ext cx="10820400" cy="1089660"/>
+          </a:xfrm>
+          <a:prstGeom prst="rect">
+            <a:avLst/>
+          </a:prstGeom>
+          <a:noFill/>
+          <a:ln/>
+        </p:spPr>
+        <p:txBody>
+          <a:bodyPr wrap="square" lIns="0" tIns="0" rIns="0" bIns="0" rtlCol="0" anchor="ctr"/>
+          <a:lstStyle/>
+          <a:p>
+            <a:pPr indent="0" marL="0">
+              <a:spcAft>
+                <a:spcPts val="800"/>
+              </a:spcAft>
+              <a:buNone/>
+            </a:pPr>
+            <a:r>
+              <a:rPr lang="en-US" sz="3960" b="1" dirty="0">
                 <a:solidFill>
                   <a:srgbClr val="132D40"/>
                 </a:solidFill>
@@ -9893,61 +10480,66 @@
                 <a:ea typeface="Malgun Gothic" pitchFamily="34" charset="-122"/>
                 <a:cs typeface="Malgun Gothic" pitchFamily="34" charset="-120"/>
               </a:rPr>
-              <a:t>속도보다</a:t>
-            </a:r>
-            <a:endParaRPr lang="en-US" sz="4680" dirty="0"/>
-          </a:p>
-          <a:p>
-            <a:pPr indent="0" marL="0">
-              <a:spcAft>
-                <a:spcPts val="800"/>
-              </a:spcAft>
-              <a:buNone/>
-            </a:pPr>
-            <a:r>
-              <a:rPr lang="en-US" sz="4680" b="1" dirty="0">
-                <a:solidFill>
-                  <a:srgbClr val="132D40"/>
-                </a:solidFill>
-                <a:latin typeface="Malgun Gothic" pitchFamily="34" charset="0"/>
-                <a:ea typeface="Malgun Gothic" pitchFamily="34" charset="-122"/>
-                <a:cs typeface="Malgun Gothic" pitchFamily="34" charset="-120"/>
-              </a:rPr>
-              <a:t>참여의 편안함</a:t>
-            </a:r>
-            <a:endParaRPr lang="en-US" sz="4680" dirty="0"/>
-          </a:p>
-        </p:txBody>
-      </p:sp>
-      <p:sp>
-        <p:nvSpPr>
-          <p:cNvPr id="5" name="Text 3"/>
-          <p:cNvSpPr/>
-          <p:nvPr/>
-        </p:nvSpPr>
-        <p:spPr>
-          <a:xfrm>
-            <a:off x="609600" y="3787140"/>
-            <a:ext cx="4953000" cy="914400"/>
-          </a:xfrm>
-          <a:prstGeom prst="rect">
-            <a:avLst/>
-          </a:prstGeom>
-          <a:noFill/>
-          <a:ln/>
-        </p:spPr>
-        <p:txBody>
-          <a:bodyPr wrap="square" lIns="0" tIns="0" rIns="0" bIns="0" rtlCol="0" anchor="ctr"/>
-          <a:lstStyle/>
-          <a:p>
-            <a:pPr indent="0" marL="0">
-              <a:spcAft>
-                <a:spcPts val="800"/>
-              </a:spcAft>
-              <a:buNone/>
-            </a:pPr>
-            <a:r>
-              <a:rPr lang="en-US" sz="1680" dirty="0">
+              <a:t>처음 참여하는 분도, 자기 속도로</a:t>
+            </a:r>
+            <a:endParaRPr lang="en-US" sz="3960" dirty="0"/>
+          </a:p>
+        </p:txBody>
+      </p:sp>
+      <p:sp>
+        <p:nvSpPr>
+          <p:cNvPr id="5" name="Shape 3"/>
+          <p:cNvSpPr/>
+          <p:nvPr/>
+        </p:nvSpPr>
+        <p:spPr>
+          <a:xfrm>
+            <a:off x="609600" y="2202180"/>
+            <a:ext cx="647700" cy="45720"/>
+          </a:xfrm>
+          <a:prstGeom prst="rect">
+            <a:avLst/>
+          </a:prstGeom>
+          <a:solidFill>
+            <a:srgbClr val="DC955B"/>
+          </a:solidFill>
+          <a:ln w="12700">
+            <a:solidFill>
+              <a:srgbClr val="DC955B"/>
+            </a:solidFill>
+            <a:prstDash val="solid"/>
+          </a:ln>
+        </p:spPr>
+      </p:sp>
+      <p:sp>
+        <p:nvSpPr>
+          <p:cNvPr id="6" name="Text 4"/>
+          <p:cNvSpPr/>
+          <p:nvPr/>
+        </p:nvSpPr>
+        <p:spPr>
+          <a:xfrm>
+            <a:off x="609600" y="2484120"/>
+            <a:ext cx="10744200" cy="640080"/>
+          </a:xfrm>
+          <a:prstGeom prst="rect">
+            <a:avLst/>
+          </a:prstGeom>
+          <a:noFill/>
+          <a:ln/>
+        </p:spPr>
+        <p:txBody>
+          <a:bodyPr wrap="square" lIns="0" tIns="0" rIns="0" bIns="0" rtlCol="0" anchor="ctr"/>
+          <a:lstStyle/>
+          <a:p>
+            <a:pPr indent="0" marL="0">
+              <a:spcAft>
+                <a:spcPts val="800"/>
+              </a:spcAft>
+              <a:buNone/>
+            </a:pPr>
+            <a:r>
+              <a:rPr lang="en-US" sz="1800" dirty="0">
                 <a:solidFill>
                   <a:srgbClr val="62727A"/>
                 </a:solidFill>
@@ -9955,42 +10547,22 @@
                 <a:ea typeface="Malgun Gothic" pitchFamily="34" charset="-122"/>
                 <a:cs typeface="Malgun Gothic" pitchFamily="34" charset="-120"/>
               </a:rPr>
-              <a:t>참여자의 요구와 읽기 편한 글씨 크기를</a:t>
-            </a:r>
-            <a:endParaRPr lang="en-US" sz="1680" dirty="0"/>
-          </a:p>
-          <a:p>
-            <a:pPr indent="0" marL="0">
-              <a:spcAft>
-                <a:spcPts val="800"/>
-              </a:spcAft>
-              <a:buNone/>
-            </a:pPr>
-            <a:r>
-              <a:rPr lang="en-US" sz="1680" dirty="0">
-                <a:solidFill>
-                  <a:srgbClr val="62727A"/>
-                </a:solidFill>
-                <a:latin typeface="Malgun Gothic" pitchFamily="34" charset="0"/>
-                <a:ea typeface="Malgun Gothic" pitchFamily="34" charset="-122"/>
-                <a:cs typeface="Malgun Gothic" pitchFamily="34" charset="-120"/>
-              </a:rPr>
-              <a:t>기관과 사전에 확인합니다.</a:t>
-            </a:r>
-            <a:endParaRPr lang="en-US" sz="1680" dirty="0"/>
-          </a:p>
-        </p:txBody>
-      </p:sp>
-      <p:sp>
-        <p:nvSpPr>
-          <p:cNvPr id="6" name="Shape 4"/>
-          <p:cNvSpPr/>
-          <p:nvPr/>
-        </p:nvSpPr>
-        <p:spPr>
-          <a:xfrm>
-            <a:off x="6362700" y="1371600"/>
-            <a:ext cx="5181600" cy="1203960"/>
+              <a:t>읽기·듣기·말하기 가운데 편한 방식부터 시작하도록 설계한 제안입니다.</a:t>
+            </a:r>
+            <a:endParaRPr lang="en-US" sz="1800" dirty="0"/>
+          </a:p>
+        </p:txBody>
+      </p:sp>
+      <p:sp>
+        <p:nvSpPr>
+          <p:cNvPr id="7" name="Shape 5"/>
+          <p:cNvSpPr/>
+          <p:nvPr/>
+        </p:nvSpPr>
+        <p:spPr>
+          <a:xfrm>
+            <a:off x="609600" y="3314700"/>
+            <a:ext cx="10972800" cy="784860"/>
           </a:xfrm>
           <a:prstGeom prst="rect">
             <a:avLst/>
@@ -10008,33 +10580,33 @@
       </p:sp>
       <p:sp>
         <p:nvSpPr>
-          <p:cNvPr id="7" name="Text 5"/>
-          <p:cNvSpPr/>
-          <p:nvPr/>
-        </p:nvSpPr>
-        <p:spPr>
-          <a:xfrm>
-            <a:off x="6591300" y="1562100"/>
-            <a:ext cx="4724400" cy="381000"/>
-          </a:xfrm>
-          <a:prstGeom prst="rect">
-            <a:avLst/>
-          </a:prstGeom>
-          <a:noFill/>
-          <a:ln/>
-        </p:spPr>
-        <p:txBody>
-          <a:bodyPr wrap="square" lIns="0" tIns="0" rIns="0" bIns="0" rtlCol="0" anchor="ctr"/>
-          <a:lstStyle/>
-          <a:p>
-            <a:pPr indent="0" marL="0">
-              <a:spcAft>
-                <a:spcPts val="800"/>
-              </a:spcAft>
-              <a:buNone/>
-            </a:pPr>
-            <a:r>
-              <a:rPr lang="en-US" sz="2040" b="1" dirty="0">
+          <p:cNvPr id="8" name="Text 6"/>
+          <p:cNvSpPr/>
+          <p:nvPr/>
+        </p:nvSpPr>
+        <p:spPr>
+          <a:xfrm>
+            <a:off x="838200" y="3520440"/>
+            <a:ext cx="1143000" cy="403860"/>
+          </a:xfrm>
+          <a:prstGeom prst="rect">
+            <a:avLst/>
+          </a:prstGeom>
+          <a:noFill/>
+          <a:ln/>
+        </p:spPr>
+        <p:txBody>
+          <a:bodyPr wrap="square" lIns="0" tIns="0" rIns="0" bIns="0" rtlCol="0" anchor="ctr"/>
+          <a:lstStyle/>
+          <a:p>
+            <a:pPr indent="0" marL="0">
+              <a:spcAft>
+                <a:spcPts val="800"/>
+              </a:spcAft>
+              <a:buNone/>
+            </a:pPr>
+            <a:r>
+              <a:rPr lang="en-US" sz="2100" b="1" dirty="0">
                 <a:solidFill>
                   <a:srgbClr val="227C78"/>
                 </a:solidFill>
@@ -10042,41 +10614,83 @@
                 <a:ea typeface="Malgun Gothic" pitchFamily="34" charset="-122"/>
                 <a:cs typeface="Malgun Gothic" pitchFamily="34" charset="-120"/>
               </a:rPr>
-              <a:t>큰 글씨</a:t>
-            </a:r>
-            <a:endParaRPr lang="en-US" sz="2040" dirty="0"/>
-          </a:p>
-        </p:txBody>
-      </p:sp>
-      <p:sp>
-        <p:nvSpPr>
-          <p:cNvPr id="8" name="Text 6"/>
-          <p:cNvSpPr/>
-          <p:nvPr/>
-        </p:nvSpPr>
-        <p:spPr>
-          <a:xfrm>
-            <a:off x="6591300" y="2065020"/>
-            <a:ext cx="4724400" cy="342900"/>
-          </a:xfrm>
-          <a:prstGeom prst="rect">
-            <a:avLst/>
-          </a:prstGeom>
-          <a:noFill/>
-          <a:ln/>
-        </p:spPr>
-        <p:txBody>
-          <a:bodyPr wrap="square" lIns="0" tIns="0" rIns="0" bIns="0" rtlCol="0" anchor="ctr"/>
-          <a:lstStyle/>
-          <a:p>
-            <a:pPr indent="0" marL="0">
-              <a:spcAft>
-                <a:spcPts val="800"/>
-              </a:spcAft>
-              <a:buNone/>
-            </a:pPr>
-            <a:r>
-              <a:rPr lang="en-US" sz="1500" dirty="0">
+              <a:t>읽기</a:t>
+            </a:r>
+            <a:endParaRPr lang="en-US" sz="2100" dirty="0"/>
+          </a:p>
+        </p:txBody>
+      </p:sp>
+      <p:sp>
+        <p:nvSpPr>
+          <p:cNvPr id="9" name="Text 7"/>
+          <p:cNvSpPr/>
+          <p:nvPr/>
+        </p:nvSpPr>
+        <p:spPr>
+          <a:xfrm>
+            <a:off x="2247900" y="3482340"/>
+            <a:ext cx="3543300" cy="472440"/>
+          </a:xfrm>
+          <a:prstGeom prst="rect">
+            <a:avLst/>
+          </a:prstGeom>
+          <a:noFill/>
+          <a:ln/>
+        </p:spPr>
+        <p:txBody>
+          <a:bodyPr wrap="square" lIns="0" tIns="0" rIns="0" bIns="0" rtlCol="0" anchor="ctr"/>
+          <a:lstStyle/>
+          <a:p>
+            <a:pPr indent="0" marL="0">
+              <a:spcAft>
+                <a:spcPts val="800"/>
+              </a:spcAft>
+              <a:buNone/>
+            </a:pPr>
+            <a:r>
+              <a:rPr lang="en-US" sz="1860" b="1" dirty="0">
+                <a:solidFill>
+                  <a:srgbClr val="132D40"/>
+                </a:solidFill>
+                <a:latin typeface="Malgun Gothic" pitchFamily="34" charset="0"/>
+                <a:ea typeface="Malgun Gothic" pitchFamily="34" charset="-122"/>
+                <a:cs typeface="Malgun Gothic" pitchFamily="34" charset="-120"/>
+              </a:rPr>
+              <a:t>큰 글씨 · 짧은 문장</a:t>
+            </a:r>
+            <a:endParaRPr lang="en-US" sz="1860" dirty="0"/>
+          </a:p>
+        </p:txBody>
+      </p:sp>
+      <p:sp>
+        <p:nvSpPr>
+          <p:cNvPr id="10" name="Text 8"/>
+          <p:cNvSpPr/>
+          <p:nvPr/>
+        </p:nvSpPr>
+        <p:spPr>
+          <a:xfrm>
+            <a:off x="6172200" y="3497580"/>
+            <a:ext cx="5181600" cy="518160"/>
+          </a:xfrm>
+          <a:prstGeom prst="rect">
+            <a:avLst/>
+          </a:prstGeom>
+          <a:noFill/>
+          <a:ln/>
+        </p:spPr>
+        <p:txBody>
+          <a:bodyPr wrap="square" lIns="0" tIns="0" rIns="0" bIns="0" rtlCol="0" anchor="ctr"/>
+          <a:lstStyle/>
+          <a:p>
+            <a:pPr indent="0" marL="0">
+              <a:spcAft>
+                <a:spcPts val="800"/>
+              </a:spcAft>
+              <a:buNone/>
+            </a:pPr>
+            <a:r>
+              <a:rPr lang="en-US" sz="1560" dirty="0">
                 <a:solidFill>
                   <a:srgbClr val="62727A"/>
                 </a:solidFill>
@@ -10084,22 +10698,173 @@
                 <a:ea typeface="Malgun Gothic" pitchFamily="34" charset="-122"/>
                 <a:cs typeface="Malgun Gothic" pitchFamily="34" charset="-120"/>
               </a:rPr>
-              <a:t>보이는 자료와 짧은 표현</a:t>
-            </a:r>
-            <a:endParaRPr lang="en-US" sz="1500" dirty="0"/>
-          </a:p>
-        </p:txBody>
-      </p:sp>
-      <p:sp>
-        <p:nvSpPr>
-          <p:cNvPr id="9" name="Shape 7"/>
-          <p:cNvSpPr/>
-          <p:nvPr/>
-        </p:nvSpPr>
-        <p:spPr>
-          <a:xfrm>
-            <a:off x="6362700" y="2880360"/>
-            <a:ext cx="5181600" cy="1203960"/>
+              <a:t>자료는 사전에 보여드리고 읽기 편한 크기를 확인합니다.</a:t>
+            </a:r>
+            <a:endParaRPr lang="en-US" sz="1560" dirty="0"/>
+          </a:p>
+        </p:txBody>
+      </p:sp>
+      <p:sp>
+        <p:nvSpPr>
+          <p:cNvPr id="11" name="Shape 9"/>
+          <p:cNvSpPr/>
+          <p:nvPr/>
+        </p:nvSpPr>
+        <p:spPr>
+          <a:xfrm>
+            <a:off x="609600" y="4206240"/>
+            <a:ext cx="10972800" cy="784860"/>
+          </a:xfrm>
+          <a:prstGeom prst="rect">
+            <a:avLst/>
+          </a:prstGeom>
+          <a:solidFill>
+            <a:srgbClr val="E6EEEA"/>
+          </a:solidFill>
+          <a:ln w="12700">
+            <a:solidFill>
+              <a:srgbClr val="E6EEEA"/>
+            </a:solidFill>
+            <a:prstDash val="solid"/>
+          </a:ln>
+        </p:spPr>
+      </p:sp>
+      <p:sp>
+        <p:nvSpPr>
+          <p:cNvPr id="12" name="Text 10"/>
+          <p:cNvSpPr/>
+          <p:nvPr/>
+        </p:nvSpPr>
+        <p:spPr>
+          <a:xfrm>
+            <a:off x="838200" y="4411980"/>
+            <a:ext cx="1143000" cy="403860"/>
+          </a:xfrm>
+          <a:prstGeom prst="rect">
+            <a:avLst/>
+          </a:prstGeom>
+          <a:noFill/>
+          <a:ln/>
+        </p:spPr>
+        <p:txBody>
+          <a:bodyPr wrap="square" lIns="0" tIns="0" rIns="0" bIns="0" rtlCol="0" anchor="ctr"/>
+          <a:lstStyle/>
+          <a:p>
+            <a:pPr indent="0" marL="0">
+              <a:spcAft>
+                <a:spcPts val="800"/>
+              </a:spcAft>
+              <a:buNone/>
+            </a:pPr>
+            <a:r>
+              <a:rPr lang="en-US" sz="2100" b="1" dirty="0">
+                <a:solidFill>
+                  <a:srgbClr val="227C78"/>
+                </a:solidFill>
+                <a:latin typeface="Malgun Gothic" pitchFamily="34" charset="0"/>
+                <a:ea typeface="Malgun Gothic" pitchFamily="34" charset="-122"/>
+                <a:cs typeface="Malgun Gothic" pitchFamily="34" charset="-120"/>
+              </a:rPr>
+              <a:t>듣기</a:t>
+            </a:r>
+            <a:endParaRPr lang="en-US" sz="2100" dirty="0"/>
+          </a:p>
+        </p:txBody>
+      </p:sp>
+      <p:sp>
+        <p:nvSpPr>
+          <p:cNvPr id="13" name="Text 11"/>
+          <p:cNvSpPr/>
+          <p:nvPr/>
+        </p:nvSpPr>
+        <p:spPr>
+          <a:xfrm>
+            <a:off x="2247900" y="4373880"/>
+            <a:ext cx="3543300" cy="472440"/>
+          </a:xfrm>
+          <a:prstGeom prst="rect">
+            <a:avLst/>
+          </a:prstGeom>
+          <a:noFill/>
+          <a:ln/>
+        </p:spPr>
+        <p:txBody>
+          <a:bodyPr wrap="square" lIns="0" tIns="0" rIns="0" bIns="0" rtlCol="0" anchor="ctr"/>
+          <a:lstStyle/>
+          <a:p>
+            <a:pPr indent="0" marL="0">
+              <a:spcAft>
+                <a:spcPts val="800"/>
+              </a:spcAft>
+              <a:buNone/>
+            </a:pPr>
+            <a:r>
+              <a:rPr lang="en-US" sz="1860" b="1" dirty="0">
+                <a:solidFill>
+                  <a:srgbClr val="132D40"/>
+                </a:solidFill>
+                <a:latin typeface="Malgun Gothic" pitchFamily="34" charset="0"/>
+                <a:ea typeface="Malgun Gothic" pitchFamily="34" charset="-122"/>
+                <a:cs typeface="Malgun Gothic" pitchFamily="34" charset="-120"/>
+              </a:rPr>
+              <a:t>한국어로 상황 먼저 이해</a:t>
+            </a:r>
+            <a:endParaRPr lang="en-US" sz="1860" dirty="0"/>
+          </a:p>
+        </p:txBody>
+      </p:sp>
+      <p:sp>
+        <p:nvSpPr>
+          <p:cNvPr id="14" name="Text 12"/>
+          <p:cNvSpPr/>
+          <p:nvPr/>
+        </p:nvSpPr>
+        <p:spPr>
+          <a:xfrm>
+            <a:off x="6172200" y="4389120"/>
+            <a:ext cx="5181600" cy="518160"/>
+          </a:xfrm>
+          <a:prstGeom prst="rect">
+            <a:avLst/>
+          </a:prstGeom>
+          <a:noFill/>
+          <a:ln/>
+        </p:spPr>
+        <p:txBody>
+          <a:bodyPr wrap="square" lIns="0" tIns="0" rIns="0" bIns="0" rtlCol="0" anchor="ctr"/>
+          <a:lstStyle/>
+          <a:p>
+            <a:pPr indent="0" marL="0">
+              <a:spcAft>
+                <a:spcPts val="800"/>
+              </a:spcAft>
+              <a:buNone/>
+            </a:pPr>
+            <a:r>
+              <a:rPr lang="en-US" sz="1560" dirty="0">
+                <a:solidFill>
+                  <a:srgbClr val="62727A"/>
+                </a:solidFill>
+                <a:latin typeface="Malgun Gothic" pitchFamily="34" charset="0"/>
+                <a:ea typeface="Malgun Gothic" pitchFamily="34" charset="-122"/>
+                <a:cs typeface="Malgun Gothic" pitchFamily="34" charset="-120"/>
+              </a:rPr>
+              <a:t>영어를 반복해서 듣고 뜻을 확인한 뒤 따라 말합니다.</a:t>
+            </a:r>
+            <a:endParaRPr lang="en-US" sz="1560" dirty="0"/>
+          </a:p>
+        </p:txBody>
+      </p:sp>
+      <p:sp>
+        <p:nvSpPr>
+          <p:cNvPr id="15" name="Shape 13"/>
+          <p:cNvSpPr/>
+          <p:nvPr/>
+        </p:nvSpPr>
+        <p:spPr>
+          <a:xfrm>
+            <a:off x="609600" y="5097780"/>
+            <a:ext cx="10972800" cy="784860"/>
           </a:xfrm>
           <a:prstGeom prst="rect">
             <a:avLst/>
@@ -10117,33 +10882,33 @@
       </p:sp>
       <p:sp>
         <p:nvSpPr>
-          <p:cNvPr id="10" name="Text 8"/>
-          <p:cNvSpPr/>
-          <p:nvPr/>
-        </p:nvSpPr>
-        <p:spPr>
-          <a:xfrm>
-            <a:off x="6591300" y="3070860"/>
-            <a:ext cx="4724400" cy="381000"/>
-          </a:xfrm>
-          <a:prstGeom prst="rect">
-            <a:avLst/>
-          </a:prstGeom>
-          <a:noFill/>
-          <a:ln/>
-        </p:spPr>
-        <p:txBody>
-          <a:bodyPr wrap="square" lIns="0" tIns="0" rIns="0" bIns="0" rtlCol="0" anchor="ctr"/>
-          <a:lstStyle/>
-          <a:p>
-            <a:pPr indent="0" marL="0">
-              <a:spcAft>
-                <a:spcPts val="800"/>
-              </a:spcAft>
-              <a:buNone/>
-            </a:pPr>
-            <a:r>
-              <a:rPr lang="en-US" sz="2040" b="1" dirty="0">
+          <p:cNvPr id="16" name="Text 14"/>
+          <p:cNvSpPr/>
+          <p:nvPr/>
+        </p:nvSpPr>
+        <p:spPr>
+          <a:xfrm>
+            <a:off x="838200" y="5303520"/>
+            <a:ext cx="1143000" cy="403860"/>
+          </a:xfrm>
+          <a:prstGeom prst="rect">
+            <a:avLst/>
+          </a:prstGeom>
+          <a:noFill/>
+          <a:ln/>
+        </p:spPr>
+        <p:txBody>
+          <a:bodyPr wrap="square" lIns="0" tIns="0" rIns="0" bIns="0" rtlCol="0" anchor="ctr"/>
+          <a:lstStyle/>
+          <a:p>
+            <a:pPr indent="0" marL="0">
+              <a:spcAft>
+                <a:spcPts val="800"/>
+              </a:spcAft>
+              <a:buNone/>
+            </a:pPr>
+            <a:r>
+              <a:rPr lang="en-US" sz="2100" b="1" dirty="0">
                 <a:solidFill>
                   <a:srgbClr val="227C78"/>
                 </a:solidFill>
@@ -10151,41 +10916,83 @@
                 <a:ea typeface="Malgun Gothic" pitchFamily="34" charset="-122"/>
                 <a:cs typeface="Malgun Gothic" pitchFamily="34" charset="-120"/>
               </a:rPr>
-              <a:t>한국어 설명</a:t>
-            </a:r>
-            <a:endParaRPr lang="en-US" sz="2040" dirty="0"/>
-          </a:p>
-        </p:txBody>
-      </p:sp>
-      <p:sp>
-        <p:nvSpPr>
-          <p:cNvPr id="11" name="Text 9"/>
-          <p:cNvSpPr/>
-          <p:nvPr/>
-        </p:nvSpPr>
-        <p:spPr>
-          <a:xfrm>
-            <a:off x="6591300" y="3573780"/>
-            <a:ext cx="4724400" cy="342900"/>
-          </a:xfrm>
-          <a:prstGeom prst="rect">
-            <a:avLst/>
-          </a:prstGeom>
-          <a:noFill/>
-          <a:ln/>
-        </p:spPr>
-        <p:txBody>
-          <a:bodyPr wrap="square" lIns="0" tIns="0" rIns="0" bIns="0" rtlCol="0" anchor="ctr"/>
-          <a:lstStyle/>
-          <a:p>
-            <a:pPr indent="0" marL="0">
-              <a:spcAft>
-                <a:spcPts val="800"/>
-              </a:spcAft>
-              <a:buNone/>
-            </a:pPr>
-            <a:r>
-              <a:rPr lang="en-US" sz="1500" dirty="0">
+              <a:t>말하기</a:t>
+            </a:r>
+            <a:endParaRPr lang="en-US" sz="2100" dirty="0"/>
+          </a:p>
+        </p:txBody>
+      </p:sp>
+      <p:sp>
+        <p:nvSpPr>
+          <p:cNvPr id="17" name="Text 15"/>
+          <p:cNvSpPr/>
+          <p:nvPr/>
+        </p:nvSpPr>
+        <p:spPr>
+          <a:xfrm>
+            <a:off x="2247900" y="5265420"/>
+            <a:ext cx="3543300" cy="472440"/>
+          </a:xfrm>
+          <a:prstGeom prst="rect">
+            <a:avLst/>
+          </a:prstGeom>
+          <a:noFill/>
+          <a:ln/>
+        </p:spPr>
+        <p:txBody>
+          <a:bodyPr wrap="square" lIns="0" tIns="0" rIns="0" bIns="0" rtlCol="0" anchor="ctr"/>
+          <a:lstStyle/>
+          <a:p>
+            <a:pPr indent="0" marL="0">
+              <a:spcAft>
+                <a:spcPts val="800"/>
+              </a:spcAft>
+              <a:buNone/>
+            </a:pPr>
+            <a:r>
+              <a:rPr lang="en-US" sz="1860" b="1" dirty="0">
+                <a:solidFill>
+                  <a:srgbClr val="132D40"/>
+                </a:solidFill>
+                <a:latin typeface="Malgun Gothic" pitchFamily="34" charset="0"/>
+                <a:ea typeface="Malgun Gothic" pitchFamily="34" charset="-122"/>
+                <a:cs typeface="Malgun Gothic" pitchFamily="34" charset="-120"/>
+              </a:rPr>
+              <a:t>짝 활동 · 함께 따라 말하기</a:t>
+            </a:r>
+            <a:endParaRPr lang="en-US" sz="1860" dirty="0"/>
+          </a:p>
+        </p:txBody>
+      </p:sp>
+      <p:sp>
+        <p:nvSpPr>
+          <p:cNvPr id="18" name="Text 16"/>
+          <p:cNvSpPr/>
+          <p:nvPr/>
+        </p:nvSpPr>
+        <p:spPr>
+          <a:xfrm>
+            <a:off x="6172200" y="5280660"/>
+            <a:ext cx="5181600" cy="518160"/>
+          </a:xfrm>
+          <a:prstGeom prst="rect">
+            <a:avLst/>
+          </a:prstGeom>
+          <a:noFill/>
+          <a:ln/>
+        </p:spPr>
+        <p:txBody>
+          <a:bodyPr wrap="square" lIns="0" tIns="0" rIns="0" bIns="0" rtlCol="0" anchor="ctr"/>
+          <a:lstStyle/>
+          <a:p>
+            <a:pPr indent="0" marL="0">
+              <a:spcAft>
+                <a:spcPts val="800"/>
+              </a:spcAft>
+              <a:buNone/>
+            </a:pPr>
+            <a:r>
+              <a:rPr lang="en-US" sz="1560" dirty="0">
                 <a:solidFill>
                   <a:srgbClr val="62727A"/>
                 </a:solidFill>
@@ -10193,66 +11000,61 @@
                 <a:ea typeface="Malgun Gothic" pitchFamily="34" charset="-122"/>
                 <a:cs typeface="Malgun Gothic" pitchFamily="34" charset="-120"/>
               </a:rPr>
-              <a:t>상황을 먼저 이해하는 안내</a:t>
-            </a:r>
-            <a:endParaRPr lang="en-US" sz="1500" dirty="0"/>
-          </a:p>
-        </p:txBody>
-      </p:sp>
-      <p:sp>
-        <p:nvSpPr>
-          <p:cNvPr id="12" name="Shape 10"/>
-          <p:cNvSpPr/>
-          <p:nvPr/>
-        </p:nvSpPr>
-        <p:spPr>
-          <a:xfrm>
-            <a:off x="6362700" y="4389120"/>
-            <a:ext cx="5181600" cy="1203960"/>
-          </a:xfrm>
-          <a:prstGeom prst="rect">
-            <a:avLst/>
-          </a:prstGeom>
-          <a:solidFill>
-            <a:srgbClr val="FFFFFF"/>
-          </a:solidFill>
-          <a:ln w="12700">
-            <a:solidFill>
-              <a:srgbClr val="FFFFFF"/>
-            </a:solidFill>
-            <a:prstDash val="solid"/>
-          </a:ln>
-        </p:spPr>
-      </p:sp>
-      <p:sp>
-        <p:nvSpPr>
-          <p:cNvPr id="13" name="Text 11"/>
-          <p:cNvSpPr/>
-          <p:nvPr/>
-        </p:nvSpPr>
-        <p:spPr>
-          <a:xfrm>
-            <a:off x="6591300" y="4579620"/>
-            <a:ext cx="4724400" cy="381000"/>
-          </a:xfrm>
-          <a:prstGeom prst="rect">
-            <a:avLst/>
-          </a:prstGeom>
-          <a:noFill/>
-          <a:ln/>
-        </p:spPr>
-        <p:txBody>
-          <a:bodyPr wrap="square" lIns="0" tIns="0" rIns="0" bIns="0" rtlCol="0" anchor="ctr"/>
-          <a:lstStyle/>
-          <a:p>
-            <a:pPr indent="0" marL="0">
-              <a:spcAft>
-                <a:spcPts val="800"/>
-              </a:spcAft>
-              <a:buNone/>
-            </a:pPr>
-            <a:r>
-              <a:rPr lang="en-US" sz="2040" b="1" dirty="0">
+              <a:t>혼자 발표·스마트폰 사용을</a:t>
+            </a:r>
+            <a:endParaRPr lang="en-US" sz="1560" dirty="0"/>
+          </a:p>
+          <a:p>
+            <a:pPr indent="0" marL="0">
+              <a:spcAft>
+                <a:spcPts val="800"/>
+              </a:spcAft>
+              <a:buNone/>
+            </a:pPr>
+            <a:r>
+              <a:rPr lang="en-US" sz="1560" dirty="0">
+                <a:solidFill>
+                  <a:srgbClr val="62727A"/>
+                </a:solidFill>
+                <a:latin typeface="Malgun Gothic" pitchFamily="34" charset="0"/>
+                <a:ea typeface="Malgun Gothic" pitchFamily="34" charset="-122"/>
+                <a:cs typeface="Malgun Gothic" pitchFamily="34" charset="-120"/>
+              </a:rPr>
+              <a:t>필수로 요구하지 않습니다.</a:t>
+            </a:r>
+            <a:endParaRPr lang="en-US" sz="1560" dirty="0"/>
+          </a:p>
+        </p:txBody>
+      </p:sp>
+      <p:sp>
+        <p:nvSpPr>
+          <p:cNvPr id="19" name="Text 17"/>
+          <p:cNvSpPr/>
+          <p:nvPr/>
+        </p:nvSpPr>
+        <p:spPr>
+          <a:xfrm>
+            <a:off x="609600" y="6134100"/>
+            <a:ext cx="10972800" cy="289560"/>
+          </a:xfrm>
+          <a:prstGeom prst="rect">
+            <a:avLst/>
+          </a:prstGeom>
+          <a:noFill/>
+          <a:ln/>
+        </p:spPr>
+        <p:txBody>
+          <a:bodyPr wrap="square" lIns="0" tIns="0" rIns="0" bIns="0" rtlCol="0" anchor="ctr"/>
+          <a:lstStyle/>
+          <a:p>
+            <a:pPr indent="0" marL="0">
+              <a:spcAft>
+                <a:spcPts val="800"/>
+              </a:spcAft>
+              <a:buNone/>
+            </a:pPr>
+            <a:r>
+              <a:rPr lang="en-US" sz="1440" b="1" dirty="0">
                 <a:solidFill>
                   <a:srgbClr val="227C78"/>
                 </a:solidFill>
@@ -10260,57 +11062,15 @@
                 <a:ea typeface="Malgun Gothic" pitchFamily="34" charset="-122"/>
                 <a:cs typeface="Malgun Gothic" pitchFamily="34" charset="-120"/>
               </a:rPr>
-              <a:t>선택적인 활동</a:t>
-            </a:r>
-            <a:endParaRPr lang="en-US" sz="2040" dirty="0"/>
-          </a:p>
-        </p:txBody>
-      </p:sp>
-      <p:sp>
-        <p:nvSpPr>
-          <p:cNvPr id="14" name="Text 12"/>
-          <p:cNvSpPr/>
-          <p:nvPr/>
-        </p:nvSpPr>
-        <p:spPr>
-          <a:xfrm>
-            <a:off x="6591300" y="5082540"/>
-            <a:ext cx="4724400" cy="342900"/>
-          </a:xfrm>
-          <a:prstGeom prst="rect">
-            <a:avLst/>
-          </a:prstGeom>
-          <a:noFill/>
-          <a:ln/>
-        </p:spPr>
-        <p:txBody>
-          <a:bodyPr wrap="square" lIns="0" tIns="0" rIns="0" bIns="0" rtlCol="0" anchor="ctr"/>
-          <a:lstStyle/>
-          <a:p>
-            <a:pPr indent="0" marL="0">
-              <a:spcAft>
-                <a:spcPts val="800"/>
-              </a:spcAft>
-              <a:buNone/>
-            </a:pPr>
-            <a:r>
-              <a:rPr lang="en-US" sz="1500" dirty="0">
-                <a:solidFill>
-                  <a:srgbClr val="62727A"/>
-                </a:solidFill>
-                <a:latin typeface="Malgun Gothic" pitchFamily="34" charset="0"/>
-                <a:ea typeface="Malgun Gothic" pitchFamily="34" charset="-122"/>
-                <a:cs typeface="Malgun Gothic" pitchFamily="34" charset="-120"/>
-              </a:rPr>
-              <a:t>공개 발표·스마트폰 사용은 필수 아님</a:t>
-            </a:r>
-            <a:endParaRPr lang="en-US" sz="1500" dirty="0"/>
-          </a:p>
-        </p:txBody>
-      </p:sp>
-      <p:sp>
-        <p:nvSpPr>
-          <p:cNvPr id="15" name="Text 13"/>
+              <a:t>사전 확인 · 청취 환경 / 이동 동선 / 휴식 필요 / 참여 지원</a:t>
+            </a:r>
+            <a:endParaRPr lang="en-US" sz="1440" dirty="0"/>
+          </a:p>
+        </p:txBody>
+      </p:sp>
+      <p:sp>
+        <p:nvSpPr>
+          <p:cNvPr id="20" name="Text 18"/>
           <p:cNvSpPr/>
           <p:nvPr/>
         </p:nvSpPr>
@@ -10352,7 +11112,7 @@
       </p:sp>
       <p:sp>
         <p:nvSpPr>
-          <p:cNvPr id="16" name="Text 14"/>
+          <p:cNvPr id="21" name="Text 19"/>
           <p:cNvSpPr/>
           <p:nvPr/>
         </p:nvSpPr>
@@ -10502,7 +11262,7 @@
                 <a:ea typeface="Malgun Gothic" pitchFamily="34" charset="-122"/>
                 <a:cs typeface="Malgun Gothic" pitchFamily="34" charset="-120"/>
               </a:rPr>
-              <a:t>INSTRUCTOR</a:t>
+              <a:t>INSTRUCTOR &amp; PROPOSAL SCOPE</a:t>
             </a:r>
             <a:endParaRPr lang="en-US" sz="1320" dirty="0"/>
           </a:p>
@@ -10516,27 +11276,27 @@
         </p:nvSpPr>
         <p:spPr>
           <a:xfrm>
-            <a:off x="609600" y="1463040"/>
-            <a:ext cx="5486400" cy="1104900"/>
-          </a:xfrm>
-          <a:prstGeom prst="rect">
-            <a:avLst/>
-          </a:prstGeom>
-          <a:noFill/>
-          <a:ln/>
-        </p:spPr>
-        <p:txBody>
-          <a:bodyPr wrap="square" lIns="0" tIns="0" rIns="0" bIns="0" rtlCol="0" anchor="ctr"/>
-          <a:lstStyle/>
-          <a:p>
-            <a:pPr indent="0" marL="0">
-              <a:spcAft>
-                <a:spcPts val="800"/>
-              </a:spcAft>
-              <a:buNone/>
-            </a:pPr>
-            <a:r>
-              <a:rPr lang="en-US" sz="5880" b="1" dirty="0">
+            <a:off x="609600" y="1409700"/>
+            <a:ext cx="6019800" cy="1158240"/>
+          </a:xfrm>
+          <a:prstGeom prst="rect">
+            <a:avLst/>
+          </a:prstGeom>
+          <a:noFill/>
+          <a:ln/>
+        </p:spPr>
+        <p:txBody>
+          <a:bodyPr wrap="square" lIns="0" tIns="0" rIns="0" bIns="0" rtlCol="0" anchor="ctr"/>
+          <a:lstStyle/>
+          <a:p>
+            <a:pPr indent="0" marL="0">
+              <a:spcAft>
+                <a:spcPts val="800"/>
+              </a:spcAft>
+              <a:buNone/>
+            </a:pPr>
+            <a:r>
+              <a:rPr lang="en-US" sz="6360" b="1" dirty="0">
                 <a:solidFill>
                   <a:srgbClr val="132D40"/>
                 </a:solidFill>
@@ -10546,7 +11306,7 @@
               </a:rPr>
               <a:t>박새미</a:t>
             </a:r>
-            <a:endParaRPr lang="en-US" sz="5880" dirty="0"/>
+            <a:endParaRPr lang="en-US" sz="6360" dirty="0"/>
           </a:p>
         </p:txBody>
       </p:sp>
@@ -10558,27 +11318,27 @@
         </p:nvSpPr>
         <p:spPr>
           <a:xfrm>
-            <a:off x="647700" y="2567940"/>
-            <a:ext cx="5486400" cy="441960"/>
-          </a:xfrm>
-          <a:prstGeom prst="rect">
-            <a:avLst/>
-          </a:prstGeom>
-          <a:noFill/>
-          <a:ln/>
-        </p:spPr>
-        <p:txBody>
-          <a:bodyPr wrap="square" lIns="0" tIns="0" rIns="0" bIns="0" rtlCol="0" anchor="ctr"/>
-          <a:lstStyle/>
-          <a:p>
-            <a:pPr indent="0" marL="0">
-              <a:spcAft>
-                <a:spcPts val="800"/>
-              </a:spcAft>
-              <a:buNone/>
-            </a:pPr>
-            <a:r>
-              <a:rPr lang="en-US" sz="2100" b="1" dirty="0">
+            <a:off x="655320" y="2766060"/>
+            <a:ext cx="5867400" cy="441960"/>
+          </a:xfrm>
+          <a:prstGeom prst="rect">
+            <a:avLst/>
+          </a:prstGeom>
+          <a:noFill/>
+          <a:ln/>
+        </p:spPr>
+        <p:txBody>
+          <a:bodyPr wrap="square" lIns="0" tIns="0" rIns="0" bIns="0" rtlCol="0" anchor="ctr"/>
+          <a:lstStyle/>
+          <a:p>
+            <a:pPr indent="0" marL="0">
+              <a:spcAft>
+                <a:spcPts val="800"/>
+              </a:spcAft>
+              <a:buNone/>
+            </a:pPr>
+            <a:r>
+              <a:rPr lang="en-US" sz="2340" b="1" dirty="0">
                 <a:solidFill>
                   <a:srgbClr val="227C78"/>
                 </a:solidFill>
@@ -10588,154 +11348,30 @@
               </a:rPr>
               <a:t>돈스탑 잉글리시 운영자</a:t>
             </a:r>
-            <a:endParaRPr lang="en-US" sz="2100" dirty="0"/>
-          </a:p>
-        </p:txBody>
-      </p:sp>
-      <p:sp>
-        <p:nvSpPr>
-          <p:cNvPr id="6" name="Text 4"/>
-          <p:cNvSpPr/>
-          <p:nvPr/>
-        </p:nvSpPr>
-        <p:spPr>
-          <a:xfrm>
-            <a:off x="647700" y="3345180"/>
-            <a:ext cx="5486400" cy="1066800"/>
-          </a:xfrm>
-          <a:prstGeom prst="rect">
-            <a:avLst/>
-          </a:prstGeom>
-          <a:noFill/>
-          <a:ln/>
-        </p:spPr>
-        <p:txBody>
-          <a:bodyPr wrap="square" lIns="0" tIns="0" rIns="0" bIns="0" rtlCol="0" anchor="ctr"/>
-          <a:lstStyle/>
-          <a:p>
-            <a:pPr indent="0" marL="0">
-              <a:spcAft>
-                <a:spcPts val="800"/>
-              </a:spcAft>
-              <a:buNone/>
-            </a:pPr>
-            <a:r>
-              <a:rPr lang="en-US" sz="2220" dirty="0">
-                <a:solidFill>
-                  <a:srgbClr val="132D40"/>
-                </a:solidFill>
-                <a:latin typeface="Malgun Gothic" pitchFamily="34" charset="0"/>
-                <a:ea typeface="Malgun Gothic" pitchFamily="34" charset="-122"/>
-                <a:cs typeface="Malgun Gothic" pitchFamily="34" charset="-120"/>
-              </a:rPr>
-              <a:t>부천의 중장년·어르신을 위한</a:t>
-            </a:r>
-            <a:endParaRPr lang="en-US" sz="2220" dirty="0"/>
-          </a:p>
-          <a:p>
-            <a:pPr indent="0" marL="0">
-              <a:spcAft>
-                <a:spcPts val="800"/>
-              </a:spcAft>
-              <a:buNone/>
-            </a:pPr>
-            <a:r>
-              <a:rPr lang="en-US" sz="2220" dirty="0">
-                <a:solidFill>
-                  <a:srgbClr val="132D40"/>
-                </a:solidFill>
-                <a:latin typeface="Malgun Gothic" pitchFamily="34" charset="0"/>
-                <a:ea typeface="Malgun Gothic" pitchFamily="34" charset="-122"/>
-                <a:cs typeface="Malgun Gothic" pitchFamily="34" charset="-120"/>
-              </a:rPr>
-              <a:t>생활·여행 영어 출강을 제안합니다.</a:t>
-            </a:r>
-            <a:endParaRPr lang="en-US" sz="2220" dirty="0"/>
-          </a:p>
-        </p:txBody>
-      </p:sp>
-      <p:sp>
-        <p:nvSpPr>
-          <p:cNvPr id="7" name="Text 5"/>
-          <p:cNvSpPr/>
-          <p:nvPr/>
-        </p:nvSpPr>
-        <p:spPr>
-          <a:xfrm>
-            <a:off x="647700" y="4960620"/>
-            <a:ext cx="5486400" cy="685800"/>
-          </a:xfrm>
-          <a:prstGeom prst="rect">
-            <a:avLst/>
-          </a:prstGeom>
-          <a:noFill/>
-          <a:ln/>
-        </p:spPr>
-        <p:txBody>
-          <a:bodyPr wrap="square" lIns="0" tIns="0" rIns="0" bIns="0" rtlCol="0" anchor="ctr"/>
-          <a:lstStyle/>
-          <a:p>
-            <a:pPr indent="0" marL="0">
-              <a:spcAft>
-                <a:spcPts val="800"/>
-              </a:spcAft>
-              <a:buNone/>
-            </a:pPr>
-            <a:r>
-              <a:rPr lang="en-US" sz="1440" dirty="0">
-                <a:solidFill>
-                  <a:srgbClr val="62727A"/>
-                </a:solidFill>
-                <a:latin typeface="Malgun Gothic" pitchFamily="34" charset="0"/>
-                <a:ea typeface="Malgun Gothic" pitchFamily="34" charset="-122"/>
-                <a:cs typeface="Malgun Gothic" pitchFamily="34" charset="-120"/>
-              </a:rPr>
-              <a:t>개인 사진과 학력·경력·자격은</a:t>
-            </a:r>
-            <a:endParaRPr lang="en-US" sz="1440" dirty="0"/>
-          </a:p>
-          <a:p>
-            <a:pPr indent="0" marL="0">
-              <a:spcAft>
-                <a:spcPts val="800"/>
-              </a:spcAft>
-              <a:buNone/>
-            </a:pPr>
-            <a:r>
-              <a:rPr lang="en-US" sz="1440" dirty="0">
-                <a:solidFill>
-                  <a:srgbClr val="62727A"/>
-                </a:solidFill>
-                <a:latin typeface="Malgun Gothic" pitchFamily="34" charset="0"/>
-                <a:ea typeface="Malgun Gothic" pitchFamily="34" charset="-122"/>
-                <a:cs typeface="Malgun Gothic" pitchFamily="34" charset="-120"/>
-              </a:rPr>
-              <a:t>별도 강사 프로필 양식에서 작성합니다.</a:t>
-            </a:r>
-            <a:endParaRPr lang="en-US" sz="1440" dirty="0"/>
-          </a:p>
-        </p:txBody>
-      </p:sp>
-      <p:sp>
-        <p:nvSpPr>
-          <p:cNvPr id="8" name="Shape 6"/>
-          <p:cNvSpPr/>
-          <p:nvPr/>
-        </p:nvSpPr>
-        <p:spPr>
-          <a:xfrm>
-            <a:off x="7086600" y="1409700"/>
-            <a:ext cx="4457700" cy="4419600"/>
+            <a:endParaRPr lang="en-US" sz="2340" dirty="0"/>
+          </a:p>
+        </p:txBody>
+      </p:sp>
+      <p:sp>
+        <p:nvSpPr>
+          <p:cNvPr id="6" name="Shape 4"/>
+          <p:cNvSpPr/>
+          <p:nvPr/>
+        </p:nvSpPr>
+        <p:spPr>
+          <a:xfrm>
+            <a:off x="655320" y="3451860"/>
+            <a:ext cx="723900" cy="53340"/>
           </a:xfrm>
           <a:prstGeom prst="rect">
             <a:avLst/>
           </a:prstGeom>
           <a:solidFill>
-            <a:srgbClr val="132D40"/>
+            <a:srgbClr val="DC955B"/>
           </a:solidFill>
           <a:ln w="12700">
             <a:solidFill>
-              <a:srgbClr val="132D40"/>
+              <a:srgbClr val="DC955B"/>
             </a:solidFill>
             <a:prstDash val="solid"/>
           </a:ln>
@@ -10743,43 +11379,150 @@
       </p:sp>
       <p:sp>
         <p:nvSpPr>
+          <p:cNvPr id="7" name="Text 5"/>
+          <p:cNvSpPr/>
+          <p:nvPr/>
+        </p:nvSpPr>
+        <p:spPr>
+          <a:xfrm>
+            <a:off x="655320" y="3855720"/>
+            <a:ext cx="5943600" cy="1516380"/>
+          </a:xfrm>
+          <a:prstGeom prst="rect">
+            <a:avLst/>
+          </a:prstGeom>
+          <a:noFill/>
+          <a:ln/>
+        </p:spPr>
+        <p:txBody>
+          <a:bodyPr wrap="square" lIns="0" tIns="0" rIns="0" bIns="0" rtlCol="0" anchor="ctr"/>
+          <a:lstStyle/>
+          <a:p>
+            <a:pPr indent="0" marL="0">
+              <a:spcAft>
+                <a:spcPts val="800"/>
+              </a:spcAft>
+              <a:buNone/>
+            </a:pPr>
+            <a:r>
+              <a:rPr lang="en-US" sz="2220" dirty="0">
+                <a:solidFill>
+                  <a:srgbClr val="132D40"/>
+                </a:solidFill>
+                <a:latin typeface="Malgun Gothic" pitchFamily="34" charset="0"/>
+                <a:ea typeface="Malgun Gothic" pitchFamily="34" charset="-122"/>
+                <a:cs typeface="Malgun Gothic" pitchFamily="34" charset="-120"/>
+              </a:rPr>
+              <a:t>부천의 중장년·어르신과</a:t>
+            </a:r>
+            <a:endParaRPr lang="en-US" sz="2220" dirty="0"/>
+          </a:p>
+          <a:p>
+            <a:pPr indent="0" marL="0">
+              <a:spcAft>
+                <a:spcPts val="800"/>
+              </a:spcAft>
+              <a:buNone/>
+            </a:pPr>
+            <a:r>
+              <a:rPr lang="en-US" sz="2220" dirty="0">
+                <a:solidFill>
+                  <a:srgbClr val="132D40"/>
+                </a:solidFill>
+                <a:latin typeface="Malgun Gothic" pitchFamily="34" charset="0"/>
+                <a:ea typeface="Malgun Gothic" pitchFamily="34" charset="-122"/>
+                <a:cs typeface="Malgun Gothic" pitchFamily="34" charset="-120"/>
+              </a:rPr>
+              <a:t>생활 속 영어를 함께 연습하는</a:t>
+            </a:r>
+            <a:endParaRPr lang="en-US" sz="2220" dirty="0"/>
+          </a:p>
+          <a:p>
+            <a:pPr indent="0" marL="0">
+              <a:spcAft>
+                <a:spcPts val="800"/>
+              </a:spcAft>
+              <a:buNone/>
+            </a:pPr>
+            <a:r>
+              <a:rPr lang="en-US" sz="2220" dirty="0">
+                <a:solidFill>
+                  <a:srgbClr val="132D40"/>
+                </a:solidFill>
+                <a:latin typeface="Malgun Gothic" pitchFamily="34" charset="0"/>
+                <a:ea typeface="Malgun Gothic" pitchFamily="34" charset="-122"/>
+                <a:cs typeface="Malgun Gothic" pitchFamily="34" charset="-120"/>
+              </a:rPr>
+              <a:t>출강 프로그램을 제안합니다.</a:t>
+            </a:r>
+            <a:endParaRPr lang="en-US" sz="2220" dirty="0"/>
+          </a:p>
+        </p:txBody>
+      </p:sp>
+      <p:sp>
+        <p:nvSpPr>
+          <p:cNvPr id="8" name="Shape 6"/>
+          <p:cNvSpPr/>
+          <p:nvPr/>
+        </p:nvSpPr>
+        <p:spPr>
+          <a:xfrm>
+            <a:off x="7467600" y="1363980"/>
+            <a:ext cx="4114800" cy="4579620"/>
+          </a:xfrm>
+          <a:prstGeom prst="rect">
+            <a:avLst/>
+          </a:prstGeom>
+          <a:solidFill>
+            <a:srgbClr val="FFFFFF"/>
+          </a:solidFill>
+          <a:ln w="12700">
+            <a:solidFill>
+              <a:srgbClr val="FFFFFF"/>
+            </a:solidFill>
+            <a:prstDash val="solid"/>
+          </a:ln>
+        </p:spPr>
+      </p:sp>
+      <p:sp>
+        <p:nvSpPr>
           <p:cNvPr id="9" name="Text 7"/>
           <p:cNvSpPr/>
           <p:nvPr/>
         </p:nvSpPr>
         <p:spPr>
           <a:xfrm>
-            <a:off x="7360920" y="1699260"/>
-            <a:ext cx="3886200" cy="533400"/>
-          </a:xfrm>
-          <a:prstGeom prst="rect">
-            <a:avLst/>
-          </a:prstGeom>
-          <a:noFill/>
-          <a:ln/>
-        </p:spPr>
-        <p:txBody>
-          <a:bodyPr wrap="square" lIns="0" tIns="0" rIns="0" bIns="0" rtlCol="0" anchor="ctr"/>
-          <a:lstStyle/>
-          <a:p>
-            <a:pPr indent="0" marL="0">
-              <a:spcAft>
-                <a:spcPts val="800"/>
-              </a:spcAft>
-              <a:buNone/>
-            </a:pPr>
-            <a:r>
-              <a:rPr lang="en-US" sz="1800" b="1" dirty="0">
-                <a:solidFill>
-                  <a:srgbClr val="FFFFFF"/>
-                </a:solidFill>
-                <a:latin typeface="Malgun Gothic" pitchFamily="34" charset="0"/>
-                <a:ea typeface="Malgun Gothic" pitchFamily="34" charset="-122"/>
-                <a:cs typeface="Malgun Gothic" pitchFamily="34" charset="-120"/>
-              </a:rPr>
-              <a:t>출강 제안의 범위</a:t>
-            </a:r>
-            <a:endParaRPr lang="en-US" sz="1800" dirty="0"/>
+            <a:off x="7757160" y="1638300"/>
+            <a:ext cx="3550920" cy="480060"/>
+          </a:xfrm>
+          <a:prstGeom prst="rect">
+            <a:avLst/>
+          </a:prstGeom>
+          <a:noFill/>
+          <a:ln/>
+        </p:spPr>
+        <p:txBody>
+          <a:bodyPr wrap="square" lIns="0" tIns="0" rIns="0" bIns="0" rtlCol="0" anchor="ctr"/>
+          <a:lstStyle/>
+          <a:p>
+            <a:pPr indent="0" marL="0">
+              <a:spcAft>
+                <a:spcPts val="800"/>
+              </a:spcAft>
+              <a:buNone/>
+            </a:pPr>
+            <a:r>
+              <a:rPr lang="en-US" sz="2340" b="1" dirty="0">
+                <a:solidFill>
+                  <a:srgbClr val="227C78"/>
+                </a:solidFill>
+                <a:latin typeface="Malgun Gothic" pitchFamily="34" charset="0"/>
+                <a:ea typeface="Malgun Gothic" pitchFamily="34" charset="-122"/>
+                <a:cs typeface="Malgun Gothic" pitchFamily="34" charset="-120"/>
+              </a:rPr>
+              <a:t>출강 구성</a:t>
+            </a:r>
+            <a:endParaRPr lang="en-US" sz="2340" dirty="0"/>
           </a:p>
         </p:txBody>
       </p:sp>
@@ -10791,29 +11534,29 @@
         </p:nvSpPr>
         <p:spPr>
           <a:xfrm>
-            <a:off x="7360920" y="2499360"/>
-            <a:ext cx="3886200" cy="3124200"/>
-          </a:xfrm>
-          <a:prstGeom prst="rect">
-            <a:avLst/>
-          </a:prstGeom>
-          <a:noFill/>
-          <a:ln/>
-        </p:spPr>
-        <p:txBody>
-          <a:bodyPr wrap="square" lIns="0" tIns="0" rIns="0" bIns="0" rtlCol="0" anchor="ctr"/>
-          <a:lstStyle/>
-          <a:p>
-            <a:pPr indent="0" marL="0">
-              <a:spcAft>
-                <a:spcPts val="800"/>
-              </a:spcAft>
-              <a:buNone/>
-            </a:pPr>
-            <a:r>
-              <a:rPr lang="en-US" sz="1680" dirty="0">
-                <a:solidFill>
-                  <a:srgbClr val="DAE4E4"/>
+            <a:off x="7757160" y="2476500"/>
+            <a:ext cx="3467100" cy="228600"/>
+          </a:xfrm>
+          <a:prstGeom prst="rect">
+            <a:avLst/>
+          </a:prstGeom>
+          <a:noFill/>
+          <a:ln/>
+        </p:spPr>
+        <p:txBody>
+          <a:bodyPr wrap="square" lIns="0" tIns="0" rIns="0" bIns="0" rtlCol="0" anchor="ctr"/>
+          <a:lstStyle/>
+          <a:p>
+            <a:pPr indent="0" marL="0">
+              <a:spcAft>
+                <a:spcPts val="800"/>
+              </a:spcAft>
+              <a:buNone/>
+            </a:pPr>
+            <a:r>
+              <a:rPr lang="en-US" sz="1260" b="1" dirty="0">
+                <a:solidFill>
+                  <a:srgbClr val="62727A"/>
                 </a:solidFill>
                 <a:latin typeface="Malgun Gothic" pitchFamily="34" charset="0"/>
                 <a:ea typeface="Malgun Gothic" pitchFamily="34" charset="-122"/>
@@ -10821,19 +11564,41 @@
               </a:rPr>
               <a:t>대상</a:t>
             </a:r>
-            <a:endParaRPr lang="en-US" sz="1680" dirty="0"/>
-          </a:p>
-          <a:p>
-            <a:pPr indent="0" marL="0">
-              <a:spcAft>
-                <a:spcPts val="800"/>
-              </a:spcAft>
-              <a:buNone/>
-            </a:pPr>
-            <a:r>
-              <a:rPr lang="en-US" sz="1680" dirty="0">
-                <a:solidFill>
-                  <a:srgbClr val="DAE4E4"/>
+            <a:endParaRPr lang="en-US" sz="1260" dirty="0"/>
+          </a:p>
+        </p:txBody>
+      </p:sp>
+      <p:sp>
+        <p:nvSpPr>
+          <p:cNvPr id="11" name="Text 9"/>
+          <p:cNvSpPr/>
+          <p:nvPr/>
+        </p:nvSpPr>
+        <p:spPr>
+          <a:xfrm>
+            <a:off x="7757160" y="2781300"/>
+            <a:ext cx="3467100" cy="434340"/>
+          </a:xfrm>
+          <a:prstGeom prst="rect">
+            <a:avLst/>
+          </a:prstGeom>
+          <a:noFill/>
+          <a:ln/>
+        </p:spPr>
+        <p:txBody>
+          <a:bodyPr wrap="square" lIns="0" tIns="0" rIns="0" bIns="0" rtlCol="0" anchor="ctr"/>
+          <a:lstStyle/>
+          <a:p>
+            <a:pPr indent="0" marL="0">
+              <a:spcAft>
+                <a:spcPts val="800"/>
+              </a:spcAft>
+              <a:buNone/>
+            </a:pPr>
+            <a:r>
+              <a:rPr lang="en-US" sz="1620" b="1" dirty="0">
+                <a:solidFill>
+                  <a:srgbClr val="132D40"/>
                 </a:solidFill>
                 <a:latin typeface="Malgun Gothic" pitchFamily="34" charset="0"/>
                 <a:ea typeface="Malgun Gothic" pitchFamily="34" charset="-122"/>
@@ -10841,28 +11606,41 @@
               </a:rPr>
               <a:t>중장년·어르신</a:t>
             </a:r>
-            <a:endParaRPr lang="en-US" sz="1680" dirty="0"/>
-          </a:p>
-          <a:p>
-            <a:pPr indent="0" marL="0">
-              <a:spcAft>
-                <a:spcPts val="800"/>
-              </a:spcAft>
-              <a:buNone/>
-            </a:pPr>
-            <a:endParaRPr lang="en-US" sz="1680" dirty="0"/>
-          </a:p>
-          <a:p>
-            <a:pPr indent="0" marL="0">
-              <a:spcAft>
-                <a:spcPts val="800"/>
-              </a:spcAft>
-              <a:buNone/>
-            </a:pPr>
-            <a:r>
-              <a:rPr lang="en-US" sz="1680" dirty="0">
-                <a:solidFill>
-                  <a:srgbClr val="DAE4E4"/>
+            <a:endParaRPr lang="en-US" sz="1620" dirty="0"/>
+          </a:p>
+        </p:txBody>
+      </p:sp>
+      <p:sp>
+        <p:nvSpPr>
+          <p:cNvPr id="12" name="Text 10"/>
+          <p:cNvSpPr/>
+          <p:nvPr/>
+        </p:nvSpPr>
+        <p:spPr>
+          <a:xfrm>
+            <a:off x="7757160" y="3261360"/>
+            <a:ext cx="3467100" cy="228600"/>
+          </a:xfrm>
+          <a:prstGeom prst="rect">
+            <a:avLst/>
+          </a:prstGeom>
+          <a:noFill/>
+          <a:ln/>
+        </p:spPr>
+        <p:txBody>
+          <a:bodyPr wrap="square" lIns="0" tIns="0" rIns="0" bIns="0" rtlCol="0" anchor="ctr"/>
+          <a:lstStyle/>
+          <a:p>
+            <a:pPr indent="0" marL="0">
+              <a:spcAft>
+                <a:spcPts val="800"/>
+              </a:spcAft>
+              <a:buNone/>
+            </a:pPr>
+            <a:r>
+              <a:rPr lang="en-US" sz="1260" b="1" dirty="0">
+                <a:solidFill>
+                  <a:srgbClr val="62727A"/>
                 </a:solidFill>
                 <a:latin typeface="Malgun Gothic" pitchFamily="34" charset="0"/>
                 <a:ea typeface="Malgun Gothic" pitchFamily="34" charset="-122"/>
@@ -10870,48 +11648,83 @@
               </a:rPr>
               <a:t>규모</a:t>
             </a:r>
-            <a:endParaRPr lang="en-US" sz="1680" dirty="0"/>
-          </a:p>
-          <a:p>
-            <a:pPr indent="0" marL="0">
-              <a:spcAft>
-                <a:spcPts val="800"/>
-              </a:spcAft>
-              <a:buNone/>
-            </a:pPr>
-            <a:r>
-              <a:rPr lang="en-US" sz="1680" dirty="0">
-                <a:solidFill>
-                  <a:srgbClr val="DAE4E4"/>
-                </a:solidFill>
-                <a:latin typeface="Malgun Gothic" pitchFamily="34" charset="0"/>
-                <a:ea typeface="Malgun Gothic" pitchFamily="34" charset="-122"/>
-                <a:cs typeface="Malgun Gothic" pitchFamily="34" charset="-120"/>
-              </a:rPr>
-              <a:t>2~3인 / 10명 이상</a:t>
-            </a:r>
-            <a:endParaRPr lang="en-US" sz="1680" dirty="0"/>
-          </a:p>
-          <a:p>
-            <a:pPr indent="0" marL="0">
-              <a:spcAft>
-                <a:spcPts val="800"/>
-              </a:spcAft>
-              <a:buNone/>
-            </a:pPr>
-            <a:endParaRPr lang="en-US" sz="1680" dirty="0"/>
-          </a:p>
-          <a:p>
-            <a:pPr indent="0" marL="0">
-              <a:spcAft>
-                <a:spcPts val="800"/>
-              </a:spcAft>
-              <a:buNone/>
-            </a:pPr>
-            <a:r>
-              <a:rPr lang="en-US" sz="1680" dirty="0">
-                <a:solidFill>
-                  <a:srgbClr val="DAE4E4"/>
+            <a:endParaRPr lang="en-US" sz="1260" dirty="0"/>
+          </a:p>
+        </p:txBody>
+      </p:sp>
+      <p:sp>
+        <p:nvSpPr>
+          <p:cNvPr id="13" name="Text 11"/>
+          <p:cNvSpPr/>
+          <p:nvPr/>
+        </p:nvSpPr>
+        <p:spPr>
+          <a:xfrm>
+            <a:off x="7757160" y="3566160"/>
+            <a:ext cx="3467100" cy="434340"/>
+          </a:xfrm>
+          <a:prstGeom prst="rect">
+            <a:avLst/>
+          </a:prstGeom>
+          <a:noFill/>
+          <a:ln/>
+        </p:spPr>
+        <p:txBody>
+          <a:bodyPr wrap="square" lIns="0" tIns="0" rIns="0" bIns="0" rtlCol="0" anchor="ctr"/>
+          <a:lstStyle/>
+          <a:p>
+            <a:pPr indent="0" marL="0">
+              <a:spcAft>
+                <a:spcPts val="800"/>
+              </a:spcAft>
+              <a:buNone/>
+            </a:pPr>
+            <a:r>
+              <a:rPr lang="en-US" sz="1620" b="1" dirty="0">
+                <a:solidFill>
+                  <a:srgbClr val="132D40"/>
+                </a:solidFill>
+                <a:latin typeface="Malgun Gothic" pitchFamily="34" charset="0"/>
+                <a:ea typeface="Malgun Gothic" pitchFamily="34" charset="-122"/>
+                <a:cs typeface="Malgun Gothic" pitchFamily="34" charset="-120"/>
+              </a:rPr>
+              <a:t>10명 이상 단체 / 2~3인 모임</a:t>
+            </a:r>
+            <a:endParaRPr lang="en-US" sz="1620" dirty="0"/>
+          </a:p>
+        </p:txBody>
+      </p:sp>
+      <p:sp>
+        <p:nvSpPr>
+          <p:cNvPr id="14" name="Text 12"/>
+          <p:cNvSpPr/>
+          <p:nvPr/>
+        </p:nvSpPr>
+        <p:spPr>
+          <a:xfrm>
+            <a:off x="7757160" y="4046220"/>
+            <a:ext cx="3467100" cy="228600"/>
+          </a:xfrm>
+          <a:prstGeom prst="rect">
+            <a:avLst/>
+          </a:prstGeom>
+          <a:noFill/>
+          <a:ln/>
+        </p:spPr>
+        <p:txBody>
+          <a:bodyPr wrap="square" lIns="0" tIns="0" rIns="0" bIns="0" rtlCol="0" anchor="ctr"/>
+          <a:lstStyle/>
+          <a:p>
+            <a:pPr indent="0" marL="0">
+              <a:spcAft>
+                <a:spcPts val="800"/>
+              </a:spcAft>
+              <a:buNone/>
+            </a:pPr>
+            <a:r>
+              <a:rPr lang="en-US" sz="1260" b="1" dirty="0">
+                <a:solidFill>
+                  <a:srgbClr val="62727A"/>
                 </a:solidFill>
                 <a:latin typeface="Malgun Gothic" pitchFamily="34" charset="0"/>
                 <a:ea typeface="Malgun Gothic" pitchFamily="34" charset="-122"/>
@@ -10919,33 +11732,139 @@
               </a:rPr>
               <a:t>시간</a:t>
             </a:r>
-            <a:endParaRPr lang="en-US" sz="1680" dirty="0"/>
-          </a:p>
-          <a:p>
-            <a:pPr indent="0" marL="0">
-              <a:spcAft>
-                <a:spcPts val="800"/>
-              </a:spcAft>
-              <a:buNone/>
-            </a:pPr>
-            <a:r>
-              <a:rPr lang="en-US" sz="1680" dirty="0">
-                <a:solidFill>
-                  <a:srgbClr val="DAE4E4"/>
-                </a:solidFill>
-                <a:latin typeface="Malgun Gothic" pitchFamily="34" charset="0"/>
-                <a:ea typeface="Malgun Gothic" pitchFamily="34" charset="-122"/>
-                <a:cs typeface="Malgun Gothic" pitchFamily="34" charset="-120"/>
-              </a:rPr>
-              <a:t>1~2시간 · 조건 협의</a:t>
-            </a:r>
-            <a:endParaRPr lang="en-US" sz="1680" dirty="0"/>
-          </a:p>
-        </p:txBody>
-      </p:sp>
-      <p:sp>
-        <p:nvSpPr>
-          <p:cNvPr id="11" name="Text 9"/>
+            <a:endParaRPr lang="en-US" sz="1260" dirty="0"/>
+          </a:p>
+        </p:txBody>
+      </p:sp>
+      <p:sp>
+        <p:nvSpPr>
+          <p:cNvPr id="15" name="Text 13"/>
+          <p:cNvSpPr/>
+          <p:nvPr/>
+        </p:nvSpPr>
+        <p:spPr>
+          <a:xfrm>
+            <a:off x="7757160" y="4351020"/>
+            <a:ext cx="3467100" cy="434340"/>
+          </a:xfrm>
+          <a:prstGeom prst="rect">
+            <a:avLst/>
+          </a:prstGeom>
+          <a:noFill/>
+          <a:ln/>
+        </p:spPr>
+        <p:txBody>
+          <a:bodyPr wrap="square" lIns="0" tIns="0" rIns="0" bIns="0" rtlCol="0" anchor="ctr"/>
+          <a:lstStyle/>
+          <a:p>
+            <a:pPr indent="0" marL="0">
+              <a:spcAft>
+                <a:spcPts val="800"/>
+              </a:spcAft>
+              <a:buNone/>
+            </a:pPr>
+            <a:r>
+              <a:rPr lang="en-US" sz="1620" b="1" dirty="0">
+                <a:solidFill>
+                  <a:srgbClr val="132D40"/>
+                </a:solidFill>
+                <a:latin typeface="Malgun Gothic" pitchFamily="34" charset="0"/>
+                <a:ea typeface="Malgun Gothic" pitchFamily="34" charset="-122"/>
+                <a:cs typeface="Malgun Gothic" pitchFamily="34" charset="-120"/>
+              </a:rPr>
+              <a:t>60·90·120분 중 협의</a:t>
+            </a:r>
+            <a:endParaRPr lang="en-US" sz="1620" dirty="0"/>
+          </a:p>
+        </p:txBody>
+      </p:sp>
+      <p:sp>
+        <p:nvSpPr>
+          <p:cNvPr id="16" name="Text 14"/>
+          <p:cNvSpPr/>
+          <p:nvPr/>
+        </p:nvSpPr>
+        <p:spPr>
+          <a:xfrm>
+            <a:off x="7757160" y="4831080"/>
+            <a:ext cx="3467100" cy="228600"/>
+          </a:xfrm>
+          <a:prstGeom prst="rect">
+            <a:avLst/>
+          </a:prstGeom>
+          <a:noFill/>
+          <a:ln/>
+        </p:spPr>
+        <p:txBody>
+          <a:bodyPr wrap="square" lIns="0" tIns="0" rIns="0" bIns="0" rtlCol="0" anchor="ctr"/>
+          <a:lstStyle/>
+          <a:p>
+            <a:pPr indent="0" marL="0">
+              <a:spcAft>
+                <a:spcPts val="800"/>
+              </a:spcAft>
+              <a:buNone/>
+            </a:pPr>
+            <a:r>
+              <a:rPr lang="en-US" sz="1260" b="1" dirty="0">
+                <a:solidFill>
+                  <a:srgbClr val="62727A"/>
+                </a:solidFill>
+                <a:latin typeface="Malgun Gothic" pitchFamily="34" charset="0"/>
+                <a:ea typeface="Malgun Gothic" pitchFamily="34" charset="-122"/>
+                <a:cs typeface="Malgun Gothic" pitchFamily="34" charset="-120"/>
+              </a:rPr>
+              <a:t>제출 자료</a:t>
+            </a:r>
+            <a:endParaRPr lang="en-US" sz="1260" dirty="0"/>
+          </a:p>
+        </p:txBody>
+      </p:sp>
+      <p:sp>
+        <p:nvSpPr>
+          <p:cNvPr id="17" name="Text 15"/>
+          <p:cNvSpPr/>
+          <p:nvPr/>
+        </p:nvSpPr>
+        <p:spPr>
+          <a:xfrm>
+            <a:off x="7757160" y="5135880"/>
+            <a:ext cx="3467100" cy="434340"/>
+          </a:xfrm>
+          <a:prstGeom prst="rect">
+            <a:avLst/>
+          </a:prstGeom>
+          <a:noFill/>
+          <a:ln/>
+        </p:spPr>
+        <p:txBody>
+          <a:bodyPr wrap="square" lIns="0" tIns="0" rIns="0" bIns="0" rtlCol="0" anchor="ctr"/>
+          <a:lstStyle/>
+          <a:p>
+            <a:pPr indent="0" marL="0">
+              <a:spcAft>
+                <a:spcPts val="800"/>
+              </a:spcAft>
+              <a:buNone/>
+            </a:pPr>
+            <a:r>
+              <a:rPr lang="en-US" sz="1620" b="1" dirty="0">
+                <a:solidFill>
+                  <a:srgbClr val="132D40"/>
+                </a:solidFill>
+                <a:latin typeface="Malgun Gothic" pitchFamily="34" charset="0"/>
+                <a:ea typeface="Malgun Gothic" pitchFamily="34" charset="-122"/>
+                <a:cs typeface="Malgun Gothic" pitchFamily="34" charset="-120"/>
+              </a:rPr>
+              <a:t>사진·학력·경력 기입형 프로필 별첨</a:t>
+            </a:r>
+            <a:endParaRPr lang="en-US" sz="1620" dirty="0"/>
+          </a:p>
+        </p:txBody>
+      </p:sp>
+      <p:sp>
+        <p:nvSpPr>
+          <p:cNvPr id="18" name="Text 16"/>
           <p:cNvSpPr/>
           <p:nvPr/>
         </p:nvSpPr>
@@ -10987,7 +11906,7 @@
       </p:sp>
       <p:sp>
         <p:nvSpPr>
-          <p:cNvPr id="12" name="Text 10"/>
+          <p:cNvPr id="19" name="Text 17"/>
           <p:cNvSpPr/>
           <p:nvPr/>
         </p:nvSpPr>
